--- a/Financial-Analytics-with-Python-in-Excel.pptx
+++ b/Financial-Analytics-with-Python-in-Excel.pptx
@@ -2843,6 +2843,7 @@
         </p:nvPicPr>
         <p:blipFill>
           <a:blip r:embed="rId1"/>
+          <a:srcRect l="9716" t="36914" r="6931" b="47496"/>
           <a:stretch>
             <a:fillRect/>
           </a:stretch>
@@ -2850,7 +2851,7 @@
         <p:spPr>
           <a:xfrm>
             <a:off x="640080" y="457200"/>
-            <a:ext cx="2743200" cy="374904"/>
+            <a:ext cx="2743200" cy="376288"/>
           </a:xfrm>
           <a:prstGeom prst="rect">
             <a:avLst/>
@@ -3112,7 +3113,7 @@
         <p:spPr>
           <a:xfrm>
             <a:off x="9646920" y="2103120"/>
-            <a:ext cx="2148840" cy="781812"/>
+            <a:ext cx="2148840" cy="782675"/>
           </a:xfrm>
           <a:prstGeom prst="rect">
             <a:avLst/>
@@ -3136,7 +3137,7 @@
         <p:spPr>
           <a:xfrm>
             <a:off x="10378440" y="3063240"/>
-            <a:ext cx="868680" cy="658368"/>
+            <a:ext cx="868680" cy="660197"/>
           </a:xfrm>
           <a:prstGeom prst="rect">
             <a:avLst/>
@@ -3261,6 +3262,7 @@
         </p:nvPicPr>
         <p:blipFill>
           <a:blip r:embed="rId1"/>
+          <a:srcRect l="9716" t="36914" r="6931" b="47496"/>
           <a:stretch>
             <a:fillRect/>
           </a:stretch>
@@ -3268,7 +3270,7 @@
         <p:spPr>
           <a:xfrm>
             <a:off x="640080" y="457200"/>
-            <a:ext cx="2743200" cy="374904"/>
+            <a:ext cx="2743200" cy="376288"/>
           </a:xfrm>
           <a:prstGeom prst="rect">
             <a:avLst/>
@@ -3662,6 +3664,7 @@
         </p:nvPicPr>
         <p:blipFill>
           <a:blip r:embed="rId1"/>
+          <a:srcRect l="9716" t="36914" r="6931" b="47496"/>
           <a:stretch>
             <a:fillRect/>
           </a:stretch>
@@ -3669,7 +3672,7 @@
         <p:spPr>
           <a:xfrm>
             <a:off x="640080" y="457200"/>
-            <a:ext cx="2743200" cy="374904"/>
+            <a:ext cx="2743200" cy="376288"/>
           </a:xfrm>
           <a:prstGeom prst="rect">
             <a:avLst/>
@@ -4121,30 +4124,6 @@
           </a:p>
         </p:txBody>
       </p:sp>
-      <p:pic>
-        <p:nvPicPr>
-          <p:cNvPr id="10" name="Image 1" descr="assets/stringfest-chevron-red.png">    </p:cNvPr>
-          <p:cNvPicPr>
-            <a:picLocks noChangeAspect="1"/>
-          </p:cNvPicPr>
-          <p:nvPr/>
-        </p:nvPicPr>
-        <p:blipFill>
-          <a:blip r:embed="rId2"/>
-          <a:stretch>
-            <a:fillRect/>
-          </a:stretch>
-        </p:blipFill>
-        <p:spPr>
-          <a:xfrm>
-            <a:off x="11292840" y="5715000"/>
-            <a:ext cx="896112" cy="1024128"/>
-          </a:xfrm>
-          <a:prstGeom prst="rect">
-            <a:avLst/>
-          </a:prstGeom>
-        </p:spPr>
-      </p:pic>
     </p:spTree>
   </p:cSld>
   <p:clrMapOvr>
@@ -4187,6 +4166,7 @@
         </p:nvPicPr>
         <p:blipFill>
           <a:blip r:embed="rId1"/>
+          <a:srcRect l="9716" t="36914" r="6931" b="47496"/>
           <a:stretch>
             <a:fillRect/>
           </a:stretch>
@@ -4194,7 +4174,7 @@
         <p:spPr>
           <a:xfrm>
             <a:off x="640080" y="457200"/>
-            <a:ext cx="2743200" cy="374904"/>
+            <a:ext cx="2743200" cy="376288"/>
           </a:xfrm>
           <a:prstGeom prst="rect">
             <a:avLst/>
@@ -4403,30 +4383,6 @@
           </a:p>
         </p:txBody>
       </p:sp>
-      <p:pic>
-        <p:nvPicPr>
-          <p:cNvPr id="6" name="Image 1" descr="assets/stringfest-chevron-red.png">    </p:cNvPr>
-          <p:cNvPicPr>
-            <a:picLocks noChangeAspect="1"/>
-          </p:cNvPicPr>
-          <p:nvPr/>
-        </p:nvPicPr>
-        <p:blipFill>
-          <a:blip r:embed="rId2"/>
-          <a:stretch>
-            <a:fillRect/>
-          </a:stretch>
-        </p:blipFill>
-        <p:spPr>
-          <a:xfrm>
-            <a:off x="11292840" y="5715000"/>
-            <a:ext cx="896112" cy="1024128"/>
-          </a:xfrm>
-          <a:prstGeom prst="rect">
-            <a:avLst/>
-          </a:prstGeom>
-        </p:spPr>
-      </p:pic>
     </p:spTree>
   </p:cSld>
   <p:clrMapOvr>
@@ -4618,6 +4574,7 @@
         </p:nvPicPr>
         <p:blipFill>
           <a:blip r:embed="rId1"/>
+          <a:srcRect l="9716" t="36914" r="6931" b="47496"/>
           <a:stretch>
             <a:fillRect/>
           </a:stretch>
@@ -4625,7 +4582,7 @@
         <p:spPr>
           <a:xfrm>
             <a:off x="640080" y="457200"/>
-            <a:ext cx="2743200" cy="374904"/>
+            <a:ext cx="2743200" cy="376288"/>
           </a:xfrm>
           <a:prstGeom prst="rect">
             <a:avLst/>
@@ -4943,30 +4900,6 @@
           </a:p>
         </p:txBody>
       </p:sp>
-      <p:pic>
-        <p:nvPicPr>
-          <p:cNvPr id="8" name="Image 1" descr="assets/stringfest-chevron-red.png">    </p:cNvPr>
-          <p:cNvPicPr>
-            <a:picLocks noChangeAspect="1"/>
-          </p:cNvPicPr>
-          <p:nvPr/>
-        </p:nvPicPr>
-        <p:blipFill>
-          <a:blip r:embed="rId2"/>
-          <a:stretch>
-            <a:fillRect/>
-          </a:stretch>
-        </p:blipFill>
-        <p:spPr>
-          <a:xfrm>
-            <a:off x="11292840" y="5715000"/>
-            <a:ext cx="896112" cy="1024128"/>
-          </a:xfrm>
-          <a:prstGeom prst="rect">
-            <a:avLst/>
-          </a:prstGeom>
-        </p:spPr>
-      </p:pic>
     </p:spTree>
   </p:cSld>
   <p:clrMapOvr>
@@ -5009,6 +4942,7 @@
         </p:nvPicPr>
         <p:blipFill>
           <a:blip r:embed="rId1"/>
+          <a:srcRect l="9716" t="36914" r="6931" b="47496"/>
           <a:stretch>
             <a:fillRect/>
           </a:stretch>
@@ -5016,7 +4950,7 @@
         <p:spPr>
           <a:xfrm>
             <a:off x="640080" y="457200"/>
-            <a:ext cx="2743200" cy="374904"/>
+            <a:ext cx="2743200" cy="376288"/>
           </a:xfrm>
           <a:prstGeom prst="rect">
             <a:avLst/>
@@ -5428,30 +5362,6 @@
           </a:p>
         </p:txBody>
       </p:sp>
-      <p:pic>
-        <p:nvPicPr>
-          <p:cNvPr id="10" name="Image 1" descr="assets/stringfest-chevron-red.png">    </p:cNvPr>
-          <p:cNvPicPr>
-            <a:picLocks noChangeAspect="1"/>
-          </p:cNvPicPr>
-          <p:nvPr/>
-        </p:nvPicPr>
-        <p:blipFill>
-          <a:blip r:embed="rId2"/>
-          <a:stretch>
-            <a:fillRect/>
-          </a:stretch>
-        </p:blipFill>
-        <p:spPr>
-          <a:xfrm>
-            <a:off x="11292840" y="5715000"/>
-            <a:ext cx="896112" cy="1024128"/>
-          </a:xfrm>
-          <a:prstGeom prst="rect">
-            <a:avLst/>
-          </a:prstGeom>
-        </p:spPr>
-      </p:pic>
     </p:spTree>
   </p:cSld>
   <p:clrMapOvr>
@@ -5494,6 +5404,7 @@
         </p:nvPicPr>
         <p:blipFill>
           <a:blip r:embed="rId1"/>
+          <a:srcRect l="9716" t="36914" r="6931" b="47496"/>
           <a:stretch>
             <a:fillRect/>
           </a:stretch>
@@ -5501,7 +5412,7 @@
         <p:spPr>
           <a:xfrm>
             <a:off x="640080" y="457200"/>
-            <a:ext cx="2743200" cy="374904"/>
+            <a:ext cx="2743200" cy="376288"/>
           </a:xfrm>
           <a:prstGeom prst="rect">
             <a:avLst/>
@@ -5893,30 +5804,6 @@
           </a:p>
         </p:txBody>
       </p:sp>
-      <p:pic>
-        <p:nvPicPr>
-          <p:cNvPr id="10" name="Image 1" descr="assets/stringfest-chevron-red.png">    </p:cNvPr>
-          <p:cNvPicPr>
-            <a:picLocks noChangeAspect="1"/>
-          </p:cNvPicPr>
-          <p:nvPr/>
-        </p:nvPicPr>
-        <p:blipFill>
-          <a:blip r:embed="rId2"/>
-          <a:stretch>
-            <a:fillRect/>
-          </a:stretch>
-        </p:blipFill>
-        <p:spPr>
-          <a:xfrm>
-            <a:off x="11292840" y="5715000"/>
-            <a:ext cx="896112" cy="1024128"/>
-          </a:xfrm>
-          <a:prstGeom prst="rect">
-            <a:avLst/>
-          </a:prstGeom>
-        </p:spPr>
-      </p:pic>
     </p:spTree>
   </p:cSld>
   <p:clrMapOvr>
@@ -5959,6 +5846,7 @@
         </p:nvPicPr>
         <p:blipFill>
           <a:blip r:embed="rId1"/>
+          <a:srcRect l="9716" t="36914" r="6931" b="47496"/>
           <a:stretch>
             <a:fillRect/>
           </a:stretch>
@@ -5966,7 +5854,7 @@
         <p:spPr>
           <a:xfrm>
             <a:off x="640080" y="457200"/>
-            <a:ext cx="2743200" cy="374904"/>
+            <a:ext cx="2743200" cy="376288"/>
           </a:xfrm>
           <a:prstGeom prst="rect">
             <a:avLst/>
@@ -6360,6 +6248,7 @@
         </p:nvPicPr>
         <p:blipFill>
           <a:blip r:embed="rId1"/>
+          <a:srcRect l="9716" t="36914" r="6931" b="47496"/>
           <a:stretch>
             <a:fillRect/>
           </a:stretch>
@@ -6367,7 +6256,7 @@
         <p:spPr>
           <a:xfrm>
             <a:off x="640080" y="457200"/>
-            <a:ext cx="2743200" cy="374904"/>
+            <a:ext cx="2743200" cy="376288"/>
           </a:xfrm>
           <a:prstGeom prst="rect">
             <a:avLst/>
@@ -6782,6 +6671,7 @@
         </p:nvPicPr>
         <p:blipFill>
           <a:blip r:embed="rId1"/>
+          <a:srcRect l="9716" t="36914" r="6931" b="47496"/>
           <a:stretch>
             <a:fillRect/>
           </a:stretch>
@@ -6789,7 +6679,7 @@
         <p:spPr>
           <a:xfrm>
             <a:off x="640080" y="457200"/>
-            <a:ext cx="2743200" cy="374904"/>
+            <a:ext cx="2743200" cy="376288"/>
           </a:xfrm>
           <a:prstGeom prst="rect">
             <a:avLst/>
@@ -6993,30 +6883,6 @@
           </a:p>
         </p:txBody>
       </p:sp>
-      <p:pic>
-        <p:nvPicPr>
-          <p:cNvPr id="7" name="Image 1" descr="assets/stringfest-chevron-red.png">    </p:cNvPr>
-          <p:cNvPicPr>
-            <a:picLocks noChangeAspect="1"/>
-          </p:cNvPicPr>
-          <p:nvPr/>
-        </p:nvPicPr>
-        <p:blipFill>
-          <a:blip r:embed="rId2"/>
-          <a:stretch>
-            <a:fillRect/>
-          </a:stretch>
-        </p:blipFill>
-        <p:spPr>
-          <a:xfrm>
-            <a:off x="11292840" y="5715000"/>
-            <a:ext cx="896112" cy="1024128"/>
-          </a:xfrm>
-          <a:prstGeom prst="rect">
-            <a:avLst/>
-          </a:prstGeom>
-        </p:spPr>
-      </p:pic>
     </p:spTree>
   </p:cSld>
   <p:clrMapOvr>
@@ -7184,7 +7050,7 @@
         <p:spPr>
           <a:xfrm>
             <a:off x="8869680" y="2651760"/>
-            <a:ext cx="2651760" cy="964692"/>
+            <a:ext cx="2651760" cy="965854"/>
           </a:xfrm>
           <a:prstGeom prst="rect">
             <a:avLst/>
@@ -7208,7 +7074,7 @@
         <p:spPr>
           <a:xfrm>
             <a:off x="9829800" y="3977640"/>
-            <a:ext cx="1051560" cy="795528"/>
+            <a:ext cx="1051560" cy="799186"/>
           </a:xfrm>
           <a:prstGeom prst="rect">
             <a:avLst/>
@@ -7257,6 +7123,7 @@
         </p:nvPicPr>
         <p:blipFill>
           <a:blip r:embed="rId1"/>
+          <a:srcRect l="9716" t="36914" r="6931" b="47496"/>
           <a:stretch>
             <a:fillRect/>
           </a:stretch>
@@ -7264,7 +7131,7 @@
         <p:spPr>
           <a:xfrm>
             <a:off x="640080" y="457200"/>
-            <a:ext cx="2743200" cy="374904"/>
+            <a:ext cx="2743200" cy="376288"/>
           </a:xfrm>
           <a:prstGeom prst="rect">
             <a:avLst/>
@@ -7803,6 +7670,7 @@
         </p:nvPicPr>
         <p:blipFill>
           <a:blip r:embed="rId1"/>
+          <a:srcRect l="9716" t="36914" r="6931" b="47496"/>
           <a:stretch>
             <a:fillRect/>
           </a:stretch>
@@ -7810,7 +7678,7 @@
         <p:spPr>
           <a:xfrm>
             <a:off x="640080" y="457200"/>
-            <a:ext cx="2743200" cy="374904"/>
+            <a:ext cx="2743200" cy="376288"/>
           </a:xfrm>
           <a:prstGeom prst="rect">
             <a:avLst/>
@@ -8072,30 +7940,6 @@
           </a:p>
         </p:txBody>
       </p:sp>
-      <p:pic>
-        <p:nvPicPr>
-          <p:cNvPr id="8" name="Image 2" descr="assets/stringfest-chevron-red.png">    </p:cNvPr>
-          <p:cNvPicPr>
-            <a:picLocks noChangeAspect="1"/>
-          </p:cNvPicPr>
-          <p:nvPr/>
-        </p:nvPicPr>
-        <p:blipFill>
-          <a:blip r:embed="rId3"/>
-          <a:stretch>
-            <a:fillRect/>
-          </a:stretch>
-        </p:blipFill>
-        <p:spPr>
-          <a:xfrm>
-            <a:off x="11292840" y="5715000"/>
-            <a:ext cx="896112" cy="1024128"/>
-          </a:xfrm>
-          <a:prstGeom prst="rect">
-            <a:avLst/>
-          </a:prstGeom>
-        </p:spPr>
-      </p:pic>
     </p:spTree>
   </p:cSld>
   <p:clrMapOvr>
@@ -8138,6 +7982,7 @@
         </p:nvPicPr>
         <p:blipFill>
           <a:blip r:embed="rId1"/>
+          <a:srcRect l="9716" t="36914" r="6931" b="47496"/>
           <a:stretch>
             <a:fillRect/>
           </a:stretch>
@@ -8145,7 +7990,7 @@
         <p:spPr>
           <a:xfrm>
             <a:off x="640080" y="457200"/>
-            <a:ext cx="2743200" cy="374904"/>
+            <a:ext cx="2743200" cy="376288"/>
           </a:xfrm>
           <a:prstGeom prst="rect">
             <a:avLst/>
@@ -8352,30 +8197,6 @@
           </a:p>
         </p:txBody>
       </p:sp>
-      <p:pic>
-        <p:nvPicPr>
-          <p:cNvPr id="6" name="Image 1" descr="assets/stringfest-chevron-red.png">    </p:cNvPr>
-          <p:cNvPicPr>
-            <a:picLocks noChangeAspect="1"/>
-          </p:cNvPicPr>
-          <p:nvPr/>
-        </p:nvPicPr>
-        <p:blipFill>
-          <a:blip r:embed="rId2"/>
-          <a:stretch>
-            <a:fillRect/>
-          </a:stretch>
-        </p:blipFill>
-        <p:spPr>
-          <a:xfrm>
-            <a:off x="11292840" y="5715000"/>
-            <a:ext cx="896112" cy="1024128"/>
-          </a:xfrm>
-          <a:prstGeom prst="rect">
-            <a:avLst/>
-          </a:prstGeom>
-        </p:spPr>
-      </p:pic>
     </p:spTree>
   </p:cSld>
   <p:clrMapOvr>
@@ -8418,6 +8239,7 @@
         </p:nvPicPr>
         <p:blipFill>
           <a:blip r:embed="rId1"/>
+          <a:srcRect l="9716" t="36914" r="6931" b="47496"/>
           <a:stretch>
             <a:fillRect/>
           </a:stretch>
@@ -8425,7 +8247,7 @@
         <p:spPr>
           <a:xfrm>
             <a:off x="822960" y="731520"/>
-            <a:ext cx="3108960" cy="426110"/>
+            <a:ext cx="3108960" cy="426460"/>
           </a:xfrm>
           <a:prstGeom prst="rect">
             <a:avLst/>
@@ -8587,7 +8409,7 @@
         <p:spPr>
           <a:xfrm>
             <a:off x="9052560" y="5074920"/>
-            <a:ext cx="2377440" cy="865022"/>
+            <a:ext cx="2377440" cy="865938"/>
           </a:xfrm>
           <a:prstGeom prst="rect">
             <a:avLst/>
@@ -8834,6 +8656,7 @@
         </p:nvPicPr>
         <p:blipFill>
           <a:blip r:embed="rId1"/>
+          <a:srcRect l="9716" t="36914" r="6931" b="47496"/>
           <a:stretch>
             <a:fillRect/>
           </a:stretch>
@@ -8841,7 +8664,7 @@
         <p:spPr>
           <a:xfrm>
             <a:off x="640080" y="457200"/>
-            <a:ext cx="2743200" cy="374904"/>
+            <a:ext cx="2743200" cy="376288"/>
           </a:xfrm>
           <a:prstGeom prst="rect">
             <a:avLst/>
@@ -9294,30 +9117,6 @@
           </a:p>
         </p:txBody>
       </p:sp>
-      <p:pic>
-        <p:nvPicPr>
-          <p:cNvPr id="10" name="Image 1" descr="assets/stringfest-chevron-red.png">    </p:cNvPr>
-          <p:cNvPicPr>
-            <a:picLocks noChangeAspect="1"/>
-          </p:cNvPicPr>
-          <p:nvPr/>
-        </p:nvPicPr>
-        <p:blipFill>
-          <a:blip r:embed="rId2"/>
-          <a:stretch>
-            <a:fillRect/>
-          </a:stretch>
-        </p:blipFill>
-        <p:spPr>
-          <a:xfrm>
-            <a:off x="11292840" y="5715000"/>
-            <a:ext cx="896112" cy="1024128"/>
-          </a:xfrm>
-          <a:prstGeom prst="rect">
-            <a:avLst/>
-          </a:prstGeom>
-        </p:spPr>
-      </p:pic>
     </p:spTree>
   </p:cSld>
   <p:clrMapOvr>
@@ -9360,6 +9159,7 @@
         </p:nvPicPr>
         <p:blipFill>
           <a:blip r:embed="rId1"/>
+          <a:srcRect l="9716" t="36914" r="6931" b="47496"/>
           <a:stretch>
             <a:fillRect/>
           </a:stretch>
@@ -9367,7 +9167,7 @@
         <p:spPr>
           <a:xfrm>
             <a:off x="640080" y="457200"/>
-            <a:ext cx="2743200" cy="374904"/>
+            <a:ext cx="2743200" cy="376288"/>
           </a:xfrm>
           <a:prstGeom prst="rect">
             <a:avLst/>
@@ -10055,6 +9855,7 @@
         </p:nvPicPr>
         <p:blipFill>
           <a:blip r:embed="rId1"/>
+          <a:srcRect l="9716" t="36914" r="6931" b="47496"/>
           <a:stretch>
             <a:fillRect/>
           </a:stretch>
@@ -10062,7 +9863,7 @@
         <p:spPr>
           <a:xfrm>
             <a:off x="640080" y="457200"/>
-            <a:ext cx="2743200" cy="374904"/>
+            <a:ext cx="2743200" cy="376288"/>
           </a:xfrm>
           <a:prstGeom prst="rect">
             <a:avLst/>
@@ -10474,30 +10275,6 @@
           </a:p>
         </p:txBody>
       </p:sp>
-      <p:pic>
-        <p:nvPicPr>
-          <p:cNvPr id="10" name="Image 1" descr="assets/stringfest-chevron-red.png">    </p:cNvPr>
-          <p:cNvPicPr>
-            <a:picLocks noChangeAspect="1"/>
-          </p:cNvPicPr>
-          <p:nvPr/>
-        </p:nvPicPr>
-        <p:blipFill>
-          <a:blip r:embed="rId2"/>
-          <a:stretch>
-            <a:fillRect/>
-          </a:stretch>
-        </p:blipFill>
-        <p:spPr>
-          <a:xfrm>
-            <a:off x="11292840" y="5715000"/>
-            <a:ext cx="896112" cy="1024128"/>
-          </a:xfrm>
-          <a:prstGeom prst="rect">
-            <a:avLst/>
-          </a:prstGeom>
-        </p:spPr>
-      </p:pic>
     </p:spTree>
   </p:cSld>
   <p:clrMapOvr>
@@ -10540,6 +10317,7 @@
         </p:nvPicPr>
         <p:blipFill>
           <a:blip r:embed="rId1"/>
+          <a:srcRect l="9716" t="36914" r="6931" b="47496"/>
           <a:stretch>
             <a:fillRect/>
           </a:stretch>
@@ -10547,7 +10325,7 @@
         <p:spPr>
           <a:xfrm>
             <a:off x="640080" y="457200"/>
-            <a:ext cx="2743200" cy="374904"/>
+            <a:ext cx="2743200" cy="376288"/>
           </a:xfrm>
           <a:prstGeom prst="rect">
             <a:avLst/>
@@ -10921,6 +10699,7 @@
         </p:nvPicPr>
         <p:blipFill>
           <a:blip r:embed="rId1"/>
+          <a:srcRect l="9716" t="36914" r="6931" b="47496"/>
           <a:stretch>
             <a:fillRect/>
           </a:stretch>
@@ -10928,7 +10707,7 @@
         <p:spPr>
           <a:xfrm>
             <a:off x="640080" y="457200"/>
-            <a:ext cx="2743200" cy="374904"/>
+            <a:ext cx="2743200" cy="376288"/>
           </a:xfrm>
           <a:prstGeom prst="rect">
             <a:avLst/>
@@ -11369,30 +11148,6 @@
           </a:p>
         </p:txBody>
       </p:sp>
-      <p:pic>
-        <p:nvPicPr>
-          <p:cNvPr id="10" name="Image 1" descr="assets/stringfest-chevron-red.png">    </p:cNvPr>
-          <p:cNvPicPr>
-            <a:picLocks noChangeAspect="1"/>
-          </p:cNvPicPr>
-          <p:nvPr/>
-        </p:nvPicPr>
-        <p:blipFill>
-          <a:blip r:embed="rId2"/>
-          <a:stretch>
-            <a:fillRect/>
-          </a:stretch>
-        </p:blipFill>
-        <p:spPr>
-          <a:xfrm>
-            <a:off x="11292840" y="5715000"/>
-            <a:ext cx="896112" cy="1024128"/>
-          </a:xfrm>
-          <a:prstGeom prst="rect">
-            <a:avLst/>
-          </a:prstGeom>
-        </p:spPr>
-      </p:pic>
     </p:spTree>
   </p:cSld>
   <p:clrMapOvr>

--- a/Financial-Analytics-with-Python-in-Excel.pptx
+++ b/Financial-Analytics-with-Python-in-Excel.pptx
@@ -4,6 +4,9 @@
   <p:sldMasterIdLst>
     <p:sldMasterId id="2147483648" r:id="rId1"/>
   </p:sldMasterIdLst>
+  <p:notesMasterIdLst>
+    <p:notesMasterId r:id="rId24"/>
+  </p:notesMasterIdLst>
   <p:sldIdLst>
     <p:sldId id="256" r:id="rId2"/>
     <p:sldId id="257" r:id="rId3"/>
@@ -26,12 +29,8 @@
     <p:sldId id="274" r:id="rId20"/>
     <p:sldId id="275" r:id="rId21"/>
     <p:sldId id="276" r:id="rId22"/>
-    <p:sldId id="277" r:id="rId23"/>
-    <p:sldId id="278" r:id="rId24"/>
+    <p:sldId id="278" r:id="rId23"/>
   </p:sldIdLst>
-  <p:notesMasterIdLst>
-    <p:notesMasterId r:id="rId25"/>
-  </p:notesMasterIdLst>
   <p:sldSz cx="12192000" cy="6858000"/>
   <p:notesSz cx="6858000" cy="12192000"/>
   <p:defaultTextStyle>
@@ -126,6 +125,11 @@
       </a:defRPr>
     </a:lvl9pPr>
   </p:defaultTextStyle>
+  <p:extLst>
+    <p:ext uri="{EFAFB233-063F-42B5-8137-9DF3F51BA10A}">
+      <p15:sldGuideLst xmlns:p15="http://schemas.microsoft.com/office/powerpoint/2012/main"/>
+    </p:ext>
+  </p:extLst>
 </p:presentation>
 </file>
 
@@ -151,234 +155,10 @@
           <a:chExt cx="0" cy="0"/>
         </a:xfrm>
       </p:grpSpPr>
-      <p:sp>
-        <p:nvSpPr>
-          <p:cNvPr id="2" name="Header Placeholder 1"/>
-          <p:cNvSpPr>
-            <a:spLocks noGrp="1"/>
-          </p:cNvSpPr>
-          <p:nvPr>
-            <p:ph type="hdr" sz="quarter"/>
-          </p:nvPr>
-        </p:nvSpPr>
-        <p:spPr>
-          <a:xfrm>
-            <a:off x="0" y="0"/>
-            <a:ext cx="2971800" cy="458788"/>
-          </a:xfrm>
-          <a:prstGeom prst="rect">
-            <a:avLst/>
-          </a:prstGeom>
-        </p:spPr>
-        <p:txBody>
-          <a:bodyPr vert="horz" lIns="91440" tIns="45720" rIns="91440" bIns="45720" rtlCol="0"/>
-          <a:lstStyle>
-            <a:lvl1pPr algn="l">
-              <a:defRPr sz="1200"/>
-            </a:lvl1pPr>
-          </a:lstStyle>
-          <a:p>
-            <a:endParaRPr lang="en-US"/>
-          </a:p>
-        </p:txBody>
-      </p:sp>
-      <p:sp>
-        <p:nvSpPr>
-          <p:cNvPr id="3" name="Date Placeholder 2"/>
-          <p:cNvSpPr>
-            <a:spLocks noGrp="1"/>
-          </p:cNvSpPr>
-          <p:nvPr>
-            <p:ph type="dt" idx="1"/>
-          </p:nvPr>
-        </p:nvSpPr>
-        <p:spPr>
-          <a:xfrm>
-            <a:off x="3884613" y="0"/>
-            <a:ext cx="2971800" cy="458788"/>
-          </a:xfrm>
-          <a:prstGeom prst="rect">
-            <a:avLst/>
-          </a:prstGeom>
-        </p:spPr>
-        <p:txBody>
-          <a:bodyPr vert="horz" lIns="91440" tIns="45720" rIns="91440" bIns="45720" rtlCol="0"/>
-          <a:lstStyle>
-            <a:lvl1pPr algn="r">
-              <a:defRPr sz="1200"/>
-            </a:lvl1pPr>
-          </a:lstStyle>
-          <a:p>
-            <a:fld id="{5282F153-3F37-0F45-9E97-73ACFA13230C}" type="datetimeFigureOut">
-              <a:rPr lang="en-US"/>
-              <a:t>7/23/19</a:t>
-            </a:fld>
-            <a:endParaRPr lang="en-US"/>
-          </a:p>
-        </p:txBody>
-      </p:sp>
-      <p:sp>
-        <p:nvSpPr>
-          <p:cNvPr id="4" name="Slide Image Placeholder 3"/>
-          <p:cNvSpPr>
-            <a:spLocks noGrp="1" noRot="1" noChangeAspect="1"/>
-          </p:cNvSpPr>
-          <p:nvPr>
-            <p:ph type="sldImg" idx="2"/>
-          </p:nvPr>
-        </p:nvSpPr>
-        <p:spPr>
-          <a:xfrm>
-            <a:off x="685800" y="1143000"/>
-            <a:ext cx="5486400" cy="3086100"/>
-          </a:xfrm>
-          <a:prstGeom prst="rect">
-            <a:avLst/>
-          </a:prstGeom>
-          <a:noFill/>
-          <a:ln w="12700">
-            <a:solidFill>
-              <a:prstClr val="black"/>
-            </a:solidFill>
-          </a:ln>
-        </p:spPr>
-        <p:txBody>
-          <a:bodyPr vert="horz" lIns="91440" tIns="45720" rIns="91440" bIns="45720" rtlCol="0" anchor="ctr"/>
-          <a:lstStyle/>
-          <a:p>
-            <a:endParaRPr lang="en-US"/>
-          </a:p>
-        </p:txBody>
-      </p:sp>
-      <p:sp>
-        <p:nvSpPr>
-          <p:cNvPr id="5" name="Notes Placeholder 4"/>
-          <p:cNvSpPr>
-            <a:spLocks noGrp="1"/>
-          </p:cNvSpPr>
-          <p:nvPr>
-            <p:ph type="body" sz="quarter" idx="3"/>
-          </p:nvPr>
-        </p:nvSpPr>
-        <p:spPr>
-          <a:xfrm>
-            <a:off x="685800" y="4400550"/>
-            <a:ext cx="5486400" cy="3600450"/>
-          </a:xfrm>
-          <a:prstGeom prst="rect">
-            <a:avLst/>
-          </a:prstGeom>
-        </p:spPr>
-        <p:txBody>
-          <a:bodyPr vert="horz" lIns="91440" tIns="45720" rIns="91440" bIns="45720" rtlCol="0"/>
-          <a:lstStyle/>
-          <a:p>
-            <a:pPr lvl="0"/>
-            <a:r>
-              <a:rPr lang="en-US"/>
-              <a:t>Click to edit Master text styles</a:t>
-            </a:r>
-          </a:p>
-          <a:p>
-            <a:pPr lvl="1"/>
-            <a:r>
-              <a:rPr lang="en-US"/>
-              <a:t>Second level</a:t>
-            </a:r>
-          </a:p>
-          <a:p>
-            <a:pPr lvl="2"/>
-            <a:r>
-              <a:rPr lang="en-US"/>
-              <a:t>Third level</a:t>
-            </a:r>
-          </a:p>
-          <a:p>
-            <a:pPr lvl="3"/>
-            <a:r>
-              <a:rPr lang="en-US"/>
-              <a:t>Fourth level</a:t>
-            </a:r>
-          </a:p>
-          <a:p>
-            <a:pPr lvl="4"/>
-            <a:r>
-              <a:rPr lang="en-US"/>
-              <a:t>Fifth level</a:t>
-            </a:r>
-          </a:p>
-        </p:txBody>
-      </p:sp>
-      <p:sp>
-        <p:nvSpPr>
-          <p:cNvPr id="6" name="Footer Placeholder 5"/>
-          <p:cNvSpPr>
-            <a:spLocks noGrp="1"/>
-          </p:cNvSpPr>
-          <p:nvPr>
-            <p:ph type="ftr" sz="quarter" idx="4"/>
-          </p:nvPr>
-        </p:nvSpPr>
-        <p:spPr>
-          <a:xfrm>
-            <a:off x="0" y="8685213"/>
-            <a:ext cx="2971800" cy="458787"/>
-          </a:xfrm>
-          <a:prstGeom prst="rect">
-            <a:avLst/>
-          </a:prstGeom>
-        </p:spPr>
-        <p:txBody>
-          <a:bodyPr vert="horz" lIns="91440" tIns="45720" rIns="91440" bIns="45720" rtlCol="0" anchor="b"/>
-          <a:lstStyle>
-            <a:lvl1pPr algn="l">
-              <a:defRPr sz="1200"/>
-            </a:lvl1pPr>
-          </a:lstStyle>
-          <a:p>
-            <a:endParaRPr lang="en-US"/>
-          </a:p>
-        </p:txBody>
-      </p:sp>
-      <p:sp>
-        <p:nvSpPr>
-          <p:cNvPr id="7" name="Slide Number Placeholder 6"/>
-          <p:cNvSpPr>
-            <a:spLocks noGrp="1"/>
-          </p:cNvSpPr>
-          <p:nvPr>
-            <p:ph type="sldNum" sz="quarter" idx="5"/>
-          </p:nvPr>
-        </p:nvSpPr>
-        <p:spPr>
-          <a:xfrm>
-            <a:off x="3884613" y="8685213"/>
-            <a:ext cx="2971800" cy="458787"/>
-          </a:xfrm>
-          <a:prstGeom prst="rect">
-            <a:avLst/>
-          </a:prstGeom>
-        </p:spPr>
-        <p:txBody>
-          <a:bodyPr vert="horz" lIns="91440" tIns="45720" rIns="91440" bIns="45720" rtlCol="0" anchor="b"/>
-          <a:lstStyle>
-            <a:lvl1pPr algn="r">
-              <a:defRPr sz="1200"/>
-            </a:lvl1pPr>
-          </a:lstStyle>
-          <a:p>
-            <a:fld id="{CE5E9CC1-C706-0F49-92D6-E571CC5EEA8F}" type="slidenum">
-              <a:rPr lang="en-US"/>
-              <a:t>‹#›</a:t>
-            </a:fld>
-            <a:endParaRPr lang="en-US"/>
-          </a:p>
-        </p:txBody>
-      </p:sp>
     </p:spTree>
     <p:extLst>
       <p:ext uri="{BB962C8B-B14F-4D97-AF65-F5344CB8AC3E}">
-        <p14:creationId xmlns:p14="http://schemas.microsoft.com/office/powerpoint/2010/main" val="1024086991"/>
+        <p14:creationId xmlns:p14="http://schemas.microsoft.com/office/powerpoint/2010/main" val="3228134271"/>
       </p:ext>
     </p:extLst>
   </p:cSld>
@@ -526,7 +306,6 @@
               <a:rPr lang="en-US" dirty="0"/>
               <a:t>Welcome, everyone, and thank you so much for having me tonight. It is great to be here with the Plum Solutions Financial Modelling in Excel community. Here is how tonight works. This is a working session, not a lecture, so if you have Excel open with the datasets I shared, you are in great shape. By the end of the hour you will have run a real forecast and a real simulation right inside Excel, and you will leave with all the code, the data, and a cheat sheet. Let us dive in.</a:t>
             </a:r>
-            <a:endParaRPr lang="en-US" dirty="0"/>
           </a:p>
         </p:txBody>
       </p:sp>
@@ -614,7 +393,6 @@
               <a:rPr lang="en-US" dirty="0"/>
               <a:t>This is the payoff for part one. Holt Winters is built for exactly this situation, data with both a trend and seasonality. The three settings just describe what we saw in the decomposition. Add a trend. Add a seasonal pattern. And the season repeats every twelve months. We fit the model, then we forecast a year ahead. Notice that the forecast does not run off in a straight line. It keeps climbing, and it keeps the yearly rhythm. A plain trendline would have flattened those peaks and troughs right out.</a:t>
             </a:r>
-            <a:endParaRPr lang="en-US" dirty="0"/>
           </a:p>
         </p:txBody>
       </p:sp>
@@ -702,7 +480,6 @@
               <a:rPr lang="en-US" dirty="0"/>
               <a:t>A forecast that looks nice on a chart is not the same as a forecast you can trust, so let us put a number on it. There are two rules. First, split by time, never at random. We train on everything through 2023 and hold out 2024, so the model never gets to peek at the future. Second, always compare against a baseline. The simplest baseline is next month equals last month. On this data, Holt Winters is off by about sixteen thousand dollars a month, while that naive baseline is off by about forty two thousand. So the model is genuinely earning its keep.</a:t>
             </a:r>
-            <a:endParaRPr lang="en-US" dirty="0"/>
           </a:p>
         </p:txBody>
       </p:sp>
@@ -790,7 +567,6 @@
               <a:rPr lang="en-US" dirty="0"/>
               <a:t>Here is the judgment call that really matters, and it is a transferable skill, not just a recipe. Our revenue had a strong trend and stable seasonality, so Holt Winters was the right pick. But the bookings series is different. It trends upward, but there is no reliable yearly pattern. If you force seasonality onto it, the model will invent peaks that are not really there. So read the decomposition first, and then choose. Trend plus seasonality, use Holt Winters. Trend only, use Holt. Neither one, keep it simple.</a:t>
             </a:r>
-            <a:endParaRPr lang="en-US" dirty="0"/>
           </a:p>
         </p:txBody>
       </p:sp>
@@ -878,7 +654,6 @@
               <a:rPr lang="en-US" dirty="0"/>
               <a:t>Now let us shift from forecasting a single path to simulating thousands of them. This is Monte Carlo simulation, and it is the part a risk aware finance audience really leans into. We will see why one number can mislead you, then build a simulation step by step, and use it to actually compare decisions.</a:t>
             </a:r>
-            <a:endParaRPr lang="en-US" dirty="0"/>
           </a:p>
         </p:txBody>
       </p:sp>
@@ -966,7 +741,6 @@
               <a:rPr lang="en-US" dirty="0"/>
               <a:t>Let us start with why one number can fool you. Say we stock eleven hundred units at thirty dollars each, and we sell them at fifty. If demand lands right at expectation, a thousand units, the profit looks fine. But demand is never exactly the expectation. Sell only eight hundred and profit drops hard. Sell thirteen hundred and we cap out at our inventory, so the upside is limited, but the downside is wide open. A single forecast gives you the middle of the story. It never tells you how often the bad case shows up. That is what we are about to fix.</a:t>
             </a:r>
-            <a:endParaRPr lang="en-US" dirty="0"/>
           </a:p>
         </p:txBody>
       </p:sp>
@@ -1054,7 +828,6 @@
               <a:rPr lang="en-US" dirty="0"/>
               <a:t>Simulation is driven by assumptions, so we start from a blank sheet, with no dataset at all. The distribution we choose is the assumption. Here we say demand is normally distributed, centered on a thousand units, give or take two hundred. NumPy draws ten thousand possible demand values in one shot. We floor it at zero so demand never goes negative. And that seed at the top matters for this crowd. It makes the whole simulation reproducible and reviewable, unlike the volatile random cells you may be used to.</a:t>
             </a:r>
-            <a:endParaRPr lang="en-US" dirty="0"/>
           </a:p>
         </p:txBody>
       </p:sp>
@@ -1142,7 +915,6 @@
               <a:rPr lang="en-US" dirty="0"/>
               <a:t>Now we apply the business logic to every one of those ten thousand scenarios. The key line is units sold equals the minimum of demand and inventory, which is just the M I N function you already know from Excel. That minimum is the whole story. When demand is below inventory, revenue falls short. When demand is above inventory, sales are capped, so the extra demand earns us nothing. Cost is charged on all the inventory either way. And notice we did ten thousand scenarios with plain array math, with no ten thousand row data table to drag down the sheet.</a:t>
             </a:r>
-            <a:endParaRPr lang="en-US" dirty="0"/>
           </a:p>
         </p:txBody>
       </p:sp>
@@ -1230,7 +1002,6 @@
               <a:rPr lang="en-US" dirty="0"/>
               <a:t>Now let us read the results, and here is the mindset shift. Instead of asking what the expected profit is, we ask what the range is, and how bad it can get. The tenth and ninetieth percentiles give you a concrete, reasonable range to plan against, which is much easier to act on than a standard deviation. And probability of loss answers the question the average simply cannot. How often do we actually lose money. Now look at the histogram. Even though we fed in symmetric demand, the profit is skewed, because that inventory cap chopped off the upside. That skew is the whole reason we simulate.</a:t>
             </a:r>
-            <a:endParaRPr lang="en-US" dirty="0"/>
           </a:p>
         </p:txBody>
       </p:sp>
@@ -1318,7 +1089,6 @@
               <a:rPr lang="en-US" dirty="0"/>
               <a:t>This is the main exercise, so let us give it some room, and I want you to run this one with me. We keep the same demand draws, and we only change the decision. Inventory of nine hundred, eleven hundred, or thirteen hundred. Holding demand fixed isolates the effect of the choice itself. Now look at the shapes. The conservative option is tight, with limited downside. The aggressive option reaches for more upside, but its tail crosses into losses. So the question is no longer which number is biggest. It is which risk profile we actually want. And that is a much better conversation to bring to a decision maker.</a:t>
             </a:r>
-            <a:endParaRPr lang="en-US" dirty="0"/>
           </a:p>
         </p:txBody>
       </p:sp>
@@ -1406,7 +1176,6 @@
               <a:rPr lang="en-US" dirty="0"/>
               <a:t>Let me connect this back to the tools you already own, because none of this is a rejection of Excel. Scenario Manager handles a few named cases. A Data Table varies one or two inputs across a grid. Both are perfect at small scale. Simulation is the same instinct, just taken further. Instead of predefining the cases, you define the distributions and let the model explore thousands of combinations for you. Python adds a reproducible seed, richer distributions that can capture skew and rare events, and the full distribution instead of a grid of points. Think of it as an extension of your toolkit, not a rival to it.</a:t>
             </a:r>
-            <a:endParaRPr lang="en-US" dirty="0"/>
           </a:p>
         </p:txBody>
       </p:sp>
@@ -1494,7 +1263,6 @@
               <a:rPr lang="en-US" dirty="0"/>
               <a:t>Before we get going, a genuine thank you to Plum Solutions and the Financial Modelling in Excel meetup for hosting tonight. This community sits right where Excel meets serious financial modelling, and that is exactly where Python in Excel earns its place. You already know Scenario Manager, Data Tables, and three statement models. Tonight I want to add two tools to that kit. I am not here to replace anything you already do well.</a:t>
             </a:r>
-            <a:endParaRPr lang="en-US" dirty="0"/>
           </a:p>
         </p:txBody>
       </p:sp>
@@ -1582,7 +1350,6 @@
               <a:rPr lang="en-US" dirty="0"/>
               <a:t>Let us tie it together. You are leaving with two patterns you can reuse tomorrow. For forecasting. Index by time, smooth to see the structure, decompose, fit Holt Winters, and always check it against a baseline. For simulation. Sample from a distribution, apply your business logic, summarize with percentiles, read the probability of loss, and compare decisions by their risk. Different problems, but the same spirit. Make the uncertainty visible, and make it defensible.</a:t>
             </a:r>
-            <a:endParaRPr lang="en-US" dirty="0"/>
           </a:p>
         </p:txBody>
       </p:sp>
@@ -1670,7 +1437,6 @@
               <a:rPr lang="en-US" dirty="0"/>
               <a:t>If you would like the full toolkit, everything from tonight, and quite a bit more, is in my forthcoming book, Python in Excel for Data Analytics, from Packt. It covers these forecasting and simulation chapters, plus regression, text and sentiment analytics, and visualization, all inside Excel. It is rolling out by the end of the year. So here is the one thing I will ask. If this was useful, join the notify list so you hear the moment it launches. I will drop the link in the chat as well.</a:t>
             </a:r>
-            <a:endParaRPr lang="en-US" dirty="0"/>
           </a:p>
         </p:txBody>
       </p:sp>
@@ -1756,9 +1522,8 @@
           <a:p>
             <a:r>
               <a:rPr lang="en-US" dirty="0"/>
-              <a:t>Before we wrap, here is what is going home with you. The datasets workbook. A cheat sheet with every line of code from tonight. And a set of follow along exercises with full solutions. And if you do just one thing this week, do this. Take one of your own monthly series, maybe revenue, headcount, or volumes, run a Holt Winters forecast on it, and check that it beats the naive baseline. It is small, it is doable, and it locks in both of tonight's big ideas.</a:t>
-            </a:r>
-            <a:endParaRPr lang="en-US" dirty="0"/>
+              <a:t>That is a wrap, and thank you once more to Plum Solutions and the Financial Modelling in Excel meetup for having me. My contact details and the book link are on the screen, and I am glad to stay on for as many questions as you have. Please do grab the three files and the datasets. They are yours to keep. And keep an eye out for the book at the end of the year. Thank you, everyone.</a:t>
+            </a:r>
           </a:p>
         </p:txBody>
       </p:sp>
@@ -1780,94 +1545,6 @@
             <a:fld id="{F7021451-1387-4CA6-816F-3879F97B5CBC}" type="slidenum">
               <a:rPr lang="en-US"/>
               <a:t>22</a:t>
-            </a:fld>
-            <a:endParaRPr lang="en-US"/>
-          </a:p>
-        </p:txBody>
-      </p:sp>
-    </p:spTree>
-    <p:extLst>
-      <p:ext uri="{BB962C8B-B14F-4D97-AF65-F5344CB8AC3E}">
-        <p14:creationId xmlns:p14="http://schemas.microsoft.com/office/powerpoint/2010/main" val="1024086991"/>
-      </p:ext>
-    </p:extLst>
-  </p:cSld>
-  <p:clrMapOvr>
-    <a:masterClrMapping/>
-  </p:clrMapOvr>
-</p:notes>
-</file>
-
-<file path=ppt/notesSlides/notesSlide23.xml><?xml version="1.0" encoding="utf-8"?>
-<p:notes xmlns:a="http://schemas.openxmlformats.org/drawingml/2006/main" xmlns:r="http://schemas.openxmlformats.org/officeDocument/2006/relationships" xmlns:p="http://schemas.openxmlformats.org/presentationml/2006/main">
-  <p:cSld>
-    <p:spTree>
-      <p:nvGrpSpPr>
-        <p:cNvPr id="1" name=""/>
-        <p:cNvGrpSpPr/>
-        <p:nvPr/>
-      </p:nvGrpSpPr>
-      <p:grpSpPr>
-        <a:xfrm>
-          <a:off x="0" y="0"/>
-          <a:ext cx="0" cy="0"/>
-          <a:chOff x="0" y="0"/>
-          <a:chExt cx="0" cy="0"/>
-        </a:xfrm>
-      </p:grpSpPr>
-      <p:sp>
-        <p:nvSpPr>
-          <p:cNvPr id="2" name="Slide Image Placeholder 1"/>
-          <p:cNvSpPr>
-            <a:spLocks noGrp="1" noRot="1" noChangeAspect="1"/>
-          </p:cNvSpPr>
-          <p:nvPr>
-            <p:ph type="sldImg"/>
-          </p:nvPr>
-        </p:nvSpPr>
-        <p:spPr/>
-      </p:sp>
-      <p:sp>
-        <p:nvSpPr>
-          <p:cNvPr id="3" name="Notes Placeholder 2"/>
-          <p:cNvSpPr>
-            <a:spLocks noGrp="1"/>
-          </p:cNvSpPr>
-          <p:nvPr>
-            <p:ph type="body" idx="1"/>
-          </p:nvPr>
-        </p:nvSpPr>
-        <p:spPr/>
-        <p:txBody>
-          <a:bodyPr/>
-          <a:lstStyle/>
-          <a:p>
-            <a:r>
-              <a:rPr lang="en-US" dirty="0"/>
-              <a:t>That is a wrap, and thank you once more to Plum Solutions and the Financial Modelling in Excel meetup for having me. My contact details and the book link are on the screen, and I am glad to stay on for as many questions as you have. Please do grab the three files and the datasets. They are yours to keep. And keep an eye out for the book at the end of the year. Thank you, everyone.</a:t>
-            </a:r>
-            <a:endParaRPr lang="en-US" dirty="0"/>
-          </a:p>
-        </p:txBody>
-      </p:sp>
-      <p:sp>
-        <p:nvSpPr>
-          <p:cNvPr id="4" name="Slide Number Placeholder 3"/>
-          <p:cNvSpPr>
-            <a:spLocks noGrp="1"/>
-          </p:cNvSpPr>
-          <p:nvPr>
-            <p:ph type="sldNum" sz="quarter" idx="10"/>
-          </p:nvPr>
-        </p:nvSpPr>
-        <p:spPr/>
-        <p:txBody>
-          <a:bodyPr/>
-          <a:lstStyle/>
-          <a:p>
-            <a:fld id="{F7021451-1387-4CA6-816F-3879F97B5CBC}" type="slidenum">
-              <a:rPr lang="en-US"/>
-              <a:t>23</a:t>
             </a:fld>
             <a:endParaRPr lang="en-US"/>
           </a:p>
@@ -1934,7 +1611,6 @@
               <a:rPr lang="en-US" dirty="0"/>
               <a:t>Here is what you will walk away with tonight. You will be able to summarize and analyze larger financial datasets without ever leaving Excel. You will build a forecast that respects both trend and seasonality, and you will know how to check whether it is any good. You will run a Monte Carlo simulation that puts a real number on risk. And you will test many scenarios at once and see the whole range of outcomes. Everything I show you goes home with you, so please relax and follow along rather than racing to write things down.</a:t>
             </a:r>
-            <a:endParaRPr lang="en-US" dirty="0"/>
           </a:p>
         </p:txBody>
       </p:sp>
@@ -2022,7 +1698,6 @@
               <a:rPr lang="en-US" dirty="0"/>
               <a:t>Let us all get hands on right now, so any setup issues show up early. In any cell, type equals, P, Y, and an open parenthesis, and Excel drops into Python. To pull an Excel table into Python you use the x l function, like the one on the card. Go ahead and load the revenue table now. Whenever you see one of these red P Y cell cards during the session, that is your cue to type the code and run it with me. Because we set a random seed, your numbers will match mine.</a:t>
             </a:r>
-            <a:endParaRPr lang="en-US" dirty="0"/>
           </a:p>
         </p:txBody>
       </p:sp>
@@ -2110,7 +1785,6 @@
               <a:rPr lang="en-US" dirty="0"/>
               <a:t>Here is the mental model for the whole session. On the left are the things Excel formulas already do beautifully. A quick what if with a Data Table. A handful of named scenarios. A straight line trend. Please keep using all of those. On the right are the things that get painful with formulas alone. Forecasting with seasonality. Running thousands of simulations. Working with a full distribution instead of a single number. That right hand column is where Python in Excel shines, and that is where we are spending our time tonight.</a:t>
             </a:r>
-            <a:endParaRPr lang="en-US" dirty="0"/>
           </a:p>
         </p:txBody>
       </p:sp>
@@ -2198,7 +1872,6 @@
               <a:rPr lang="en-US" dirty="0"/>
               <a:t>Let us start with forecasting. We are going to take six years of monthly revenue that has both a trend and a seasonal pattern, and build a forecast we can actually defend. We will load it, reduce the noise, separate the pieces, fit the model, and then prove that it beats a naive guess.</a:t>
             </a:r>
-            <a:endParaRPr lang="en-US" dirty="0"/>
           </a:p>
         </p:txBody>
       </p:sp>
@@ -2286,7 +1959,6 @@
               <a:rPr lang="en-US" dirty="0"/>
               <a:t>First we load the revenue table with x l. Two quick housekeeping steps matter here, and they are the ones that trip people up. First, convert the date column so Python treats it as a real date and not as text. Second, set that date column as the index, which simply means we are organizing the data by time. Once the index is time based, everything after this becomes a one liner. Run it, and you will see the first few rows spill into the grid.</a:t>
             </a:r>
-            <a:endParaRPr lang="en-US" dirty="0"/>
           </a:p>
         </p:txBody>
       </p:sp>
@@ -2374,7 +2046,6 @@
               <a:rPr lang="en-US" dirty="0"/>
               <a:t>Now let us cut through the noise so we can see the trend. There are two moves here. Resampling changes the frequency, so we roll the monthly data up into quarters. A rolling mean keeps the monthly frequency but smooths it, and it is exactly the moving average you already use in Excel. A twelve month window covers a full year, so the seasonal ups and downs average out and the growth becomes obvious. One heads up. The first eleven rolling values come back empty and show as pound N U M in the grid. That is expected, and it is not a mistake.</a:t>
             </a:r>
-            <a:endParaRPr lang="en-US" dirty="0"/>
           </a:p>
         </p:txBody>
       </p:sp>
@@ -2462,7 +2133,6 @@
               <a:rPr lang="en-US" dirty="0"/>
               <a:t>This next step is the one that tells us which model to use. We break the series into three parts. The trend. The repeating seasonal pattern. And the leftover residual. Look at the seasonal panel. It is a clean wave that repeats every twelve months. Now look at the residual. It is close to random, which tells us that trend and season together explain most of what is going on. So the verdict is simple. Both a trend and seasonality are present, which means whatever model we choose has to handle both.</a:t>
             </a:r>
-            <a:endParaRPr lang="en-US" dirty="0"/>
           </a:p>
         </p:txBody>
       </p:sp>
@@ -2535,6 +2205,11 @@
 <file path=ppt/slideMasters/slideMaster1.xml><?xml version="1.0" encoding="utf-8"?>
 <p:sldMaster xmlns:a="http://schemas.openxmlformats.org/drawingml/2006/main" xmlns:r="http://schemas.openxmlformats.org/officeDocument/2006/relationships" xmlns:p="http://schemas.openxmlformats.org/presentationml/2006/main">
   <p:cSld>
+    <p:bg>
+      <p:bgRef idx="1001">
+        <a:schemeClr val="bg1"/>
+      </p:bgRef>
+    </p:bg>
     <p:spTree>
       <p:nvGrpSpPr>
         <p:cNvPr id="1" name=""/>
@@ -2817,6 +2492,7 @@
         <a:solidFill>
           <a:srgbClr val="EEECE1"/>
         </a:solidFill>
+        <a:effectLst/>
       </p:bgPr>
     </p:bg>
     <p:spTree>
@@ -2835,14 +2511,14 @@
       </p:grpSpPr>
       <p:pic>
         <p:nvPicPr>
-          <p:cNvPr id="2" name="Image 0" descr="assets/stringfest-logo-dark.png">    </p:cNvPr>
+          <p:cNvPr id="2" name="Image 0" descr="assets/stringfest-logo-dark.png"/>
           <p:cNvPicPr>
             <a:picLocks noChangeAspect="1"/>
           </p:cNvPicPr>
           <p:nvPr/>
         </p:nvPicPr>
         <p:blipFill>
-          <a:blip r:embed="rId1"/>
+          <a:blip r:embed="rId3"/>
           <a:srcRect l="9716" t="36914" r="6931" b="47496"/>
           <a:stretch>
             <a:fillRect/>
@@ -2877,6 +2553,13 @@
           </a:solidFill>
           <a:ln/>
         </p:spPr>
+        <p:txBody>
+          <a:bodyPr/>
+          <a:lstStyle/>
+          <a:p>
+            <a:endParaRPr lang="en-US"/>
+          </a:p>
+        </p:txBody>
       </p:sp>
       <p:sp>
         <p:nvSpPr>
@@ -2899,7 +2582,7 @@
           <a:bodyPr wrap="square" lIns="0" tIns="0" rIns="0" bIns="0" rtlCol="0" anchor="ctr"/>
           <a:lstStyle/>
           <a:p>
-            <a:pPr indent="0" marL="0">
+            <a:pPr marL="0" indent="0">
               <a:lnSpc>
                 <a:spcPct val="98000"/>
               </a:lnSpc>
@@ -2919,7 +2602,7 @@
             <a:endParaRPr lang="en-US" sz="4200" dirty="0"/>
           </a:p>
           <a:p>
-            <a:pPr indent="0" marL="0">
+            <a:pPr marL="0" indent="0">
               <a:lnSpc>
                 <a:spcPct val="98000"/>
               </a:lnSpc>
@@ -2961,7 +2644,7 @@
           <a:bodyPr wrap="square" lIns="0" tIns="0" rIns="0" bIns="0" rtlCol="0" anchor="ctr"/>
           <a:lstStyle/>
           <a:p>
-            <a:pPr indent="0" marL="0">
+            <a:pPr marL="0" indent="0">
               <a:buNone/>
             </a:pPr>
             <a:r>
@@ -3000,7 +2683,7 @@
           <a:bodyPr wrap="square" lIns="0" tIns="0" rIns="0" bIns="0" rtlCol="0" anchor="ctr"/>
           <a:lstStyle/>
           <a:p>
-            <a:pPr indent="0" marL="0">
+            <a:pPr marL="0" indent="0">
               <a:buNone/>
             </a:pPr>
             <a:r>
@@ -3039,7 +2722,7 @@
           <a:bodyPr wrap="square" lIns="0" tIns="0" rIns="0" bIns="0" rtlCol="0" anchor="ctr"/>
           <a:lstStyle/>
           <a:p>
-            <a:pPr indent="0" marL="0">
+            <a:pPr marL="0" indent="0">
               <a:buNone/>
             </a:pPr>
             <a:r>
@@ -3078,11 +2761,11 @@
           <a:bodyPr wrap="square" lIns="0" tIns="0" rIns="0" bIns="0" rtlCol="0" anchor="ctr"/>
           <a:lstStyle/>
           <a:p>
-            <a:pPr algn="ctr" indent="0" marL="0">
-              <a:buNone/>
-            </a:pPr>
-            <a:r>
-              <a:rPr lang="en-US" sz="1000" b="1" spc="200" kern="0" dirty="0">
+            <a:pPr marL="0" indent="0" algn="ctr">
+              <a:buNone/>
+            </a:pPr>
+            <a:r>
+              <a:rPr lang="en-US" sz="1000" b="1" kern="0" spc="200" dirty="0">
                 <a:solidFill>
                   <a:srgbClr val="707070"/>
                 </a:solidFill>
@@ -3098,14 +2781,14 @@
       </p:sp>
       <p:pic>
         <p:nvPicPr>
-          <p:cNvPr id="9" name="Image 1" descr="assets/plum-solutions.png">    </p:cNvPr>
+          <p:cNvPr id="9" name="Image 1" descr="assets/plum-solutions.png"/>
           <p:cNvPicPr>
             <a:picLocks noChangeAspect="1"/>
           </p:cNvPicPr>
           <p:nvPr/>
         </p:nvPicPr>
         <p:blipFill>
-          <a:blip r:embed="rId2"/>
+          <a:blip r:embed="rId4"/>
           <a:stretch>
             <a:fillRect/>
           </a:stretch>
@@ -3122,14 +2805,14 @@
       </p:pic>
       <p:pic>
         <p:nvPicPr>
-          <p:cNvPr id="10" name="Image 2" descr="assets/fm-excel-logo.jpg">    </p:cNvPr>
+          <p:cNvPr id="10" name="Image 2" descr="assets/fm-excel-logo.jpg"/>
           <p:cNvPicPr>
             <a:picLocks noChangeAspect="1"/>
           </p:cNvPicPr>
           <p:nvPr/>
         </p:nvPicPr>
         <p:blipFill>
-          <a:blip r:embed="rId3"/>
+          <a:blip r:embed="rId5"/>
           <a:stretch>
             <a:fillRect/>
           </a:stretch>
@@ -3165,7 +2848,7 @@
           <a:bodyPr wrap="square" lIns="0" tIns="0" rIns="0" bIns="0" rtlCol="0" anchor="ctr"/>
           <a:lstStyle/>
           <a:p>
-            <a:pPr algn="ctr" indent="0" marL="0">
+            <a:pPr marL="0" indent="0" algn="ctr">
               <a:buNone/>
             </a:pPr>
             <a:r>
@@ -3182,7 +2865,7 @@
             <a:endParaRPr lang="en-US" sz="1000" dirty="0"/>
           </a:p>
           <a:p>
-            <a:pPr algn="ctr" indent="0" marL="0">
+            <a:pPr marL="0" indent="0" algn="ctr">
               <a:buNone/>
             </a:pPr>
             <a:r>
@@ -3219,6 +2902,13 @@
           </a:solidFill>
           <a:ln/>
         </p:spPr>
+        <p:txBody>
+          <a:bodyPr/>
+          <a:lstStyle/>
+          <a:p>
+            <a:endParaRPr lang="en-US"/>
+          </a:p>
+        </p:txBody>
       </p:sp>
     </p:spTree>
   </p:cSld>
@@ -3236,6 +2926,7 @@
         <a:solidFill>
           <a:srgbClr val="EEECE1"/>
         </a:solidFill>
+        <a:effectLst/>
       </p:bgPr>
     </p:bg>
     <p:spTree>
@@ -3254,14 +2945,14 @@
       </p:grpSpPr>
       <p:pic>
         <p:nvPicPr>
-          <p:cNvPr id="2" name="Image 0" descr="assets/stringfest-logo-dark.png">    </p:cNvPr>
+          <p:cNvPr id="2" name="Image 0" descr="assets/stringfest-logo-dark.png"/>
           <p:cNvPicPr>
             <a:picLocks noChangeAspect="1"/>
           </p:cNvPicPr>
           <p:nvPr/>
         </p:nvPicPr>
         <p:blipFill>
-          <a:blip r:embed="rId1"/>
+          <a:blip r:embed="rId3"/>
           <a:srcRect l="9716" t="36914" r="6931" b="47496"/>
           <a:stretch>
             <a:fillRect/>
@@ -3298,11 +2989,11 @@
           <a:bodyPr wrap="square" lIns="0" tIns="0" rIns="0" bIns="0" rtlCol="0" anchor="ctr"/>
           <a:lstStyle/>
           <a:p>
-            <a:pPr indent="0" marL="0">
-              <a:buNone/>
-            </a:pPr>
-            <a:r>
-              <a:rPr lang="en-US" sz="1300" b="1" spc="300" kern="0" dirty="0">
+            <a:pPr marL="0" indent="0">
+              <a:buNone/>
+            </a:pPr>
+            <a:r>
+              <a:rPr lang="en-US" sz="1300" b="1" kern="0" spc="300" dirty="0">
                 <a:solidFill>
                   <a:srgbClr val="CF3338"/>
                 </a:solidFill>
@@ -3337,7 +3028,7 @@
           <a:bodyPr wrap="square" lIns="0" tIns="0" rIns="0" bIns="0" rtlCol="0" anchor="ctr"/>
           <a:lstStyle/>
           <a:p>
-            <a:pPr indent="0" marL="0">
+            <a:pPr marL="0" indent="0">
               <a:buNone/>
             </a:pPr>
             <a:r>
@@ -3357,14 +3048,14 @@
       </p:sp>
       <p:pic>
         <p:nvPicPr>
-          <p:cNvPr id="5" name="Image 1" descr="chart_forecast.png">    </p:cNvPr>
+          <p:cNvPr id="5" name="Image 1" descr="chart_forecast.png"/>
           <p:cNvPicPr>
             <a:picLocks noChangeAspect="1"/>
           </p:cNvPicPr>
           <p:nvPr/>
         </p:nvPicPr>
         <p:blipFill>
-          <a:blip r:embed="rId2"/>
+          <a:blip r:embed="rId4"/>
           <a:stretch>
             <a:fillRect/>
           </a:stretch>
@@ -3480,6 +3171,13 @@
           </a:solidFill>
           <a:ln/>
         </p:spPr>
+        <p:txBody>
+          <a:bodyPr/>
+          <a:lstStyle/>
+          <a:p>
+            <a:endParaRPr lang="en-US"/>
+          </a:p>
+        </p:txBody>
       </p:sp>
       <p:sp>
         <p:nvSpPr>
@@ -3500,6 +3198,13 @@
           </a:solidFill>
           <a:ln/>
         </p:spPr>
+        <p:txBody>
+          <a:bodyPr/>
+          <a:lstStyle/>
+          <a:p>
+            <a:endParaRPr lang="en-US"/>
+          </a:p>
+        </p:txBody>
       </p:sp>
       <p:sp>
         <p:nvSpPr>
@@ -3522,11 +3227,11 @@
           <a:bodyPr wrap="square" lIns="0" tIns="0" rIns="0" bIns="0" rtlCol="0" anchor="ctr"/>
           <a:lstStyle/>
           <a:p>
-            <a:pPr algn="ctr" indent="0" marL="0">
-              <a:buNone/>
-            </a:pPr>
-            <a:r>
-              <a:rPr lang="en-US" sz="1150" b="1" spc="200" kern="0" dirty="0">
+            <a:pPr marL="0" indent="0" algn="ctr">
+              <a:buNone/>
+            </a:pPr>
+            <a:r>
+              <a:rPr lang="en-US" sz="1150" b="1" kern="0" spc="200" dirty="0">
                 <a:solidFill>
                   <a:srgbClr val="FFFFFF"/>
                 </a:solidFill>
@@ -3561,7 +3266,7 @@
           <a:bodyPr wrap="square" lIns="0" tIns="0" rIns="0" bIns="0" rtlCol="0" anchor="t"/>
           <a:lstStyle/>
           <a:p>
-            <a:pPr indent="0" marL="0">
+            <a:pPr marL="0" indent="0">
               <a:lnSpc>
                 <a:spcPct val="106000"/>
               </a:lnSpc>
@@ -3581,7 +3286,7 @@
             <a:endParaRPr lang="en-US" sz="1250" dirty="0"/>
           </a:p>
           <a:p>
-            <a:pPr indent="0" marL="0">
+            <a:pPr marL="0" indent="0">
               <a:lnSpc>
                 <a:spcPct val="106000"/>
               </a:lnSpc>
@@ -3601,7 +3306,7 @@
             <a:endParaRPr lang="en-US" sz="1250" dirty="0"/>
           </a:p>
           <a:p>
-            <a:pPr indent="0" marL="0">
+            <a:pPr marL="0" indent="0">
               <a:lnSpc>
                 <a:spcPct val="106000"/>
               </a:lnSpc>
@@ -3638,6 +3343,7 @@
         <a:solidFill>
           <a:srgbClr val="EEECE1"/>
         </a:solidFill>
+        <a:effectLst/>
       </p:bgPr>
     </p:bg>
     <p:spTree>
@@ -3656,14 +3362,14 @@
       </p:grpSpPr>
       <p:pic>
         <p:nvPicPr>
-          <p:cNvPr id="2" name="Image 0" descr="assets/stringfest-logo-dark.png">    </p:cNvPr>
+          <p:cNvPr id="2" name="Image 0" descr="assets/stringfest-logo-dark.png"/>
           <p:cNvPicPr>
             <a:picLocks noChangeAspect="1"/>
           </p:cNvPicPr>
           <p:nvPr/>
         </p:nvPicPr>
         <p:blipFill>
-          <a:blip r:embed="rId1"/>
+          <a:blip r:embed="rId3"/>
           <a:srcRect l="9716" t="36914" r="6931" b="47496"/>
           <a:stretch>
             <a:fillRect/>
@@ -3700,11 +3406,11 @@
           <a:bodyPr wrap="square" lIns="0" tIns="0" rIns="0" bIns="0" rtlCol="0" anchor="ctr"/>
           <a:lstStyle/>
           <a:p>
-            <a:pPr indent="0" marL="0">
-              <a:buNone/>
-            </a:pPr>
-            <a:r>
-              <a:rPr lang="en-US" sz="1300" b="1" spc="300" kern="0" dirty="0">
+            <a:pPr marL="0" indent="0">
+              <a:buNone/>
+            </a:pPr>
+            <a:r>
+              <a:rPr lang="en-US" sz="1300" b="1" kern="0" spc="300" dirty="0">
                 <a:solidFill>
                   <a:srgbClr val="CF3338"/>
                 </a:solidFill>
@@ -3739,7 +3445,7 @@
           <a:bodyPr wrap="square" lIns="0" tIns="0" rIns="0" bIns="0" rtlCol="0" anchor="ctr"/>
           <a:lstStyle/>
           <a:p>
-            <a:pPr indent="0" marL="0">
+            <a:pPr marL="0" indent="0">
               <a:buNone/>
             </a:pPr>
             <a:r>
@@ -3882,6 +3588,13 @@
           </a:solidFill>
           <a:ln/>
         </p:spPr>
+        <p:txBody>
+          <a:bodyPr/>
+          <a:lstStyle/>
+          <a:p>
+            <a:endParaRPr lang="en-US"/>
+          </a:p>
+        </p:txBody>
       </p:sp>
       <p:sp>
         <p:nvSpPr>
@@ -3902,6 +3615,13 @@
           </a:solidFill>
           <a:ln/>
         </p:spPr>
+        <p:txBody>
+          <a:bodyPr/>
+          <a:lstStyle/>
+          <a:p>
+            <a:endParaRPr lang="en-US"/>
+          </a:p>
+        </p:txBody>
       </p:sp>
       <p:sp>
         <p:nvSpPr>
@@ -3924,11 +3644,11 @@
           <a:bodyPr wrap="square" lIns="0" tIns="0" rIns="0" bIns="0" rtlCol="0" anchor="ctr"/>
           <a:lstStyle/>
           <a:p>
-            <a:pPr algn="ctr" indent="0" marL="0">
-              <a:buNone/>
-            </a:pPr>
-            <a:r>
-              <a:rPr lang="en-US" sz="1150" b="1" spc="200" kern="0" dirty="0">
+            <a:pPr marL="0" indent="0" algn="ctr">
+              <a:buNone/>
+            </a:pPr>
+            <a:r>
+              <a:rPr lang="en-US" sz="1150" b="1" kern="0" spc="200" dirty="0">
                 <a:solidFill>
                   <a:srgbClr val="FFFFFF"/>
                 </a:solidFill>
@@ -3963,7 +3683,7 @@
           <a:bodyPr wrap="square" lIns="0" tIns="0" rIns="0" bIns="0" rtlCol="0" anchor="t"/>
           <a:lstStyle/>
           <a:p>
-            <a:pPr indent="0" marL="0">
+            <a:pPr marL="0" indent="0">
               <a:lnSpc>
                 <a:spcPct val="106000"/>
               </a:lnSpc>
@@ -3983,7 +3703,7 @@
             <a:endParaRPr lang="en-US" sz="1250" dirty="0"/>
           </a:p>
           <a:p>
-            <a:pPr indent="0" marL="0">
+            <a:pPr marL="0" indent="0">
               <a:lnSpc>
                 <a:spcPct val="106000"/>
               </a:lnSpc>
@@ -4003,7 +3723,7 @@
             <a:endParaRPr lang="en-US" sz="1250" dirty="0"/>
           </a:p>
           <a:p>
-            <a:pPr indent="0" marL="0">
+            <a:pPr marL="0" indent="0">
               <a:lnSpc>
                 <a:spcPct val="106000"/>
               </a:lnSpc>
@@ -4023,7 +3743,7 @@
             <a:endParaRPr lang="en-US" sz="1250" dirty="0"/>
           </a:p>
           <a:p>
-            <a:pPr indent="0" marL="0">
+            <a:pPr marL="0" indent="0">
               <a:lnSpc>
                 <a:spcPct val="106000"/>
               </a:lnSpc>
@@ -4043,7 +3763,7 @@
             <a:endParaRPr lang="en-US" sz="1250" dirty="0"/>
           </a:p>
           <a:p>
-            <a:pPr indent="0" marL="0">
+            <a:pPr marL="0" indent="0">
               <a:lnSpc>
                 <a:spcPct val="106000"/>
               </a:lnSpc>
@@ -4063,7 +3783,7 @@
             <a:endParaRPr lang="en-US" sz="1250" dirty="0"/>
           </a:p>
           <a:p>
-            <a:pPr indent="0" marL="0">
+            <a:pPr marL="0" indent="0">
               <a:lnSpc>
                 <a:spcPct val="106000"/>
               </a:lnSpc>
@@ -4083,7 +3803,7 @@
             <a:endParaRPr lang="en-US" sz="1250" dirty="0"/>
           </a:p>
           <a:p>
-            <a:pPr indent="0" marL="0">
+            <a:pPr marL="0" indent="0">
               <a:lnSpc>
                 <a:spcPct val="106000"/>
               </a:lnSpc>
@@ -4103,7 +3823,7 @@
             <a:endParaRPr lang="en-US" sz="1250" dirty="0"/>
           </a:p>
           <a:p>
-            <a:pPr indent="0" marL="0">
+            <a:pPr marL="0" indent="0">
               <a:lnSpc>
                 <a:spcPct val="106000"/>
               </a:lnSpc>
@@ -4140,6 +3860,7 @@
         <a:solidFill>
           <a:srgbClr val="EEECE1"/>
         </a:solidFill>
+        <a:effectLst/>
       </p:bgPr>
     </p:bg>
     <p:spTree>
@@ -4158,14 +3879,14 @@
       </p:grpSpPr>
       <p:pic>
         <p:nvPicPr>
-          <p:cNvPr id="2" name="Image 0" descr="assets/stringfest-logo-dark.png">    </p:cNvPr>
+          <p:cNvPr id="2" name="Image 0" descr="assets/stringfest-logo-dark.png"/>
           <p:cNvPicPr>
             <a:picLocks noChangeAspect="1"/>
           </p:cNvPicPr>
           <p:nvPr/>
         </p:nvPicPr>
         <p:blipFill>
-          <a:blip r:embed="rId1"/>
+          <a:blip r:embed="rId3"/>
           <a:srcRect l="9716" t="36914" r="6931" b="47496"/>
           <a:stretch>
             <a:fillRect/>
@@ -4202,11 +3923,11 @@
           <a:bodyPr wrap="square" lIns="0" tIns="0" rIns="0" bIns="0" rtlCol="0" anchor="ctr"/>
           <a:lstStyle/>
           <a:p>
-            <a:pPr indent="0" marL="0">
-              <a:buNone/>
-            </a:pPr>
-            <a:r>
-              <a:rPr lang="en-US" sz="1300" b="1" spc="300" kern="0" dirty="0">
+            <a:pPr marL="0" indent="0">
+              <a:buNone/>
+            </a:pPr>
+            <a:r>
+              <a:rPr lang="en-US" sz="1300" b="1" kern="0" spc="300" dirty="0">
                 <a:solidFill>
                   <a:srgbClr val="CF3338"/>
                 </a:solidFill>
@@ -4241,7 +3962,7 @@
           <a:bodyPr wrap="square" lIns="0" tIns="0" rIns="0" bIns="0" rtlCol="0" anchor="ctr"/>
           <a:lstStyle/>
           <a:p>
-            <a:pPr indent="0" marL="0">
+            <a:pPr marL="0" indent="0">
               <a:buNone/>
             </a:pPr>
             <a:r>
@@ -4399,6 +4120,7 @@
         <a:solidFill>
           <a:srgbClr val="C00000"/>
         </a:solidFill>
+        <a:effectLst/>
       </p:bgPr>
     </p:bg>
     <p:spTree>
@@ -4436,11 +4158,11 @@
           <a:bodyPr wrap="square" lIns="0" tIns="0" rIns="0" bIns="0" rtlCol="0" anchor="ctr"/>
           <a:lstStyle/>
           <a:p>
-            <a:pPr indent="0" marL="0">
-              <a:buNone/>
-            </a:pPr>
-            <a:r>
-              <a:rPr lang="en-US" sz="1500" b="1" spc="300" kern="0" dirty="0">
+            <a:pPr marL="0" indent="0">
+              <a:buNone/>
+            </a:pPr>
+            <a:r>
+              <a:rPr lang="en-US" sz="1500" b="1" kern="0" spc="300" dirty="0">
                 <a:solidFill>
                   <a:srgbClr val="F3C9CA"/>
                 </a:solidFill>
@@ -4475,7 +4197,7 @@
           <a:bodyPr wrap="square" lIns="0" tIns="0" rIns="0" bIns="0" rtlCol="0" anchor="ctr"/>
           <a:lstStyle/>
           <a:p>
-            <a:pPr indent="0" marL="0">
+            <a:pPr marL="0" indent="0">
               <a:buNone/>
             </a:pPr>
             <a:r>
@@ -4514,7 +4236,7 @@
           <a:bodyPr wrap="square" lIns="0" tIns="0" rIns="0" bIns="0" rtlCol="0" anchor="ctr"/>
           <a:lstStyle/>
           <a:p>
-            <a:pPr indent="0" marL="0">
+            <a:pPr marL="0" indent="0">
               <a:buNone/>
             </a:pPr>
             <a:r>
@@ -4548,6 +4270,7 @@
         <a:solidFill>
           <a:srgbClr val="EEECE1"/>
         </a:solidFill>
+        <a:effectLst/>
       </p:bgPr>
     </p:bg>
     <p:spTree>
@@ -4566,14 +4289,14 @@
       </p:grpSpPr>
       <p:pic>
         <p:nvPicPr>
-          <p:cNvPr id="2" name="Image 0" descr="assets/stringfest-logo-dark.png">    </p:cNvPr>
+          <p:cNvPr id="2" name="Image 0" descr="assets/stringfest-logo-dark.png"/>
           <p:cNvPicPr>
             <a:picLocks noChangeAspect="1"/>
           </p:cNvPicPr>
           <p:nvPr/>
         </p:nvPicPr>
         <p:blipFill>
-          <a:blip r:embed="rId1"/>
+          <a:blip r:embed="rId3"/>
           <a:srcRect l="9716" t="36914" r="6931" b="47496"/>
           <a:stretch>
             <a:fillRect/>
@@ -4610,11 +4333,11 @@
           <a:bodyPr wrap="square" lIns="0" tIns="0" rIns="0" bIns="0" rtlCol="0" anchor="ctr"/>
           <a:lstStyle/>
           <a:p>
-            <a:pPr indent="0" marL="0">
-              <a:buNone/>
-            </a:pPr>
-            <a:r>
-              <a:rPr lang="en-US" sz="1300" b="1" spc="300" kern="0" dirty="0">
+            <a:pPr marL="0" indent="0">
+              <a:buNone/>
+            </a:pPr>
+            <a:r>
+              <a:rPr lang="en-US" sz="1300" b="1" kern="0" spc="300" dirty="0">
                 <a:solidFill>
                   <a:srgbClr val="CF3338"/>
                 </a:solidFill>
@@ -4649,7 +4372,7 @@
           <a:bodyPr wrap="square" lIns="0" tIns="0" rIns="0" bIns="0" rtlCol="0" anchor="ctr"/>
           <a:lstStyle/>
           <a:p>
-            <a:pPr indent="0" marL="0">
+            <a:pPr marL="0" indent="0">
               <a:buNone/>
             </a:pPr>
             <a:r>
@@ -4789,6 +4512,13 @@
           </a:solidFill>
           <a:ln/>
         </p:spPr>
+        <p:txBody>
+          <a:bodyPr/>
+          <a:lstStyle/>
+          <a:p>
+            <a:endParaRPr lang="en-US"/>
+          </a:p>
+        </p:txBody>
       </p:sp>
       <p:sp>
         <p:nvSpPr>
@@ -4811,7 +4541,7 @@
           <a:bodyPr wrap="square" rtlCol="0" anchor="t"/>
           <a:lstStyle/>
           <a:p>
-            <a:pPr algn="ctr" indent="0" marL="0">
+            <a:pPr marL="0" indent="0" algn="ctr">
               <a:buNone/>
             </a:pPr>
             <a:r>
@@ -4828,7 +4558,7 @@
             <a:endParaRPr lang="en-US" sz="4000" dirty="0"/>
           </a:p>
           <a:p>
-            <a:pPr algn="ctr" indent="0" marL="0">
+            <a:pPr marL="0" indent="0" algn="ctr">
               <a:spcAft>
                 <a:spcPts val="1600"/>
               </a:spcAft>
@@ -4848,7 +4578,7 @@
             <a:endParaRPr lang="en-US" sz="4000" dirty="0"/>
           </a:p>
           <a:p>
-            <a:pPr algn="ctr" indent="0" marL="0">
+            <a:pPr marL="0" indent="0" algn="ctr">
               <a:buNone/>
             </a:pPr>
             <a:r>
@@ -4865,7 +4595,7 @@
             <a:endParaRPr lang="en-US" sz="4000" dirty="0"/>
           </a:p>
           <a:p>
-            <a:pPr algn="ctr" indent="0" marL="0">
+            <a:pPr marL="0" indent="0" algn="ctr">
               <a:buNone/>
             </a:pPr>
             <a:r>
@@ -4882,7 +4612,7 @@
             <a:endParaRPr lang="en-US" sz="4000" dirty="0"/>
           </a:p>
           <a:p>
-            <a:pPr algn="ctr" indent="0" marL="0">
+            <a:pPr marL="0" indent="0" algn="ctr">
               <a:buNone/>
             </a:pPr>
             <a:r>
@@ -4916,6 +4646,7 @@
         <a:solidFill>
           <a:srgbClr val="EEECE1"/>
         </a:solidFill>
+        <a:effectLst/>
       </p:bgPr>
     </p:bg>
     <p:spTree>
@@ -4934,14 +4665,14 @@
       </p:grpSpPr>
       <p:pic>
         <p:nvPicPr>
-          <p:cNvPr id="2" name="Image 0" descr="assets/stringfest-logo-dark.png">    </p:cNvPr>
+          <p:cNvPr id="2" name="Image 0" descr="assets/stringfest-logo-dark.png"/>
           <p:cNvPicPr>
             <a:picLocks noChangeAspect="1"/>
           </p:cNvPicPr>
           <p:nvPr/>
         </p:nvPicPr>
         <p:blipFill>
-          <a:blip r:embed="rId1"/>
+          <a:blip r:embed="rId3"/>
           <a:srcRect l="9716" t="36914" r="6931" b="47496"/>
           <a:stretch>
             <a:fillRect/>
@@ -4978,11 +4709,11 @@
           <a:bodyPr wrap="square" lIns="0" tIns="0" rIns="0" bIns="0" rtlCol="0" anchor="ctr"/>
           <a:lstStyle/>
           <a:p>
-            <a:pPr indent="0" marL="0">
-              <a:buNone/>
-            </a:pPr>
-            <a:r>
-              <a:rPr lang="en-US" sz="1300" b="1" spc="300" kern="0" dirty="0">
+            <a:pPr marL="0" indent="0">
+              <a:buNone/>
+            </a:pPr>
+            <a:r>
+              <a:rPr lang="en-US" sz="1300" b="1" kern="0" spc="300" dirty="0">
                 <a:solidFill>
                   <a:srgbClr val="CF3338"/>
                 </a:solidFill>
@@ -5017,7 +4748,7 @@
           <a:bodyPr wrap="square" lIns="0" tIns="0" rIns="0" bIns="0" rtlCol="0" anchor="ctr"/>
           <a:lstStyle/>
           <a:p>
-            <a:pPr indent="0" marL="0">
+            <a:pPr marL="0" indent="0">
               <a:buNone/>
             </a:pPr>
             <a:r>
@@ -5160,6 +4891,13 @@
           </a:solidFill>
           <a:ln/>
         </p:spPr>
+        <p:txBody>
+          <a:bodyPr/>
+          <a:lstStyle/>
+          <a:p>
+            <a:endParaRPr lang="en-US"/>
+          </a:p>
+        </p:txBody>
       </p:sp>
       <p:sp>
         <p:nvSpPr>
@@ -5180,6 +4918,13 @@
           </a:solidFill>
           <a:ln/>
         </p:spPr>
+        <p:txBody>
+          <a:bodyPr/>
+          <a:lstStyle/>
+          <a:p>
+            <a:endParaRPr lang="en-US"/>
+          </a:p>
+        </p:txBody>
       </p:sp>
       <p:sp>
         <p:nvSpPr>
@@ -5202,11 +4947,11 @@
           <a:bodyPr wrap="square" lIns="0" tIns="0" rIns="0" bIns="0" rtlCol="0" anchor="ctr"/>
           <a:lstStyle/>
           <a:p>
-            <a:pPr algn="ctr" indent="0" marL="0">
-              <a:buNone/>
-            </a:pPr>
-            <a:r>
-              <a:rPr lang="en-US" sz="1150" b="1" spc="200" kern="0" dirty="0">
+            <a:pPr marL="0" indent="0" algn="ctr">
+              <a:buNone/>
+            </a:pPr>
+            <a:r>
+              <a:rPr lang="en-US" sz="1150" b="1" kern="0" spc="200" dirty="0">
                 <a:solidFill>
                   <a:srgbClr val="FFFFFF"/>
                 </a:solidFill>
@@ -5241,7 +4986,7 @@
           <a:bodyPr wrap="square" lIns="0" tIns="0" rIns="0" bIns="0" rtlCol="0" anchor="t"/>
           <a:lstStyle/>
           <a:p>
-            <a:pPr indent="0" marL="0">
+            <a:pPr marL="0" indent="0">
               <a:lnSpc>
                 <a:spcPct val="106000"/>
               </a:lnSpc>
@@ -5261,7 +5006,7 @@
             <a:endParaRPr lang="en-US" sz="1250" dirty="0"/>
           </a:p>
           <a:p>
-            <a:pPr indent="0" marL="0">
+            <a:pPr marL="0" indent="0">
               <a:lnSpc>
                 <a:spcPct val="106000"/>
               </a:lnSpc>
@@ -5281,7 +5026,7 @@
             <a:endParaRPr lang="en-US" sz="1250" dirty="0"/>
           </a:p>
           <a:p>
-            <a:pPr indent="0" marL="0">
+            <a:pPr marL="0" indent="0">
               <a:lnSpc>
                 <a:spcPct val="106000"/>
               </a:lnSpc>
@@ -5301,7 +5046,7 @@
             <a:endParaRPr lang="en-US" sz="1250" dirty="0"/>
           </a:p>
           <a:p>
-            <a:pPr indent="0" marL="0">
+            <a:pPr marL="0" indent="0">
               <a:lnSpc>
                 <a:spcPct val="106000"/>
               </a:lnSpc>
@@ -5321,7 +5066,7 @@
             <a:endParaRPr lang="en-US" sz="1250" dirty="0"/>
           </a:p>
           <a:p>
-            <a:pPr indent="0" marL="0">
+            <a:pPr marL="0" indent="0">
               <a:lnSpc>
                 <a:spcPct val="106000"/>
               </a:lnSpc>
@@ -5341,7 +5086,7 @@
             <a:endParaRPr lang="en-US" sz="1250" dirty="0"/>
           </a:p>
           <a:p>
-            <a:pPr indent="0" marL="0">
+            <a:pPr marL="0" indent="0">
               <a:lnSpc>
                 <a:spcPct val="106000"/>
               </a:lnSpc>
@@ -5378,6 +5123,7 @@
         <a:solidFill>
           <a:srgbClr val="EEECE1"/>
         </a:solidFill>
+        <a:effectLst/>
       </p:bgPr>
     </p:bg>
     <p:spTree>
@@ -5396,14 +5142,14 @@
       </p:grpSpPr>
       <p:pic>
         <p:nvPicPr>
-          <p:cNvPr id="2" name="Image 0" descr="assets/stringfest-logo-dark.png">    </p:cNvPr>
+          <p:cNvPr id="2" name="Image 0" descr="assets/stringfest-logo-dark.png"/>
           <p:cNvPicPr>
             <a:picLocks noChangeAspect="1"/>
           </p:cNvPicPr>
           <p:nvPr/>
         </p:nvPicPr>
         <p:blipFill>
-          <a:blip r:embed="rId1"/>
+          <a:blip r:embed="rId3"/>
           <a:srcRect l="9716" t="36914" r="6931" b="47496"/>
           <a:stretch>
             <a:fillRect/>
@@ -5440,11 +5186,11 @@
           <a:bodyPr wrap="square" lIns="0" tIns="0" rIns="0" bIns="0" rtlCol="0" anchor="ctr"/>
           <a:lstStyle/>
           <a:p>
-            <a:pPr indent="0" marL="0">
-              <a:buNone/>
-            </a:pPr>
-            <a:r>
-              <a:rPr lang="en-US" sz="1300" b="1" spc="300" kern="0" dirty="0">
+            <a:pPr marL="0" indent="0">
+              <a:buNone/>
+            </a:pPr>
+            <a:r>
+              <a:rPr lang="en-US" sz="1300" b="1" kern="0" spc="300" dirty="0">
                 <a:solidFill>
                   <a:srgbClr val="CF3338"/>
                 </a:solidFill>
@@ -5479,7 +5225,7 @@
           <a:bodyPr wrap="square" lIns="0" tIns="0" rIns="0" bIns="0" rtlCol="0" anchor="ctr"/>
           <a:lstStyle/>
           <a:p>
-            <a:pPr indent="0" marL="0">
+            <a:pPr marL="0" indent="0">
               <a:buNone/>
             </a:pPr>
             <a:r>
@@ -5622,6 +5368,13 @@
           </a:solidFill>
           <a:ln/>
         </p:spPr>
+        <p:txBody>
+          <a:bodyPr/>
+          <a:lstStyle/>
+          <a:p>
+            <a:endParaRPr lang="en-US"/>
+          </a:p>
+        </p:txBody>
       </p:sp>
       <p:sp>
         <p:nvSpPr>
@@ -5642,6 +5395,13 @@
           </a:solidFill>
           <a:ln/>
         </p:spPr>
+        <p:txBody>
+          <a:bodyPr/>
+          <a:lstStyle/>
+          <a:p>
+            <a:endParaRPr lang="en-US"/>
+          </a:p>
+        </p:txBody>
       </p:sp>
       <p:sp>
         <p:nvSpPr>
@@ -5664,11 +5424,11 @@
           <a:bodyPr wrap="square" lIns="0" tIns="0" rIns="0" bIns="0" rtlCol="0" anchor="ctr"/>
           <a:lstStyle/>
           <a:p>
-            <a:pPr algn="ctr" indent="0" marL="0">
-              <a:buNone/>
-            </a:pPr>
-            <a:r>
-              <a:rPr lang="en-US" sz="1150" b="1" spc="200" kern="0" dirty="0">
+            <a:pPr marL="0" indent="0" algn="ctr">
+              <a:buNone/>
+            </a:pPr>
+            <a:r>
+              <a:rPr lang="en-US" sz="1150" b="1" kern="0" spc="200" dirty="0">
                 <a:solidFill>
                   <a:srgbClr val="FFFFFF"/>
                 </a:solidFill>
@@ -5703,7 +5463,7 @@
           <a:bodyPr wrap="square" lIns="0" tIns="0" rIns="0" bIns="0" rtlCol="0" anchor="t"/>
           <a:lstStyle/>
           <a:p>
-            <a:pPr indent="0" marL="0">
+            <a:pPr marL="0" indent="0">
               <a:lnSpc>
                 <a:spcPct val="106000"/>
               </a:lnSpc>
@@ -5723,7 +5483,7 @@
             <a:endParaRPr lang="en-US" sz="1250" dirty="0"/>
           </a:p>
           <a:p>
-            <a:pPr indent="0" marL="0">
+            <a:pPr marL="0" indent="0">
               <a:lnSpc>
                 <a:spcPct val="106000"/>
               </a:lnSpc>
@@ -5743,7 +5503,7 @@
             <a:endParaRPr lang="en-US" sz="1250" dirty="0"/>
           </a:p>
           <a:p>
-            <a:pPr indent="0" marL="0">
+            <a:pPr marL="0" indent="0">
               <a:lnSpc>
                 <a:spcPct val="106000"/>
               </a:lnSpc>
@@ -5763,7 +5523,7 @@
             <a:endParaRPr lang="en-US" sz="1250" dirty="0"/>
           </a:p>
           <a:p>
-            <a:pPr indent="0" marL="0">
+            <a:pPr marL="0" indent="0">
               <a:lnSpc>
                 <a:spcPct val="106000"/>
               </a:lnSpc>
@@ -5783,7 +5543,7 @@
             <a:endParaRPr lang="en-US" sz="1250" dirty="0"/>
           </a:p>
           <a:p>
-            <a:pPr indent="0" marL="0">
+            <a:pPr marL="0" indent="0">
               <a:lnSpc>
                 <a:spcPct val="106000"/>
               </a:lnSpc>
@@ -5820,6 +5580,7 @@
         <a:solidFill>
           <a:srgbClr val="EEECE1"/>
         </a:solidFill>
+        <a:effectLst/>
       </p:bgPr>
     </p:bg>
     <p:spTree>
@@ -5838,14 +5599,14 @@
       </p:grpSpPr>
       <p:pic>
         <p:nvPicPr>
-          <p:cNvPr id="2" name="Image 0" descr="assets/stringfest-logo-dark.png">    </p:cNvPr>
+          <p:cNvPr id="2" name="Image 0" descr="assets/stringfest-logo-dark.png"/>
           <p:cNvPicPr>
             <a:picLocks noChangeAspect="1"/>
           </p:cNvPicPr>
           <p:nvPr/>
         </p:nvPicPr>
         <p:blipFill>
-          <a:blip r:embed="rId1"/>
+          <a:blip r:embed="rId3"/>
           <a:srcRect l="9716" t="36914" r="6931" b="47496"/>
           <a:stretch>
             <a:fillRect/>
@@ -5882,11 +5643,11 @@
           <a:bodyPr wrap="square" lIns="0" tIns="0" rIns="0" bIns="0" rtlCol="0" anchor="ctr"/>
           <a:lstStyle/>
           <a:p>
-            <a:pPr indent="0" marL="0">
-              <a:buNone/>
-            </a:pPr>
-            <a:r>
-              <a:rPr lang="en-US" sz="1300" b="1" spc="300" kern="0" dirty="0">
+            <a:pPr marL="0" indent="0">
+              <a:buNone/>
+            </a:pPr>
+            <a:r>
+              <a:rPr lang="en-US" sz="1300" b="1" kern="0" spc="300" dirty="0">
                 <a:solidFill>
                   <a:srgbClr val="CF3338"/>
                 </a:solidFill>
@@ -5921,7 +5682,7 @@
           <a:bodyPr wrap="square" lIns="0" tIns="0" rIns="0" bIns="0" rtlCol="0" anchor="ctr"/>
           <a:lstStyle/>
           <a:p>
-            <a:pPr indent="0" marL="0">
+            <a:pPr marL="0" indent="0">
               <a:buNone/>
             </a:pPr>
             <a:r>
@@ -5941,14 +5702,14 @@
       </p:sp>
       <p:pic>
         <p:nvPicPr>
-          <p:cNvPr id="5" name="Image 1" descr="chart_profit.png">    </p:cNvPr>
+          <p:cNvPr id="5" name="Image 1" descr="chart_profit.png"/>
           <p:cNvPicPr>
             <a:picLocks noChangeAspect="1"/>
           </p:cNvPicPr>
           <p:nvPr/>
         </p:nvPicPr>
         <p:blipFill>
-          <a:blip r:embed="rId2"/>
+          <a:blip r:embed="rId4"/>
           <a:stretch>
             <a:fillRect/>
           </a:stretch>
@@ -6064,6 +5825,13 @@
           </a:solidFill>
           <a:ln/>
         </p:spPr>
+        <p:txBody>
+          <a:bodyPr/>
+          <a:lstStyle/>
+          <a:p>
+            <a:endParaRPr lang="en-US"/>
+          </a:p>
+        </p:txBody>
       </p:sp>
       <p:sp>
         <p:nvSpPr>
@@ -6084,6 +5852,13 @@
           </a:solidFill>
           <a:ln/>
         </p:spPr>
+        <p:txBody>
+          <a:bodyPr/>
+          <a:lstStyle/>
+          <a:p>
+            <a:endParaRPr lang="en-US"/>
+          </a:p>
+        </p:txBody>
       </p:sp>
       <p:sp>
         <p:nvSpPr>
@@ -6106,11 +5881,11 @@
           <a:bodyPr wrap="square" lIns="0" tIns="0" rIns="0" bIns="0" rtlCol="0" anchor="ctr"/>
           <a:lstStyle/>
           <a:p>
-            <a:pPr algn="ctr" indent="0" marL="0">
-              <a:buNone/>
-            </a:pPr>
-            <a:r>
-              <a:rPr lang="en-US" sz="1150" b="1" spc="200" kern="0" dirty="0">
+            <a:pPr marL="0" indent="0" algn="ctr">
+              <a:buNone/>
+            </a:pPr>
+            <a:r>
+              <a:rPr lang="en-US" sz="1150" b="1" kern="0" spc="200" dirty="0">
                 <a:solidFill>
                   <a:srgbClr val="FFFFFF"/>
                 </a:solidFill>
@@ -6145,7 +5920,7 @@
           <a:bodyPr wrap="square" lIns="0" tIns="0" rIns="0" bIns="0" rtlCol="0" anchor="t"/>
           <a:lstStyle/>
           <a:p>
-            <a:pPr indent="0" marL="0">
+            <a:pPr marL="0" indent="0">
               <a:lnSpc>
                 <a:spcPct val="106000"/>
               </a:lnSpc>
@@ -6165,7 +5940,7 @@
             <a:endParaRPr lang="en-US" sz="1250" dirty="0"/>
           </a:p>
           <a:p>
-            <a:pPr indent="0" marL="0">
+            <a:pPr marL="0" indent="0">
               <a:lnSpc>
                 <a:spcPct val="106000"/>
               </a:lnSpc>
@@ -6185,7 +5960,7 @@
             <a:endParaRPr lang="en-US" sz="1250" dirty="0"/>
           </a:p>
           <a:p>
-            <a:pPr indent="0" marL="0">
+            <a:pPr marL="0" indent="0">
               <a:lnSpc>
                 <a:spcPct val="106000"/>
               </a:lnSpc>
@@ -6222,6 +5997,7 @@
         <a:solidFill>
           <a:srgbClr val="EEECE1"/>
         </a:solidFill>
+        <a:effectLst/>
       </p:bgPr>
     </p:bg>
     <p:spTree>
@@ -6240,14 +6016,14 @@
       </p:grpSpPr>
       <p:pic>
         <p:nvPicPr>
-          <p:cNvPr id="2" name="Image 0" descr="assets/stringfest-logo-dark.png">    </p:cNvPr>
+          <p:cNvPr id="2" name="Image 0" descr="assets/stringfest-logo-dark.png"/>
           <p:cNvPicPr>
             <a:picLocks noChangeAspect="1"/>
           </p:cNvPicPr>
           <p:nvPr/>
         </p:nvPicPr>
         <p:blipFill>
-          <a:blip r:embed="rId1"/>
+          <a:blip r:embed="rId3"/>
           <a:srcRect l="9716" t="36914" r="6931" b="47496"/>
           <a:stretch>
             <a:fillRect/>
@@ -6284,11 +6060,11 @@
           <a:bodyPr wrap="square" lIns="0" tIns="0" rIns="0" bIns="0" rtlCol="0" anchor="ctr"/>
           <a:lstStyle/>
           <a:p>
-            <a:pPr indent="0" marL="0">
-              <a:buNone/>
-            </a:pPr>
-            <a:r>
-              <a:rPr lang="en-US" sz="1300" b="1" spc="300" kern="0" dirty="0">
+            <a:pPr marL="0" indent="0">
+              <a:buNone/>
+            </a:pPr>
+            <a:r>
+              <a:rPr lang="en-US" sz="1300" b="1" kern="0" spc="300" dirty="0">
                 <a:solidFill>
                   <a:srgbClr val="CF3338"/>
                 </a:solidFill>
@@ -6323,7 +6099,7 @@
           <a:bodyPr wrap="square" lIns="0" tIns="0" rIns="0" bIns="0" rtlCol="0" anchor="ctr"/>
           <a:lstStyle/>
           <a:p>
-            <a:pPr indent="0" marL="0">
+            <a:pPr marL="0" indent="0">
               <a:buNone/>
             </a:pPr>
             <a:r>
@@ -6343,14 +6119,14 @@
       </p:sp>
       <p:pic>
         <p:nvPicPr>
-          <p:cNvPr id="5" name="Image 1" descr="chart_inventory.png">    </p:cNvPr>
+          <p:cNvPr id="5" name="Image 1" descr="chart_inventory.png"/>
           <p:cNvPicPr>
             <a:picLocks noChangeAspect="1"/>
           </p:cNvPicPr>
           <p:nvPr/>
         </p:nvPicPr>
         <p:blipFill>
-          <a:blip r:embed="rId2"/>
+          <a:blip r:embed="rId4"/>
           <a:stretch>
             <a:fillRect/>
           </a:stretch>
@@ -6487,6 +6263,13 @@
           </a:solidFill>
           <a:ln/>
         </p:spPr>
+        <p:txBody>
+          <a:bodyPr/>
+          <a:lstStyle/>
+          <a:p>
+            <a:endParaRPr lang="en-US"/>
+          </a:p>
+        </p:txBody>
       </p:sp>
       <p:sp>
         <p:nvSpPr>
@@ -6507,6 +6290,13 @@
           </a:solidFill>
           <a:ln/>
         </p:spPr>
+        <p:txBody>
+          <a:bodyPr/>
+          <a:lstStyle/>
+          <a:p>
+            <a:endParaRPr lang="en-US"/>
+          </a:p>
+        </p:txBody>
       </p:sp>
       <p:sp>
         <p:nvSpPr>
@@ -6529,11 +6319,11 @@
           <a:bodyPr wrap="square" lIns="0" tIns="0" rIns="0" bIns="0" rtlCol="0" anchor="ctr"/>
           <a:lstStyle/>
           <a:p>
-            <a:pPr algn="ctr" indent="0" marL="0">
-              <a:buNone/>
-            </a:pPr>
-            <a:r>
-              <a:rPr lang="en-US" sz="1150" b="1" spc="200" kern="0" dirty="0">
+            <a:pPr marL="0" indent="0" algn="ctr">
+              <a:buNone/>
+            </a:pPr>
+            <a:r>
+              <a:rPr lang="en-US" sz="1150" b="1" kern="0" spc="200" dirty="0">
                 <a:solidFill>
                   <a:srgbClr val="FFFFFF"/>
                 </a:solidFill>
@@ -6568,7 +6358,7 @@
           <a:bodyPr wrap="square" lIns="0" tIns="0" rIns="0" bIns="0" rtlCol="0" anchor="t"/>
           <a:lstStyle/>
           <a:p>
-            <a:pPr indent="0" marL="0">
+            <a:pPr marL="0" indent="0">
               <a:lnSpc>
                 <a:spcPct val="106000"/>
               </a:lnSpc>
@@ -6588,7 +6378,7 @@
             <a:endParaRPr lang="en-US" sz="1250" dirty="0"/>
           </a:p>
           <a:p>
-            <a:pPr indent="0" marL="0">
+            <a:pPr marL="0" indent="0">
               <a:lnSpc>
                 <a:spcPct val="106000"/>
               </a:lnSpc>
@@ -6608,7 +6398,7 @@
             <a:endParaRPr lang="en-US" sz="1250" dirty="0"/>
           </a:p>
           <a:p>
-            <a:pPr indent="0" marL="0">
+            <a:pPr marL="0" indent="0">
               <a:lnSpc>
                 <a:spcPct val="106000"/>
               </a:lnSpc>
@@ -6645,6 +6435,7 @@
         <a:solidFill>
           <a:srgbClr val="EEECE1"/>
         </a:solidFill>
+        <a:effectLst/>
       </p:bgPr>
     </p:bg>
     <p:spTree>
@@ -6663,14 +6454,14 @@
       </p:grpSpPr>
       <p:pic>
         <p:nvPicPr>
-          <p:cNvPr id="2" name="Image 0" descr="assets/stringfest-logo-dark.png">    </p:cNvPr>
+          <p:cNvPr id="2" name="Image 0" descr="assets/stringfest-logo-dark.png"/>
           <p:cNvPicPr>
             <a:picLocks noChangeAspect="1"/>
           </p:cNvPicPr>
           <p:nvPr/>
         </p:nvPicPr>
         <p:blipFill>
-          <a:blip r:embed="rId1"/>
+          <a:blip r:embed="rId3"/>
           <a:srcRect l="9716" t="36914" r="6931" b="47496"/>
           <a:stretch>
             <a:fillRect/>
@@ -6707,11 +6498,11 @@
           <a:bodyPr wrap="square" lIns="0" tIns="0" rIns="0" bIns="0" rtlCol="0" anchor="ctr"/>
           <a:lstStyle/>
           <a:p>
-            <a:pPr indent="0" marL="0">
-              <a:buNone/>
-            </a:pPr>
-            <a:r>
-              <a:rPr lang="en-US" sz="1300" b="1" spc="300" kern="0" dirty="0">
+            <a:pPr marL="0" indent="0">
+              <a:buNone/>
+            </a:pPr>
+            <a:r>
+              <a:rPr lang="en-US" sz="1300" b="1" kern="0" spc="300" dirty="0">
                 <a:solidFill>
                   <a:srgbClr val="CF3338"/>
                 </a:solidFill>
@@ -6746,7 +6537,7 @@
           <a:bodyPr wrap="square" lIns="0" tIns="0" rIns="0" bIns="0" rtlCol="0" anchor="ctr"/>
           <a:lstStyle/>
           <a:p>
-            <a:pPr indent="0" marL="0">
+            <a:pPr marL="0" indent="0">
               <a:buNone/>
             </a:pPr>
             <a:r>
@@ -6783,6 +6574,13 @@
           </a:solidFill>
           <a:ln/>
         </p:spPr>
+        <p:txBody>
+          <a:bodyPr/>
+          <a:lstStyle/>
+          <a:p>
+            <a:endParaRPr lang="en-US"/>
+          </a:p>
+        </p:txBody>
       </p:sp>
       <p:sp>
         <p:nvSpPr>
@@ -6805,7 +6603,7 @@
           <a:bodyPr wrap="square" rtlCol="0" anchor="t"/>
           <a:lstStyle/>
           <a:p>
-            <a:pPr indent="0" marL="0">
+            <a:pPr marL="0" indent="0">
               <a:spcAft>
                 <a:spcPts val="1200"/>
               </a:spcAft>
@@ -6825,7 +6623,7 @@
             <a:endParaRPr lang="en-US" sz="1650" dirty="0"/>
           </a:p>
           <a:p>
-            <a:pPr indent="0" marL="0">
+            <a:pPr marL="0" indent="0">
               <a:spcAft>
                 <a:spcPts val="1200"/>
               </a:spcAft>
@@ -6845,7 +6643,7 @@
             <a:endParaRPr lang="en-US" sz="1650" dirty="0"/>
           </a:p>
           <a:p>
-            <a:pPr indent="0" marL="0">
+            <a:pPr marL="0" indent="0">
               <a:spcAft>
                 <a:spcPts val="1200"/>
               </a:spcAft>
@@ -6865,7 +6663,7 @@
             <a:endParaRPr lang="en-US" sz="1650" dirty="0"/>
           </a:p>
           <a:p>
-            <a:pPr indent="0" marL="0">
+            <a:pPr marL="0" indent="0">
               <a:buNone/>
             </a:pPr>
             <a:r>
@@ -6899,6 +6697,7 @@
         <a:solidFill>
           <a:srgbClr val="C00000"/>
         </a:solidFill>
+        <a:effectLst/>
       </p:bgPr>
     </p:bg>
     <p:spTree>
@@ -6936,7 +6735,7 @@
           <a:bodyPr wrap="square" lIns="0" tIns="0" rIns="0" bIns="0" rtlCol="0" anchor="ctr"/>
           <a:lstStyle/>
           <a:p>
-            <a:pPr indent="0" marL="0">
+            <a:pPr marL="0" indent="0">
               <a:buNone/>
             </a:pPr>
             <a:r>
@@ -6975,7 +6774,7 @@
           <a:bodyPr wrap="square" rtlCol="0" anchor="t"/>
           <a:lstStyle/>
           <a:p>
-            <a:pPr indent="0" marL="0">
+            <a:pPr marL="0" indent="0">
               <a:spcAft>
                 <a:spcPts val="1400"/>
               </a:spcAft>
@@ -6995,7 +6794,7 @@
             <a:endParaRPr lang="en-US" sz="1900" dirty="0"/>
           </a:p>
           <a:p>
-            <a:pPr indent="0" marL="0">
+            <a:pPr marL="0" indent="0">
               <a:spcAft>
                 <a:spcPts val="1400"/>
               </a:spcAft>
@@ -7015,7 +6814,7 @@
             <a:endParaRPr lang="en-US" sz="1900" dirty="0"/>
           </a:p>
           <a:p>
-            <a:pPr indent="0" marL="0">
+            <a:pPr marL="0" indent="0">
               <a:buNone/>
             </a:pPr>
             <a:r>
@@ -7035,14 +6834,14 @@
       </p:sp>
       <p:pic>
         <p:nvPicPr>
-          <p:cNvPr id="4" name="Image 0" descr="assets/plum-solutions.png">    </p:cNvPr>
+          <p:cNvPr id="4" name="Image 0" descr="assets/plum-solutions.png"/>
           <p:cNvPicPr>
             <a:picLocks noChangeAspect="1"/>
           </p:cNvPicPr>
           <p:nvPr/>
         </p:nvPicPr>
         <p:blipFill>
-          <a:blip r:embed="rId1"/>
+          <a:blip r:embed="rId3"/>
           <a:stretch>
             <a:fillRect/>
           </a:stretch>
@@ -7059,14 +6858,14 @@
       </p:pic>
       <p:pic>
         <p:nvPicPr>
-          <p:cNvPr id="5" name="Image 1" descr="assets/fm-excel-logo.jpg">    </p:cNvPr>
+          <p:cNvPr id="5" name="Image 1" descr="assets/fm-excel-logo.jpg"/>
           <p:cNvPicPr>
             <a:picLocks noChangeAspect="1"/>
           </p:cNvPicPr>
           <p:nvPr/>
         </p:nvPicPr>
         <p:blipFill>
-          <a:blip r:embed="rId2"/>
+          <a:blip r:embed="rId4"/>
           <a:stretch>
             <a:fillRect/>
           </a:stretch>
@@ -7097,6 +6896,7 @@
         <a:solidFill>
           <a:srgbClr val="EEECE1"/>
         </a:solidFill>
+        <a:effectLst/>
       </p:bgPr>
     </p:bg>
     <p:spTree>
@@ -7115,14 +6915,14 @@
       </p:grpSpPr>
       <p:pic>
         <p:nvPicPr>
-          <p:cNvPr id="2" name="Image 0" descr="assets/stringfest-logo-dark.png">    </p:cNvPr>
+          <p:cNvPr id="2" name="Image 0" descr="assets/stringfest-logo-dark.png"/>
           <p:cNvPicPr>
             <a:picLocks noChangeAspect="1"/>
           </p:cNvPicPr>
           <p:nvPr/>
         </p:nvPicPr>
         <p:blipFill>
-          <a:blip r:embed="rId1"/>
+          <a:blip r:embed="rId3"/>
           <a:srcRect l="9716" t="36914" r="6931" b="47496"/>
           <a:stretch>
             <a:fillRect/>
@@ -7159,11 +6959,11 @@
           <a:bodyPr wrap="square" lIns="0" tIns="0" rIns="0" bIns="0" rtlCol="0" anchor="ctr"/>
           <a:lstStyle/>
           <a:p>
-            <a:pPr indent="0" marL="0">
-              <a:buNone/>
-            </a:pPr>
-            <a:r>
-              <a:rPr lang="en-US" sz="1300" b="1" spc="300" kern="0" dirty="0">
+            <a:pPr marL="0" indent="0">
+              <a:buNone/>
+            </a:pPr>
+            <a:r>
+              <a:rPr lang="en-US" sz="1300" b="1" kern="0" spc="300" dirty="0">
                 <a:solidFill>
                   <a:srgbClr val="CF3338"/>
                 </a:solidFill>
@@ -7198,7 +6998,7 @@
           <a:bodyPr wrap="square" lIns="0" tIns="0" rIns="0" bIns="0" rtlCol="0" anchor="ctr"/>
           <a:lstStyle/>
           <a:p>
-            <a:pPr indent="0" marL="0">
+            <a:pPr marL="0" indent="0">
               <a:buNone/>
             </a:pPr>
             <a:r>
@@ -7235,6 +7035,13 @@
           </a:solidFill>
           <a:ln/>
         </p:spPr>
+        <p:txBody>
+          <a:bodyPr/>
+          <a:lstStyle/>
+          <a:p>
+            <a:endParaRPr lang="en-US"/>
+          </a:p>
+        </p:txBody>
       </p:sp>
       <p:sp>
         <p:nvSpPr>
@@ -7255,6 +7062,13 @@
           </a:solidFill>
           <a:ln/>
         </p:spPr>
+        <p:txBody>
+          <a:bodyPr/>
+          <a:lstStyle/>
+          <a:p>
+            <a:endParaRPr lang="en-US"/>
+          </a:p>
+        </p:txBody>
       </p:sp>
       <p:sp>
         <p:nvSpPr>
@@ -7277,11 +7091,11 @@
           <a:bodyPr wrap="square" lIns="0" tIns="0" rIns="0" bIns="0" rtlCol="0" anchor="ctr"/>
           <a:lstStyle/>
           <a:p>
-            <a:pPr algn="ctr" indent="0" marL="0">
-              <a:buNone/>
-            </a:pPr>
-            <a:r>
-              <a:rPr lang="en-US" sz="1500" b="1" spc="200" kern="0" dirty="0">
+            <a:pPr marL="0" indent="0" algn="ctr">
+              <a:buNone/>
+            </a:pPr>
+            <a:r>
+              <a:rPr lang="en-US" sz="1500" b="1" kern="0" spc="200" dirty="0">
                 <a:solidFill>
                   <a:srgbClr val="FFFFFF"/>
                 </a:solidFill>
@@ -7441,6 +7255,13 @@
           </a:solidFill>
           <a:ln/>
         </p:spPr>
+        <p:txBody>
+          <a:bodyPr/>
+          <a:lstStyle/>
+          <a:p>
+            <a:endParaRPr lang="en-US"/>
+          </a:p>
+        </p:txBody>
       </p:sp>
       <p:sp>
         <p:nvSpPr>
@@ -7461,6 +7282,13 @@
           </a:solidFill>
           <a:ln/>
         </p:spPr>
+        <p:txBody>
+          <a:bodyPr/>
+          <a:lstStyle/>
+          <a:p>
+            <a:endParaRPr lang="en-US"/>
+          </a:p>
+        </p:txBody>
       </p:sp>
       <p:sp>
         <p:nvSpPr>
@@ -7483,11 +7311,11 @@
           <a:bodyPr wrap="square" lIns="0" tIns="0" rIns="0" bIns="0" rtlCol="0" anchor="ctr"/>
           <a:lstStyle/>
           <a:p>
-            <a:pPr algn="ctr" indent="0" marL="0">
-              <a:buNone/>
-            </a:pPr>
-            <a:r>
-              <a:rPr lang="en-US" sz="1500" b="1" spc="200" kern="0" dirty="0">
+            <a:pPr marL="0" indent="0" algn="ctr">
+              <a:buNone/>
+            </a:pPr>
+            <a:r>
+              <a:rPr lang="en-US" sz="1500" b="1" kern="0" spc="200" dirty="0">
                 <a:solidFill>
                   <a:srgbClr val="FFFFFF"/>
                 </a:solidFill>
@@ -7644,6 +7472,7 @@
         <a:solidFill>
           <a:srgbClr val="EEECE1"/>
         </a:solidFill>
+        <a:effectLst/>
       </p:bgPr>
     </p:bg>
     <p:spTree>
@@ -7662,14 +7491,14 @@
       </p:grpSpPr>
       <p:pic>
         <p:nvPicPr>
-          <p:cNvPr id="2" name="Image 0" descr="assets/stringfest-logo-dark.png">    </p:cNvPr>
+          <p:cNvPr id="2" name="Image 0" descr="assets/stringfest-logo-dark.png"/>
           <p:cNvPicPr>
             <a:picLocks noChangeAspect="1"/>
           </p:cNvPicPr>
           <p:nvPr/>
         </p:nvPicPr>
         <p:blipFill>
-          <a:blip r:embed="rId1"/>
+          <a:blip r:embed="rId3"/>
           <a:srcRect l="9716" t="36914" r="6931" b="47496"/>
           <a:stretch>
             <a:fillRect/>
@@ -7687,14 +7516,14 @@
       </p:pic>
       <p:pic>
         <p:nvPicPr>
-          <p:cNvPr id="3" name="Image 1" descr="assets/pyxlda.jpg">    </p:cNvPr>
+          <p:cNvPr id="3" name="Image 1" descr="assets/pyxlda.jpg"/>
           <p:cNvPicPr>
             <a:picLocks noChangeAspect="1"/>
           </p:cNvPicPr>
           <p:nvPr/>
         </p:nvPicPr>
         <p:blipFill>
-          <a:blip r:embed="rId2"/>
+          <a:blip r:embed="rId4"/>
           <a:stretch>
             <a:fillRect/>
           </a:stretch>
@@ -7730,7 +7559,7 @@
           <a:bodyPr wrap="square" lIns="0" tIns="0" rIns="0" bIns="0" rtlCol="0" anchor="ctr"/>
           <a:lstStyle/>
           <a:p>
-            <a:pPr indent="0" marL="0">
+            <a:pPr marL="0" indent="0">
               <a:buNone/>
             </a:pPr>
             <a:r>
@@ -7769,7 +7598,7 @@
           <a:bodyPr wrap="square" rtlCol="0" anchor="t"/>
           <a:lstStyle/>
           <a:p>
-            <a:pPr indent="0" marL="0">
+            <a:pPr marL="0" indent="0">
               <a:spcAft>
                 <a:spcPts val="1000"/>
               </a:spcAft>
@@ -7789,7 +7618,7 @@
             <a:endParaRPr lang="en-US" sz="1600" dirty="0"/>
           </a:p>
           <a:p>
-            <a:pPr indent="0" marL="0">
+            <a:pPr marL="0" indent="0">
               <a:spcAft>
                 <a:spcPts val="1000"/>
               </a:spcAft>
@@ -7809,7 +7638,7 @@
             <a:endParaRPr lang="en-US" sz="1600" dirty="0"/>
           </a:p>
           <a:p>
-            <a:pPr indent="0" marL="0">
+            <a:pPr marL="0" indent="0">
               <a:spcAft>
                 <a:spcPts val="1400"/>
               </a:spcAft>
@@ -7829,7 +7658,7 @@
             <a:endParaRPr lang="en-US" sz="1600" dirty="0"/>
           </a:p>
           <a:p>
-            <a:pPr indent="0" marL="0">
+            <a:pPr marL="0" indent="0">
               <a:spcAft>
                 <a:spcPts val="1400"/>
               </a:spcAft>
@@ -7849,7 +7678,7 @@
             <a:endParaRPr lang="en-US" sz="1600" dirty="0"/>
           </a:p>
           <a:p>
-            <a:pPr indent="0" marL="0">
+            <a:pPr marL="0" indent="0">
               <a:buNone/>
             </a:pPr>
             <a:r>
@@ -7886,6 +7715,13 @@
           </a:solidFill>
           <a:ln/>
         </p:spPr>
+        <p:txBody>
+          <a:bodyPr/>
+          <a:lstStyle/>
+          <a:p>
+            <a:endParaRPr lang="en-US"/>
+          </a:p>
+        </p:txBody>
       </p:sp>
       <p:sp>
         <p:nvSpPr>
@@ -7908,7 +7744,7 @@
           <a:bodyPr wrap="square" lIns="0" tIns="0" rIns="0" bIns="0" rtlCol="0" anchor="ctr"/>
           <a:lstStyle/>
           <a:p>
-            <a:pPr algn="ctr" indent="0" marL="0">
+            <a:pPr marL="0" indent="0" algn="ctr">
               <a:buNone/>
             </a:pPr>
             <a:r>
@@ -7922,9 +7758,6 @@
               </a:rPr>
               <a:t>Get launch-day notice:  </a:t>
             </a:r>
-            <a:pPr algn="ctr" indent="0" marL="0">
-              <a:buNone/>
-            </a:pPr>
             <a:r>
               <a:rPr lang="en-US" sz="1600" b="1" u="sng" dirty="0">
                 <a:solidFill>
@@ -7934,7 +7767,18 @@
                 <a:ea typeface="Arial" pitchFamily="34" charset="-122"/>
                 <a:cs typeface="Arial" pitchFamily="34" charset="-120"/>
               </a:rPr>
-              <a:t>stringfestanalytics.com/book</a:t>
+              <a:t>stringfestanalytics.com/</a:t>
+            </a:r>
+            <a:r>
+              <a:rPr lang="en-US" sz="1600" b="1" u="sng" dirty="0" err="1">
+                <a:solidFill>
+                  <a:srgbClr val="FFFFFF"/>
+                </a:solidFill>
+                <a:latin typeface="Arial" pitchFamily="34" charset="0"/>
+                <a:ea typeface="Arial" pitchFamily="34" charset="-122"/>
+                <a:cs typeface="Arial" pitchFamily="34" charset="-120"/>
+              </a:rPr>
+              <a:t>pyxlda</a:t>
             </a:r>
             <a:endParaRPr lang="en-US" sz="1600" dirty="0"/>
           </a:p>
@@ -7950,12 +7794,13 @@
 
 <file path=ppt/slides/slide22.xml><?xml version="1.0" encoding="utf-8"?>
 <p:sld xmlns:a="http://schemas.openxmlformats.org/drawingml/2006/main" xmlns:r="http://schemas.openxmlformats.org/officeDocument/2006/relationships" xmlns:p="http://schemas.openxmlformats.org/presentationml/2006/main">
-  <p:cSld name="Slide 22">
+  <p:cSld name="Slide 23">
     <p:bg>
       <p:bgPr>
         <a:solidFill>
-          <a:srgbClr val="EEECE1"/>
+          <a:srgbClr val="C00000"/>
         </a:solidFill>
+        <a:effectLst/>
       </p:bgPr>
     </p:bg>
     <p:spTree>
@@ -7974,14 +7819,14 @@
       </p:grpSpPr>
       <p:pic>
         <p:nvPicPr>
-          <p:cNvPr id="2" name="Image 0" descr="assets/stringfest-logo-dark.png">    </p:cNvPr>
+          <p:cNvPr id="2" name="Image 0" descr="assets/stringfest-logo-white.png"/>
           <p:cNvPicPr>
             <a:picLocks noChangeAspect="1"/>
           </p:cNvPicPr>
           <p:nvPr/>
         </p:nvPicPr>
         <p:blipFill>
-          <a:blip r:embed="rId1"/>
+          <a:blip r:embed="rId3"/>
           <a:srcRect l="9716" t="36914" r="6931" b="47496"/>
           <a:stretch>
             <a:fillRect/>
@@ -7989,8 +7834,8 @@
         </p:blipFill>
         <p:spPr>
           <a:xfrm>
-            <a:off x="640080" y="457200"/>
-            <a:ext cx="2743200" cy="376288"/>
+            <a:off x="822960" y="731520"/>
+            <a:ext cx="3108960" cy="426460"/>
           </a:xfrm>
           <a:prstGeom prst="rect">
             <a:avLst/>
@@ -8005,8 +7850,8 @@
         </p:nvSpPr>
         <p:spPr>
           <a:xfrm>
-            <a:off x="685800" y="1051560"/>
-            <a:ext cx="10058400" cy="365760"/>
+            <a:off x="822960" y="2148840"/>
+            <a:ext cx="10058400" cy="914400"/>
           </a:xfrm>
           <a:prstGeom prst="rect">
             <a:avLst/>
@@ -8018,73 +7863,34 @@
           <a:bodyPr wrap="square" lIns="0" tIns="0" rIns="0" bIns="0" rtlCol="0" anchor="ctr"/>
           <a:lstStyle/>
           <a:p>
-            <a:pPr indent="0" marL="0">
-              <a:buNone/>
-            </a:pPr>
-            <a:r>
-              <a:rPr lang="en-US" sz="1300" b="1" spc="300" kern="0" dirty="0">
-                <a:solidFill>
-                  <a:srgbClr val="CF3338"/>
-                </a:solidFill>
-                <a:latin typeface="Arial" pitchFamily="34" charset="0"/>
-                <a:ea typeface="Arial" pitchFamily="34" charset="-122"/>
-                <a:cs typeface="Arial" pitchFamily="34" charset="-120"/>
-              </a:rPr>
-              <a:t>BEFORE YOU GO</a:t>
-            </a:r>
-            <a:endParaRPr lang="en-US" sz="1300" dirty="0"/>
-          </a:p>
-        </p:txBody>
-      </p:sp>
-      <p:sp>
-        <p:nvSpPr>
-          <p:cNvPr id="4" name="Text 1"/>
-          <p:cNvSpPr/>
-          <p:nvPr/>
-        </p:nvSpPr>
-        <p:spPr>
-          <a:xfrm>
-            <a:off x="685800" y="1417320"/>
-            <a:ext cx="10789920" cy="822960"/>
-          </a:xfrm>
-          <a:prstGeom prst="rect">
-            <a:avLst/>
-          </a:prstGeom>
-          <a:noFill/>
-          <a:ln/>
-        </p:spPr>
-        <p:txBody>
-          <a:bodyPr wrap="square" lIns="0" tIns="0" rIns="0" bIns="0" rtlCol="0" anchor="ctr"/>
-          <a:lstStyle/>
-          <a:p>
-            <a:pPr indent="0" marL="0">
-              <a:buNone/>
-            </a:pPr>
-            <a:r>
-              <a:rPr lang="en-US" sz="3000" dirty="0">
-                <a:solidFill>
-                  <a:srgbClr val="1F2120"/>
+            <a:pPr marL="0" indent="0">
+              <a:buNone/>
+            </a:pPr>
+            <a:r>
+              <a:rPr lang="en-US" sz="4400" dirty="0">
+                <a:solidFill>
+                  <a:srgbClr val="FFFFFF"/>
                 </a:solidFill>
                 <a:latin typeface="Arial Black" pitchFamily="34" charset="0"/>
                 <a:ea typeface="Arial Black" pitchFamily="34" charset="-122"/>
                 <a:cs typeface="Arial Black" pitchFamily="34" charset="-120"/>
               </a:rPr>
-              <a:t>Your take-home kit + one action</a:t>
-            </a:r>
-            <a:endParaRPr lang="en-US" sz="3000" dirty="0"/>
-          </a:p>
-        </p:txBody>
-      </p:sp>
-      <p:sp>
-        <p:nvSpPr>
-          <p:cNvPr id="5" name="Text 2"/>
-          <p:cNvSpPr/>
-          <p:nvPr/>
-        </p:nvSpPr>
-        <p:spPr>
-          <a:xfrm>
-            <a:off x="685800" y="2331720"/>
-            <a:ext cx="10698480" cy="3657600"/>
+              <a:t>Thank you</a:t>
+            </a:r>
+            <a:endParaRPr lang="en-US" sz="4400" dirty="0"/>
+          </a:p>
+        </p:txBody>
+      </p:sp>
+      <p:sp>
+        <p:nvSpPr>
+          <p:cNvPr id="4" name="Text 1"/>
+          <p:cNvSpPr/>
+          <p:nvPr/>
+        </p:nvSpPr>
+        <p:spPr>
+          <a:xfrm>
+            <a:off x="868680" y="3246120"/>
+            <a:ext cx="8412480" cy="2743200"/>
           </a:xfrm>
           <a:prstGeom prst="rect">
             <a:avLst/>
@@ -8096,107 +7902,119 @@
           <a:bodyPr wrap="square" rtlCol="0" anchor="t"/>
           <a:lstStyle/>
           <a:p>
-            <a:pPr indent="0" marL="0">
+            <a:pPr marL="0" indent="0">
               <a:spcAft>
                 <a:spcPts val="800"/>
               </a:spcAft>
               <a:buNone/>
             </a:pPr>
             <a:r>
-              <a:rPr lang="en-US" sz="1600" b="1" dirty="0">
-                <a:solidFill>
-                  <a:srgbClr val="1F2120"/>
-                </a:solidFill>
-                <a:latin typeface="Arial" pitchFamily="34" charset="0"/>
-                <a:ea typeface="Arial" pitchFamily="34" charset="-122"/>
-                <a:cs typeface="Arial" pitchFamily="34" charset="-120"/>
-              </a:rPr>
-              <a:t>You're leaving with:</a:t>
-            </a:r>
-            <a:endParaRPr lang="en-US" sz="1600" dirty="0"/>
-          </a:p>
-          <a:p>
-            <a:pPr marL="203200" indent="-203200">
-              <a:spcAft>
-                <a:spcPts val="700"/>
-              </a:spcAft>
-              <a:buSzPct val="100000"/>
-              <a:buChar char="•"/>
-            </a:pPr>
-            <a:r>
-              <a:rPr lang="en-US" sz="1500" dirty="0">
-                <a:solidFill>
-                  <a:srgbClr val="707070"/>
-                </a:solidFill>
-                <a:latin typeface="Arial" pitchFamily="34" charset="0"/>
-                <a:ea typeface="Arial" pitchFamily="34" charset="-122"/>
-                <a:cs typeface="Arial" pitchFamily="34" charset="-120"/>
-              </a:rPr>
-              <a:t>The datasets workbook (Revenue · Bookings · Simulation)</a:t>
-            </a:r>
-            <a:endParaRPr lang="en-US" sz="1600" dirty="0"/>
-          </a:p>
-          <a:p>
-            <a:pPr marL="203200" indent="-203200">
-              <a:spcAft>
-                <a:spcPts val="700"/>
-              </a:spcAft>
-              <a:buSzPct val="100000"/>
-              <a:buChar char="•"/>
-            </a:pPr>
-            <a:r>
-              <a:rPr lang="en-US" sz="1500" dirty="0">
-                <a:solidFill>
-                  <a:srgbClr val="707070"/>
-                </a:solidFill>
-                <a:latin typeface="Arial" pitchFamily="34" charset="0"/>
-                <a:ea typeface="Arial" pitchFamily="34" charset="-122"/>
-                <a:cs typeface="Arial" pitchFamily="34" charset="-120"/>
-              </a:rPr>
-              <a:t>The prompt/code cheat sheet, every line from tonight</a:t>
-            </a:r>
-            <a:endParaRPr lang="en-US" sz="1600" dirty="0"/>
-          </a:p>
-          <a:p>
-            <a:pPr marL="203200" indent="-203200">
+              <a:rPr lang="en-US" sz="1900" b="1" dirty="0">
+                <a:solidFill>
+                  <a:srgbClr val="FFFFFF"/>
+                </a:solidFill>
+                <a:latin typeface="Arial" pitchFamily="34" charset="0"/>
+                <a:ea typeface="Arial" pitchFamily="34" charset="-122"/>
+                <a:cs typeface="Arial" pitchFamily="34" charset="-120"/>
+              </a:rPr>
+              <a:t>George Mount  ·  Stringfest Analytics</a:t>
+            </a:r>
+            <a:endParaRPr lang="en-US" sz="1900" dirty="0"/>
+          </a:p>
+          <a:p>
+            <a:pPr marL="0" indent="0">
               <a:spcAft>
                 <a:spcPts val="1600"/>
               </a:spcAft>
-              <a:buSzPct val="100000"/>
-              <a:buChar char="•"/>
+              <a:buNone/>
             </a:pPr>
             <a:r>
               <a:rPr lang="en-US" sz="1500" dirty="0">
                 <a:solidFill>
-                  <a:srgbClr val="707070"/>
-                </a:solidFill>
-                <a:latin typeface="Arial" pitchFamily="34" charset="0"/>
-                <a:ea typeface="Arial" pitchFamily="34" charset="-122"/>
-                <a:cs typeface="Arial" pitchFamily="34" charset="-120"/>
-              </a:rPr>
-              <a:t>The follow-along exercises with solutions</a:t>
-            </a:r>
-            <a:endParaRPr lang="en-US" sz="1600" dirty="0"/>
-          </a:p>
-          <a:p>
-            <a:pPr indent="0" marL="0">
+                  <a:srgbClr val="F3C9CA"/>
+                </a:solidFill>
+                <a:latin typeface="Arial" pitchFamily="34" charset="0"/>
+                <a:ea typeface="Arial" pitchFamily="34" charset="-122"/>
+                <a:cs typeface="Arial" pitchFamily="34" charset="-120"/>
+              </a:rPr>
+              <a:t>george@stringfestanalytics.com  ·  stringfestanalytics.com</a:t>
+            </a:r>
+            <a:endParaRPr lang="en-US" sz="1900" dirty="0"/>
+          </a:p>
+          <a:p>
+            <a:pPr marL="0" indent="0">
+              <a:spcAft>
+                <a:spcPts val="800"/>
+              </a:spcAft>
+              <a:buNone/>
+            </a:pPr>
+            <a:r>
+              <a:rPr lang="en-US" sz="1500" i="1" dirty="0">
+                <a:solidFill>
+                  <a:srgbClr val="F3C9CA"/>
+                </a:solidFill>
+                <a:latin typeface="Arial" pitchFamily="34" charset="0"/>
+                <a:ea typeface="Arial" pitchFamily="34" charset="-122"/>
+                <a:cs typeface="Arial" pitchFamily="34" charset="-120"/>
+              </a:rPr>
+              <a:t>Thanks to Plum Solutions &amp; the Financial Modelling in Excel meetup for hosting.</a:t>
+            </a:r>
+            <a:endParaRPr lang="en-US" sz="1900" dirty="0"/>
+          </a:p>
+          <a:p>
+            <a:pPr marL="0" indent="0">
               <a:buNone/>
             </a:pPr>
             <a:r>
               <a:rPr lang="en-US" sz="1600" b="1" dirty="0">
                 <a:solidFill>
-                  <a:srgbClr val="1F2120"/>
-                </a:solidFill>
-                <a:latin typeface="Arial" pitchFamily="34" charset="0"/>
-                <a:ea typeface="Arial" pitchFamily="34" charset="-122"/>
-                <a:cs typeface="Arial" pitchFamily="34" charset="-120"/>
-              </a:rPr>
-              <a:t>This week: open one of your own monthly series and run a Holt-Winters forecast, then beat the naive baseline.</a:t>
-            </a:r>
-            <a:endParaRPr lang="en-US" sz="1600" dirty="0"/>
-          </a:p>
-        </p:txBody>
-      </p:sp>
+                  <a:srgbClr val="FFFFFF"/>
+                </a:solidFill>
+                <a:latin typeface="Arial" pitchFamily="34" charset="0"/>
+                <a:ea typeface="Arial" pitchFamily="34" charset="-122"/>
+                <a:cs typeface="Arial" pitchFamily="34" charset="-120"/>
+              </a:rPr>
+              <a:t>Book launching end of year  -&gt;  stringfestanalytics.com/</a:t>
+            </a:r>
+            <a:r>
+              <a:rPr lang="en-US" sz="1600" b="1" dirty="0" err="1">
+                <a:solidFill>
+                  <a:srgbClr val="FFFFFF"/>
+                </a:solidFill>
+                <a:latin typeface="Arial" pitchFamily="34" charset="0"/>
+                <a:ea typeface="Arial" pitchFamily="34" charset="-122"/>
+                <a:cs typeface="Arial" pitchFamily="34" charset="-120"/>
+              </a:rPr>
+              <a:t>pyxlda</a:t>
+            </a:r>
+            <a:endParaRPr lang="en-US" sz="1900" dirty="0"/>
+          </a:p>
+        </p:txBody>
+      </p:sp>
+      <p:pic>
+        <p:nvPicPr>
+          <p:cNvPr id="5" name="Image 1" descr="assets/plum-solutions.png"/>
+          <p:cNvPicPr>
+            <a:picLocks noChangeAspect="1"/>
+          </p:cNvPicPr>
+          <p:nvPr/>
+        </p:nvPicPr>
+        <p:blipFill>
+          <a:blip r:embed="rId4"/>
+          <a:stretch>
+            <a:fillRect/>
+          </a:stretch>
+        </p:blipFill>
+        <p:spPr>
+          <a:xfrm>
+            <a:off x="9052560" y="5074920"/>
+            <a:ext cx="2377440" cy="865938"/>
+          </a:xfrm>
+          <a:prstGeom prst="rect">
+            <a:avLst/>
+          </a:prstGeom>
+        </p:spPr>
+      </p:pic>
     </p:spTree>
   </p:cSld>
   <p:clrMapOvr>
@@ -8205,14 +8023,214 @@
 </p:sld>
 </file>
 
-<file path=ppt/slides/slide23.xml><?xml version="1.0" encoding="utf-8"?>
+<file path=ppt/slides/slide3.xml><?xml version="1.0" encoding="utf-8"?>
 <p:sld xmlns:a="http://schemas.openxmlformats.org/drawingml/2006/main" xmlns:r="http://schemas.openxmlformats.org/officeDocument/2006/relationships" xmlns:p="http://schemas.openxmlformats.org/presentationml/2006/main">
-  <p:cSld name="Slide 23">
+  <p:cSld name="Slide 3">
     <p:bg>
       <p:bgPr>
         <a:solidFill>
           <a:srgbClr val="C00000"/>
         </a:solidFill>
+        <a:effectLst/>
+      </p:bgPr>
+    </p:bg>
+    <p:spTree>
+      <p:nvGrpSpPr>
+        <p:cNvPr id="1" name=""/>
+        <p:cNvGrpSpPr/>
+        <p:nvPr/>
+      </p:nvGrpSpPr>
+      <p:grpSpPr>
+        <a:xfrm>
+          <a:off x="0" y="0"/>
+          <a:ext cx="0" cy="0"/>
+          <a:chOff x="0" y="0"/>
+          <a:chExt cx="0" cy="0"/>
+        </a:xfrm>
+      </p:grpSpPr>
+      <p:sp>
+        <p:nvSpPr>
+          <p:cNvPr id="2" name="Text 0"/>
+          <p:cNvSpPr/>
+          <p:nvPr/>
+        </p:nvSpPr>
+        <p:spPr>
+          <a:xfrm>
+            <a:off x="685800" y="822960"/>
+            <a:ext cx="10058400" cy="822960"/>
+          </a:xfrm>
+          <a:prstGeom prst="rect">
+            <a:avLst/>
+          </a:prstGeom>
+          <a:noFill/>
+          <a:ln/>
+        </p:spPr>
+        <p:txBody>
+          <a:bodyPr wrap="square" lIns="0" tIns="0" rIns="0" bIns="0" rtlCol="0" anchor="ctr"/>
+          <a:lstStyle/>
+          <a:p>
+            <a:pPr marL="0" indent="0">
+              <a:buNone/>
+            </a:pPr>
+            <a:r>
+              <a:rPr lang="en-US" sz="3000" dirty="0">
+                <a:solidFill>
+                  <a:srgbClr val="FFFFFF"/>
+                </a:solidFill>
+                <a:latin typeface="Arial Black" pitchFamily="34" charset="0"/>
+                <a:ea typeface="Arial Black" pitchFamily="34" charset="-122"/>
+                <a:cs typeface="Arial Black" pitchFamily="34" charset="-120"/>
+              </a:rPr>
+              <a:t>What you'll walk away with</a:t>
+            </a:r>
+            <a:endParaRPr lang="en-US" sz="3000" dirty="0"/>
+          </a:p>
+        </p:txBody>
+      </p:sp>
+      <p:sp>
+        <p:nvSpPr>
+          <p:cNvPr id="3" name="Text 1"/>
+          <p:cNvSpPr/>
+          <p:nvPr/>
+        </p:nvSpPr>
+        <p:spPr>
+          <a:xfrm>
+            <a:off x="777240" y="1965960"/>
+            <a:ext cx="10424160" cy="3840480"/>
+          </a:xfrm>
+          <a:prstGeom prst="rect">
+            <a:avLst/>
+          </a:prstGeom>
+          <a:noFill/>
+          <a:ln/>
+        </p:spPr>
+        <p:txBody>
+          <a:bodyPr wrap="square" rtlCol="0" anchor="t"/>
+          <a:lstStyle/>
+          <a:p>
+            <a:pPr marL="228600" indent="-228600">
+              <a:spcAft>
+                <a:spcPts val="1400"/>
+              </a:spcAft>
+              <a:buSzPct val="100000"/>
+              <a:buChar char="•"/>
+            </a:pPr>
+            <a:r>
+              <a:rPr lang="en-US" sz="1900" dirty="0">
+                <a:solidFill>
+                  <a:srgbClr val="FFFFFF"/>
+                </a:solidFill>
+                <a:latin typeface="Arial" pitchFamily="34" charset="0"/>
+                <a:ea typeface="Arial" pitchFamily="34" charset="-122"/>
+                <a:cs typeface="Arial" pitchFamily="34" charset="-120"/>
+              </a:rPr>
+              <a:t>Summarize and analyze larger financial datasets without leaving Excel</a:t>
+            </a:r>
+            <a:endParaRPr lang="en-US" sz="1900" dirty="0"/>
+          </a:p>
+          <a:p>
+            <a:pPr marL="228600" indent="-228600">
+              <a:spcAft>
+                <a:spcPts val="1400"/>
+              </a:spcAft>
+              <a:buSzPct val="100000"/>
+              <a:buChar char="•"/>
+            </a:pPr>
+            <a:r>
+              <a:rPr lang="en-US" sz="1900" dirty="0">
+                <a:solidFill>
+                  <a:srgbClr val="FFFFFF"/>
+                </a:solidFill>
+                <a:latin typeface="Arial" pitchFamily="34" charset="0"/>
+                <a:ea typeface="Arial" pitchFamily="34" charset="-122"/>
+                <a:cs typeface="Arial" pitchFamily="34" charset="-120"/>
+              </a:rPr>
+              <a:t>Build and evaluate data-driven forecasts (trend + seasonality)</a:t>
+            </a:r>
+            <a:endParaRPr lang="en-US" sz="1900" dirty="0"/>
+          </a:p>
+          <a:p>
+            <a:pPr marL="228600" indent="-228600">
+              <a:spcAft>
+                <a:spcPts val="1400"/>
+              </a:spcAft>
+              <a:buSzPct val="100000"/>
+              <a:buChar char="•"/>
+            </a:pPr>
+            <a:r>
+              <a:rPr lang="en-US" sz="1900" dirty="0">
+                <a:solidFill>
+                  <a:srgbClr val="FFFFFF"/>
+                </a:solidFill>
+                <a:latin typeface="Arial" pitchFamily="34" charset="0"/>
+                <a:ea typeface="Arial" pitchFamily="34" charset="-122"/>
+                <a:cs typeface="Arial" pitchFamily="34" charset="-120"/>
+              </a:rPr>
+              <a:t>Run Monte Carlo simulations to model risk and uncertainty</a:t>
+            </a:r>
+            <a:endParaRPr lang="en-US" sz="1900" dirty="0"/>
+          </a:p>
+          <a:p>
+            <a:pPr marL="228600" indent="-228600">
+              <a:spcAft>
+                <a:spcPts val="1400"/>
+              </a:spcAft>
+              <a:buSzPct val="100000"/>
+              <a:buChar char="•"/>
+            </a:pPr>
+            <a:r>
+              <a:rPr lang="en-US" sz="1900" dirty="0">
+                <a:solidFill>
+                  <a:srgbClr val="FFFFFF"/>
+                </a:solidFill>
+                <a:latin typeface="Arial" pitchFamily="34" charset="0"/>
+                <a:ea typeface="Arial" pitchFamily="34" charset="-122"/>
+                <a:cs typeface="Arial" pitchFamily="34" charset="-120"/>
+              </a:rPr>
+              <a:t>Test many assumptions and scenarios at once, and visualize the range</a:t>
+            </a:r>
+            <a:endParaRPr lang="en-US" sz="1900" dirty="0"/>
+          </a:p>
+          <a:p>
+            <a:pPr marL="228600" indent="-228600">
+              <a:spcAft>
+                <a:spcPts val="1400"/>
+              </a:spcAft>
+              <a:buSzPct val="100000"/>
+              <a:buChar char="•"/>
+            </a:pPr>
+            <a:r>
+              <a:rPr lang="en-US" sz="1900" dirty="0">
+                <a:solidFill>
+                  <a:srgbClr val="FFFFFF"/>
+                </a:solidFill>
+                <a:latin typeface="Arial" pitchFamily="34" charset="0"/>
+                <a:ea typeface="Arial" pitchFamily="34" charset="-122"/>
+                <a:cs typeface="Arial" pitchFamily="34" charset="-120"/>
+              </a:rPr>
+              <a:t>Every line of code, the datasets, and a copy-paste cheat sheet to keep</a:t>
+            </a:r>
+            <a:endParaRPr lang="en-US" sz="1900" dirty="0"/>
+          </a:p>
+        </p:txBody>
+      </p:sp>
+    </p:spTree>
+  </p:cSld>
+  <p:clrMapOvr>
+    <a:masterClrMapping/>
+  </p:clrMapOvr>
+</p:sld>
+</file>
+
+<file path=ppt/slides/slide4.xml><?xml version="1.0" encoding="utf-8"?>
+<p:sld xmlns:a="http://schemas.openxmlformats.org/drawingml/2006/main" xmlns:r="http://schemas.openxmlformats.org/officeDocument/2006/relationships" xmlns:p="http://schemas.openxmlformats.org/presentationml/2006/main">
+  <p:cSld name="Slide 4">
+    <p:bg>
+      <p:bgPr>
+        <a:solidFill>
+          <a:srgbClr val="EEECE1"/>
+        </a:solidFill>
+        <a:effectLst/>
       </p:bgPr>
     </p:bg>
     <p:spTree>
@@ -8231,14 +8249,14 @@
       </p:grpSpPr>
       <p:pic>
         <p:nvPicPr>
-          <p:cNvPr id="2" name="Image 0" descr="assets/stringfest-logo-white.png">    </p:cNvPr>
+          <p:cNvPr id="2" name="Image 0" descr="assets/stringfest-logo-dark.png"/>
           <p:cNvPicPr>
             <a:picLocks noChangeAspect="1"/>
           </p:cNvPicPr>
           <p:nvPr/>
         </p:nvPicPr>
         <p:blipFill>
-          <a:blip r:embed="rId1"/>
+          <a:blip r:embed="rId3"/>
           <a:srcRect l="9716" t="36914" r="6931" b="47496"/>
           <a:stretch>
             <a:fillRect/>
@@ -8246,8 +8264,8 @@
         </p:blipFill>
         <p:spPr>
           <a:xfrm>
-            <a:off x="822960" y="731520"/>
-            <a:ext cx="3108960" cy="426460"/>
+            <a:off x="640080" y="457200"/>
+            <a:ext cx="2743200" cy="376288"/>
           </a:xfrm>
           <a:prstGeom prst="rect">
             <a:avLst/>
@@ -8262,8 +8280,8 @@
         </p:nvSpPr>
         <p:spPr>
           <a:xfrm>
-            <a:off x="822960" y="2148840"/>
-            <a:ext cx="10058400" cy="914400"/>
+            <a:off x="685800" y="1051560"/>
+            <a:ext cx="10058400" cy="365760"/>
           </a:xfrm>
           <a:prstGeom prst="rect">
             <a:avLst/>
@@ -8275,34 +8293,73 @@
           <a:bodyPr wrap="square" lIns="0" tIns="0" rIns="0" bIns="0" rtlCol="0" anchor="ctr"/>
           <a:lstStyle/>
           <a:p>
-            <a:pPr indent="0" marL="0">
-              <a:buNone/>
-            </a:pPr>
-            <a:r>
-              <a:rPr lang="en-US" sz="4400" dirty="0">
-                <a:solidFill>
-                  <a:srgbClr val="FFFFFF"/>
+            <a:pPr marL="0" indent="0">
+              <a:buNone/>
+            </a:pPr>
+            <a:r>
+              <a:rPr lang="en-US" sz="1300" b="1" kern="0" spc="300" dirty="0">
+                <a:solidFill>
+                  <a:srgbClr val="CF3338"/>
+                </a:solidFill>
+                <a:latin typeface="Arial" pitchFamily="34" charset="0"/>
+                <a:ea typeface="Arial" pitchFamily="34" charset="-122"/>
+                <a:cs typeface="Arial" pitchFamily="34" charset="-120"/>
+              </a:rPr>
+              <a:t>HOW TODAY WORKS</a:t>
+            </a:r>
+            <a:endParaRPr lang="en-US" sz="1300" dirty="0"/>
+          </a:p>
+        </p:txBody>
+      </p:sp>
+      <p:sp>
+        <p:nvSpPr>
+          <p:cNvPr id="4" name="Text 1"/>
+          <p:cNvSpPr/>
+          <p:nvPr/>
+        </p:nvSpPr>
+        <p:spPr>
+          <a:xfrm>
+            <a:off x="685800" y="1417320"/>
+            <a:ext cx="10789920" cy="822960"/>
+          </a:xfrm>
+          <a:prstGeom prst="rect">
+            <a:avLst/>
+          </a:prstGeom>
+          <a:noFill/>
+          <a:ln/>
+        </p:spPr>
+        <p:txBody>
+          <a:bodyPr wrap="square" lIns="0" tIns="0" rIns="0" bIns="0" rtlCol="0" anchor="ctr"/>
+          <a:lstStyle/>
+          <a:p>
+            <a:pPr marL="0" indent="0">
+              <a:buNone/>
+            </a:pPr>
+            <a:r>
+              <a:rPr lang="en-US" sz="3000" dirty="0">
+                <a:solidFill>
+                  <a:srgbClr val="1F2120"/>
                 </a:solidFill>
                 <a:latin typeface="Arial Black" pitchFamily="34" charset="0"/>
                 <a:ea typeface="Arial Black" pitchFamily="34" charset="-122"/>
                 <a:cs typeface="Arial Black" pitchFamily="34" charset="-120"/>
               </a:rPr>
-              <a:t>Thank you</a:t>
-            </a:r>
-            <a:endParaRPr lang="en-US" sz="4400" dirty="0"/>
-          </a:p>
-        </p:txBody>
-      </p:sp>
-      <p:sp>
-        <p:nvSpPr>
-          <p:cNvPr id="4" name="Text 1"/>
-          <p:cNvSpPr/>
-          <p:nvPr/>
-        </p:nvSpPr>
-        <p:spPr>
-          <a:xfrm>
-            <a:off x="868680" y="3246120"/>
-            <a:ext cx="8412480" cy="2743200"/>
+              <a:t>Open Excel and follow along with me</a:t>
+            </a:r>
+            <a:endParaRPr lang="en-US" sz="3000" dirty="0"/>
+          </a:p>
+        </p:txBody>
+      </p:sp>
+      <p:sp>
+        <p:nvSpPr>
+          <p:cNvPr id="5" name="Text 2"/>
+          <p:cNvSpPr/>
+          <p:nvPr/>
+        </p:nvSpPr>
+        <p:spPr>
+          <a:xfrm>
+            <a:off x="685800" y="2331720"/>
+            <a:ext cx="6400800" cy="3840480"/>
           </a:xfrm>
           <a:prstGeom prst="rect">
             <a:avLst/>
@@ -8314,14 +8371,192 @@
           <a:bodyPr wrap="square" rtlCol="0" anchor="t"/>
           <a:lstStyle/>
           <a:p>
-            <a:pPr indent="0" marL="0">
+            <a:pPr marL="228600" indent="-228600">
               <a:spcAft>
-                <a:spcPts val="800"/>
+                <a:spcPts val="1100"/>
               </a:spcAft>
-              <a:buNone/>
-            </a:pPr>
-            <a:r>
-              <a:rPr lang="en-US" sz="1900" b="1" dirty="0">
+              <a:buSzPct val="100000"/>
+              <a:buChar char="•"/>
+            </a:pPr>
+            <a:r>
+              <a:rPr lang="en-US" sz="1600" dirty="0">
+                <a:solidFill>
+                  <a:srgbClr val="707070"/>
+                </a:solidFill>
+                <a:latin typeface="Arial" pitchFamily="34" charset="0"/>
+                <a:ea typeface="Arial" pitchFamily="34" charset="-122"/>
+                <a:cs typeface="Arial" pitchFamily="34" charset="-120"/>
+              </a:rPr>
+              <a:t>You'll need Python in Excel enabled (Microsoft 365 on the Current Channel).</a:t>
+            </a:r>
+            <a:endParaRPr lang="en-US" sz="1600" dirty="0"/>
+          </a:p>
+          <a:p>
+            <a:pPr marL="228600" indent="-228600">
+              <a:spcAft>
+                <a:spcPts val="1100"/>
+              </a:spcAft>
+              <a:buSzPct val="100000"/>
+              <a:buChar char="•"/>
+            </a:pPr>
+            <a:r>
+              <a:rPr lang="en-US" sz="1600" dirty="0">
+                <a:solidFill>
+                  <a:srgbClr val="707070"/>
+                </a:solidFill>
+                <a:latin typeface="Arial" pitchFamily="34" charset="0"/>
+                <a:ea typeface="Arial" pitchFamily="34" charset="-122"/>
+                <a:cs typeface="Arial" pitchFamily="34" charset="-120"/>
+              </a:rPr>
+              <a:t>Open the datasets workbook I shared, Revenue, Bookings, Simulation sheets.</a:t>
+            </a:r>
+            <a:endParaRPr lang="en-US" sz="1600" dirty="0"/>
+          </a:p>
+          <a:p>
+            <a:pPr marL="228600" indent="-228600">
+              <a:spcAft>
+                <a:spcPts val="1100"/>
+              </a:spcAft>
+              <a:buSzPct val="100000"/>
+              <a:buChar char="•"/>
+            </a:pPr>
+            <a:r>
+              <a:rPr lang="en-US" sz="1600" dirty="0">
+                <a:solidFill>
+                  <a:srgbClr val="707070"/>
+                </a:solidFill>
+                <a:latin typeface="Arial" pitchFamily="34" charset="0"/>
+                <a:ea typeface="Arial" pitchFamily="34" charset="-122"/>
+                <a:cs typeface="Arial" pitchFamily="34" charset="-120"/>
+              </a:rPr>
+              <a:t>In a cell, type =PY( and Excel drops into Python. Ctrl+Enter runs it.</a:t>
+            </a:r>
+            <a:endParaRPr lang="en-US" sz="1600" dirty="0"/>
+          </a:p>
+          <a:p>
+            <a:pPr marL="228600" indent="-228600">
+              <a:spcAft>
+                <a:spcPts val="1100"/>
+              </a:spcAft>
+              <a:buSzPct val="100000"/>
+              <a:buChar char="•"/>
+            </a:pPr>
+            <a:r>
+              <a:rPr lang="en-US" sz="1600" dirty="0">
+                <a:solidFill>
+                  <a:srgbClr val="707070"/>
+                </a:solidFill>
+                <a:latin typeface="Arial" pitchFamily="34" charset="0"/>
+                <a:ea typeface="Arial" pitchFamily="34" charset="-122"/>
+                <a:cs typeface="Arial" pitchFamily="34" charset="-120"/>
+              </a:rPr>
+              <a:t>When you see the red PY() CELL card, type the code and run it with me.</a:t>
+            </a:r>
+            <a:endParaRPr lang="en-US" sz="1600" dirty="0"/>
+          </a:p>
+          <a:p>
+            <a:pPr marL="228600" indent="-228600">
+              <a:spcAft>
+                <a:spcPts val="1100"/>
+              </a:spcAft>
+              <a:buSzPct val="100000"/>
+              <a:buChar char="•"/>
+            </a:pPr>
+            <a:r>
+              <a:rPr lang="en-US" sz="1600" dirty="0">
+                <a:solidFill>
+                  <a:srgbClr val="707070"/>
+                </a:solidFill>
+                <a:latin typeface="Arial" pitchFamily="34" charset="0"/>
+                <a:ea typeface="Arial" pitchFamily="34" charset="-122"/>
+                <a:cs typeface="Arial" pitchFamily="34" charset="-120"/>
+              </a:rPr>
+              <a:t>Your numbers will match mine, we set a random seed for reproducibility.</a:t>
+            </a:r>
+            <a:endParaRPr lang="en-US" sz="1600" dirty="0"/>
+          </a:p>
+        </p:txBody>
+      </p:sp>
+      <p:sp>
+        <p:nvSpPr>
+          <p:cNvPr id="6" name="Shape 3"/>
+          <p:cNvSpPr/>
+          <p:nvPr/>
+        </p:nvSpPr>
+        <p:spPr>
+          <a:xfrm>
+            <a:off x="7360920" y="2331720"/>
+            <a:ext cx="4160520" cy="2834640"/>
+          </a:xfrm>
+          <a:prstGeom prst="rect">
+            <a:avLst/>
+          </a:prstGeom>
+          <a:solidFill>
+            <a:srgbClr val="1F2120"/>
+          </a:solidFill>
+          <a:ln/>
+        </p:spPr>
+        <p:txBody>
+          <a:bodyPr/>
+          <a:lstStyle/>
+          <a:p>
+            <a:endParaRPr lang="en-US"/>
+          </a:p>
+        </p:txBody>
+      </p:sp>
+      <p:sp>
+        <p:nvSpPr>
+          <p:cNvPr id="7" name="Shape 4"/>
+          <p:cNvSpPr/>
+          <p:nvPr/>
+        </p:nvSpPr>
+        <p:spPr>
+          <a:xfrm>
+            <a:off x="7360920" y="2331720"/>
+            <a:ext cx="1783080" cy="384048"/>
+          </a:xfrm>
+          <a:prstGeom prst="rect">
+            <a:avLst/>
+          </a:prstGeom>
+          <a:solidFill>
+            <a:srgbClr val="CF3338"/>
+          </a:solidFill>
+          <a:ln/>
+        </p:spPr>
+        <p:txBody>
+          <a:bodyPr/>
+          <a:lstStyle/>
+          <a:p>
+            <a:endParaRPr lang="en-US"/>
+          </a:p>
+        </p:txBody>
+      </p:sp>
+      <p:sp>
+        <p:nvSpPr>
+          <p:cNvPr id="8" name="Text 5"/>
+          <p:cNvSpPr/>
+          <p:nvPr/>
+        </p:nvSpPr>
+        <p:spPr>
+          <a:xfrm>
+            <a:off x="7360920" y="2331720"/>
+            <a:ext cx="1783080" cy="384048"/>
+          </a:xfrm>
+          <a:prstGeom prst="rect">
+            <a:avLst/>
+          </a:prstGeom>
+          <a:noFill/>
+          <a:ln/>
+        </p:spPr>
+        <p:txBody>
+          <a:bodyPr wrap="square" lIns="0" tIns="0" rIns="0" bIns="0" rtlCol="0" anchor="ctr"/>
+          <a:lstStyle/>
+          <a:p>
+            <a:pPr marL="0" indent="0" algn="ctr">
+              <a:buNone/>
+            </a:pPr>
+            <a:r>
+              <a:rPr lang="en-US" sz="1150" b="1" kern="0" spc="200" dirty="0">
                 <a:solidFill>
                   <a:srgbClr val="FFFFFF"/>
                 </a:solidFill>
@@ -8329,93 +8564,174 @@
                 <a:ea typeface="Arial" pitchFamily="34" charset="-122"/>
                 <a:cs typeface="Arial" pitchFamily="34" charset="-120"/>
               </a:rPr>
-              <a:t>George Mount  ·  Stringfest Analytics</a:t>
-            </a:r>
-            <a:endParaRPr lang="en-US" sz="1900" dirty="0"/>
-          </a:p>
-          <a:p>
-            <a:pPr indent="0" marL="0">
-              <a:spcAft>
-                <a:spcPts val="1600"/>
-              </a:spcAft>
-              <a:buNone/>
-            </a:pPr>
-            <a:r>
-              <a:rPr lang="en-US" sz="1500" dirty="0">
-                <a:solidFill>
-                  <a:srgbClr val="F3C9CA"/>
-                </a:solidFill>
-                <a:latin typeface="Arial" pitchFamily="34" charset="0"/>
-                <a:ea typeface="Arial" pitchFamily="34" charset="-122"/>
-                <a:cs typeface="Arial" pitchFamily="34" charset="-120"/>
-              </a:rPr>
-              <a:t>george@stringfestanalytics.com  ·  stringfestanalytics.com</a:t>
-            </a:r>
-            <a:endParaRPr lang="en-US" sz="1900" dirty="0"/>
-          </a:p>
-          <a:p>
-            <a:pPr indent="0" marL="0">
-              <a:spcAft>
-                <a:spcPts val="800"/>
-              </a:spcAft>
-              <a:buNone/>
-            </a:pPr>
-            <a:r>
-              <a:rPr lang="en-US" sz="1500" i="1" dirty="0">
-                <a:solidFill>
-                  <a:srgbClr val="F3C9CA"/>
-                </a:solidFill>
-                <a:latin typeface="Arial" pitchFamily="34" charset="0"/>
-                <a:ea typeface="Arial" pitchFamily="34" charset="-122"/>
-                <a:cs typeface="Arial" pitchFamily="34" charset="-120"/>
-              </a:rPr>
-              <a:t>Thanks to Plum Solutions &amp; the Financial Modelling in Excel meetup for hosting.</a:t>
-            </a:r>
-            <a:endParaRPr lang="en-US" sz="1900" dirty="0"/>
-          </a:p>
-          <a:p>
-            <a:pPr indent="0" marL="0">
-              <a:buNone/>
-            </a:pPr>
-            <a:r>
-              <a:rPr lang="en-US" sz="1600" b="1" dirty="0">
-                <a:solidFill>
-                  <a:srgbClr val="FFFFFF"/>
-                </a:solidFill>
-                <a:latin typeface="Arial" pitchFamily="34" charset="0"/>
-                <a:ea typeface="Arial" pitchFamily="34" charset="-122"/>
-                <a:cs typeface="Arial" pitchFamily="34" charset="-120"/>
-              </a:rPr>
-              <a:t>Book launching end of year  -&gt;  stringfestanalytics.com/book</a:t>
-            </a:r>
-            <a:endParaRPr lang="en-US" sz="1900" dirty="0"/>
-          </a:p>
-        </p:txBody>
-      </p:sp>
-      <p:pic>
-        <p:nvPicPr>
-          <p:cNvPr id="5" name="Image 1" descr="assets/plum-solutions.png">    </p:cNvPr>
-          <p:cNvPicPr>
-            <a:picLocks noChangeAspect="1"/>
-          </p:cNvPicPr>
-          <p:nvPr/>
-        </p:nvPicPr>
-        <p:blipFill>
-          <a:blip r:embed="rId2"/>
-          <a:stretch>
-            <a:fillRect/>
-          </a:stretch>
-        </p:blipFill>
-        <p:spPr>
-          <a:xfrm>
-            <a:off x="9052560" y="5074920"/>
-            <a:ext cx="2377440" cy="865938"/>
-          </a:xfrm>
-          <a:prstGeom prst="rect">
-            <a:avLst/>
-          </a:prstGeom>
-        </p:spPr>
-      </p:pic>
+              <a:t>PY() CELL</a:t>
+            </a:r>
+            <a:endParaRPr lang="en-US" sz="1150" dirty="0"/>
+          </a:p>
+        </p:txBody>
+      </p:sp>
+      <p:sp>
+        <p:nvSpPr>
+          <p:cNvPr id="9" name="Text 6"/>
+          <p:cNvSpPr/>
+          <p:nvPr/>
+        </p:nvSpPr>
+        <p:spPr>
+          <a:xfrm>
+            <a:off x="7616952" y="2862072"/>
+            <a:ext cx="3703320" cy="2148840"/>
+          </a:xfrm>
+          <a:prstGeom prst="rect">
+            <a:avLst/>
+          </a:prstGeom>
+          <a:noFill/>
+          <a:ln/>
+        </p:spPr>
+        <p:txBody>
+          <a:bodyPr wrap="square" lIns="0" tIns="0" rIns="0" bIns="0" rtlCol="0" anchor="t"/>
+          <a:lstStyle/>
+          <a:p>
+            <a:pPr marL="0" indent="0">
+              <a:lnSpc>
+                <a:spcPct val="106000"/>
+              </a:lnSpc>
+              <a:buNone/>
+            </a:pPr>
+            <a:r>
+              <a:rPr lang="en-US" sz="1250" dirty="0">
+                <a:solidFill>
+                  <a:srgbClr val="E9E6DC"/>
+                </a:solidFill>
+                <a:latin typeface="Consolas" pitchFamily="34" charset="0"/>
+                <a:ea typeface="Consolas" pitchFamily="34" charset="-122"/>
+                <a:cs typeface="Consolas" pitchFamily="34" charset="-120"/>
+              </a:rPr>
+              <a:t>=PY(</a:t>
+            </a:r>
+            <a:endParaRPr lang="en-US" sz="1250" dirty="0"/>
+          </a:p>
+          <a:p>
+            <a:pPr marL="0" indent="0">
+              <a:lnSpc>
+                <a:spcPct val="106000"/>
+              </a:lnSpc>
+              <a:buNone/>
+            </a:pPr>
+            <a:r>
+              <a:rPr lang="en-US" sz="1250" dirty="0">
+                <a:solidFill>
+                  <a:srgbClr val="E9E6DC"/>
+                </a:solidFill>
+                <a:latin typeface="Consolas" pitchFamily="34" charset="0"/>
+                <a:ea typeface="Consolas" pitchFamily="34" charset="-122"/>
+                <a:cs typeface="Consolas" pitchFamily="34" charset="-120"/>
+              </a:rPr>
+              <a:t>    import pandas as pd</a:t>
+            </a:r>
+            <a:endParaRPr lang="en-US" sz="1250" dirty="0"/>
+          </a:p>
+          <a:p>
+            <a:pPr marL="0" indent="0">
+              <a:lnSpc>
+                <a:spcPct val="106000"/>
+              </a:lnSpc>
+              <a:buNone/>
+            </a:pPr>
+            <a:r>
+              <a:rPr lang="en-US" sz="1250" dirty="0">
+                <a:solidFill>
+                  <a:srgbClr val="E9E6DC"/>
+                </a:solidFill>
+                <a:latin typeface="Consolas" pitchFamily="34" charset="0"/>
+                <a:ea typeface="Consolas" pitchFamily="34" charset="-122"/>
+                <a:cs typeface="Consolas" pitchFamily="34" charset="-120"/>
+              </a:rPr>
+              <a:t>    import numpy as np</a:t>
+            </a:r>
+            <a:endParaRPr lang="en-US" sz="1250" dirty="0"/>
+          </a:p>
+          <a:p>
+            <a:pPr marL="0" indent="0">
+              <a:lnSpc>
+                <a:spcPct val="106000"/>
+              </a:lnSpc>
+              <a:buNone/>
+            </a:pPr>
+            <a:r>
+              <a:rPr lang="en-US" sz="1250" dirty="0">
+                <a:solidFill>
+                  <a:srgbClr val="E9E6DC"/>
+                </a:solidFill>
+                <a:latin typeface="Consolas" pitchFamily="34" charset="0"/>
+                <a:ea typeface="Consolas" pitchFamily="34" charset="-122"/>
+                <a:cs typeface="Consolas" pitchFamily="34" charset="-120"/>
+              </a:rPr>
+              <a:t>    df = xl("revenue[#All]",</a:t>
+            </a:r>
+            <a:endParaRPr lang="en-US" sz="1250" dirty="0"/>
+          </a:p>
+          <a:p>
+            <a:pPr marL="0" indent="0">
+              <a:lnSpc>
+                <a:spcPct val="106000"/>
+              </a:lnSpc>
+              <a:buNone/>
+            </a:pPr>
+            <a:r>
+              <a:rPr lang="en-US" sz="1250" dirty="0">
+                <a:solidFill>
+                  <a:srgbClr val="E9E6DC"/>
+                </a:solidFill>
+                <a:latin typeface="Consolas" pitchFamily="34" charset="0"/>
+                <a:ea typeface="Consolas" pitchFamily="34" charset="-122"/>
+                <a:cs typeface="Consolas" pitchFamily="34" charset="-120"/>
+              </a:rPr>
+              <a:t>            headers=True)</a:t>
+            </a:r>
+            <a:endParaRPr lang="en-US" sz="1250" dirty="0"/>
+          </a:p>
+          <a:p>
+            <a:pPr marL="0" indent="0">
+              <a:lnSpc>
+                <a:spcPct val="106000"/>
+              </a:lnSpc>
+              <a:buNone/>
+            </a:pPr>
+            <a:r>
+              <a:rPr lang="en-US" sz="1250" dirty="0">
+                <a:solidFill>
+                  <a:srgbClr val="E9E6DC"/>
+                </a:solidFill>
+                <a:latin typeface="Consolas" pitchFamily="34" charset="0"/>
+                <a:ea typeface="Consolas" pitchFamily="34" charset="-122"/>
+                <a:cs typeface="Consolas" pitchFamily="34" charset="-120"/>
+              </a:rPr>
+              <a:t>    df.head()</a:t>
+            </a:r>
+            <a:endParaRPr lang="en-US" sz="1250" dirty="0"/>
+          </a:p>
+          <a:p>
+            <a:pPr marL="0" indent="0">
+              <a:lnSpc>
+                <a:spcPct val="106000"/>
+              </a:lnSpc>
+              <a:buNone/>
+            </a:pPr>
+            <a:r>
+              <a:rPr lang="en-US" sz="1250" dirty="0">
+                <a:solidFill>
+                  <a:srgbClr val="E9E6DC"/>
+                </a:solidFill>
+                <a:latin typeface="Consolas" pitchFamily="34" charset="0"/>
+                <a:ea typeface="Consolas" pitchFamily="34" charset="-122"/>
+                <a:cs typeface="Consolas" pitchFamily="34" charset="-120"/>
+              </a:rPr>
+              <a:t>)</a:t>
+            </a:r>
+            <a:endParaRPr lang="en-US" sz="1250" dirty="0"/>
+          </a:p>
+        </p:txBody>
+      </p:sp>
     </p:spTree>
   </p:cSld>
   <p:clrMapOvr>
@@ -8424,212 +8740,15 @@
 </p:sld>
 </file>
 
-<file path=ppt/slides/slide3.xml><?xml version="1.0" encoding="utf-8"?>
+<file path=ppt/slides/slide5.xml><?xml version="1.0" encoding="utf-8"?>
 <p:sld xmlns:a="http://schemas.openxmlformats.org/drawingml/2006/main" xmlns:r="http://schemas.openxmlformats.org/officeDocument/2006/relationships" xmlns:p="http://schemas.openxmlformats.org/presentationml/2006/main">
-  <p:cSld name="Slide 3">
-    <p:bg>
-      <p:bgPr>
-        <a:solidFill>
-          <a:srgbClr val="C00000"/>
-        </a:solidFill>
-      </p:bgPr>
-    </p:bg>
-    <p:spTree>
-      <p:nvGrpSpPr>
-        <p:cNvPr id="1" name=""/>
-        <p:cNvGrpSpPr/>
-        <p:nvPr/>
-      </p:nvGrpSpPr>
-      <p:grpSpPr>
-        <a:xfrm>
-          <a:off x="0" y="0"/>
-          <a:ext cx="0" cy="0"/>
-          <a:chOff x="0" y="0"/>
-          <a:chExt cx="0" cy="0"/>
-        </a:xfrm>
-      </p:grpSpPr>
-      <p:sp>
-        <p:nvSpPr>
-          <p:cNvPr id="2" name="Text 0"/>
-          <p:cNvSpPr/>
-          <p:nvPr/>
-        </p:nvSpPr>
-        <p:spPr>
-          <a:xfrm>
-            <a:off x="685800" y="822960"/>
-            <a:ext cx="10058400" cy="822960"/>
-          </a:xfrm>
-          <a:prstGeom prst="rect">
-            <a:avLst/>
-          </a:prstGeom>
-          <a:noFill/>
-          <a:ln/>
-        </p:spPr>
-        <p:txBody>
-          <a:bodyPr wrap="square" lIns="0" tIns="0" rIns="0" bIns="0" rtlCol="0" anchor="ctr"/>
-          <a:lstStyle/>
-          <a:p>
-            <a:pPr indent="0" marL="0">
-              <a:buNone/>
-            </a:pPr>
-            <a:r>
-              <a:rPr lang="en-US" sz="3000" dirty="0">
-                <a:solidFill>
-                  <a:srgbClr val="FFFFFF"/>
-                </a:solidFill>
-                <a:latin typeface="Arial Black" pitchFamily="34" charset="0"/>
-                <a:ea typeface="Arial Black" pitchFamily="34" charset="-122"/>
-                <a:cs typeface="Arial Black" pitchFamily="34" charset="-120"/>
-              </a:rPr>
-              <a:t>What you'll walk away with</a:t>
-            </a:r>
-            <a:endParaRPr lang="en-US" sz="3000" dirty="0"/>
-          </a:p>
-        </p:txBody>
-      </p:sp>
-      <p:sp>
-        <p:nvSpPr>
-          <p:cNvPr id="3" name="Text 1"/>
-          <p:cNvSpPr/>
-          <p:nvPr/>
-        </p:nvSpPr>
-        <p:spPr>
-          <a:xfrm>
-            <a:off x="777240" y="1965960"/>
-            <a:ext cx="10424160" cy="3840480"/>
-          </a:xfrm>
-          <a:prstGeom prst="rect">
-            <a:avLst/>
-          </a:prstGeom>
-          <a:noFill/>
-          <a:ln/>
-        </p:spPr>
-        <p:txBody>
-          <a:bodyPr wrap="square" rtlCol="0" anchor="t"/>
-          <a:lstStyle/>
-          <a:p>
-            <a:pPr marL="228600" indent="-228600">
-              <a:spcAft>
-                <a:spcPts val="1400"/>
-              </a:spcAft>
-              <a:buSzPct val="100000"/>
-              <a:buChar char="•"/>
-            </a:pPr>
-            <a:r>
-              <a:rPr lang="en-US" sz="1900" dirty="0">
-                <a:solidFill>
-                  <a:srgbClr val="FFFFFF"/>
-                </a:solidFill>
-                <a:latin typeface="Arial" pitchFamily="34" charset="0"/>
-                <a:ea typeface="Arial" pitchFamily="34" charset="-122"/>
-                <a:cs typeface="Arial" pitchFamily="34" charset="-120"/>
-              </a:rPr>
-              <a:t>Summarize and analyze larger financial datasets without leaving Excel</a:t>
-            </a:r>
-            <a:endParaRPr lang="en-US" sz="1900" dirty="0"/>
-          </a:p>
-          <a:p>
-            <a:pPr marL="228600" indent="-228600">
-              <a:spcAft>
-                <a:spcPts val="1400"/>
-              </a:spcAft>
-              <a:buSzPct val="100000"/>
-              <a:buChar char="•"/>
-            </a:pPr>
-            <a:r>
-              <a:rPr lang="en-US" sz="1900" dirty="0">
-                <a:solidFill>
-                  <a:srgbClr val="FFFFFF"/>
-                </a:solidFill>
-                <a:latin typeface="Arial" pitchFamily="34" charset="0"/>
-                <a:ea typeface="Arial" pitchFamily="34" charset="-122"/>
-                <a:cs typeface="Arial" pitchFamily="34" charset="-120"/>
-              </a:rPr>
-              <a:t>Build and evaluate data-driven forecasts (trend + seasonality)</a:t>
-            </a:r>
-            <a:endParaRPr lang="en-US" sz="1900" dirty="0"/>
-          </a:p>
-          <a:p>
-            <a:pPr marL="228600" indent="-228600">
-              <a:spcAft>
-                <a:spcPts val="1400"/>
-              </a:spcAft>
-              <a:buSzPct val="100000"/>
-              <a:buChar char="•"/>
-            </a:pPr>
-            <a:r>
-              <a:rPr lang="en-US" sz="1900" dirty="0">
-                <a:solidFill>
-                  <a:srgbClr val="FFFFFF"/>
-                </a:solidFill>
-                <a:latin typeface="Arial" pitchFamily="34" charset="0"/>
-                <a:ea typeface="Arial" pitchFamily="34" charset="-122"/>
-                <a:cs typeface="Arial" pitchFamily="34" charset="-120"/>
-              </a:rPr>
-              <a:t>Run Monte Carlo simulations to model risk and uncertainty</a:t>
-            </a:r>
-            <a:endParaRPr lang="en-US" sz="1900" dirty="0"/>
-          </a:p>
-          <a:p>
-            <a:pPr marL="228600" indent="-228600">
-              <a:spcAft>
-                <a:spcPts val="1400"/>
-              </a:spcAft>
-              <a:buSzPct val="100000"/>
-              <a:buChar char="•"/>
-            </a:pPr>
-            <a:r>
-              <a:rPr lang="en-US" sz="1900" dirty="0">
-                <a:solidFill>
-                  <a:srgbClr val="FFFFFF"/>
-                </a:solidFill>
-                <a:latin typeface="Arial" pitchFamily="34" charset="0"/>
-                <a:ea typeface="Arial" pitchFamily="34" charset="-122"/>
-                <a:cs typeface="Arial" pitchFamily="34" charset="-120"/>
-              </a:rPr>
-              <a:t>Test many assumptions and scenarios at once, and visualize the range</a:t>
-            </a:r>
-            <a:endParaRPr lang="en-US" sz="1900" dirty="0"/>
-          </a:p>
-          <a:p>
-            <a:pPr marL="228600" indent="-228600">
-              <a:spcAft>
-                <a:spcPts val="1400"/>
-              </a:spcAft>
-              <a:buSzPct val="100000"/>
-              <a:buChar char="•"/>
-            </a:pPr>
-            <a:r>
-              <a:rPr lang="en-US" sz="1900" dirty="0">
-                <a:solidFill>
-                  <a:srgbClr val="FFFFFF"/>
-                </a:solidFill>
-                <a:latin typeface="Arial" pitchFamily="34" charset="0"/>
-                <a:ea typeface="Arial" pitchFamily="34" charset="-122"/>
-                <a:cs typeface="Arial" pitchFamily="34" charset="-120"/>
-              </a:rPr>
-              <a:t>Every line of code, the datasets, and a copy-paste cheat sheet to keep</a:t>
-            </a:r>
-            <a:endParaRPr lang="en-US" sz="1900" dirty="0"/>
-          </a:p>
-        </p:txBody>
-      </p:sp>
-    </p:spTree>
-  </p:cSld>
-  <p:clrMapOvr>
-    <a:masterClrMapping/>
-  </p:clrMapOvr>
-</p:sld>
-</file>
-
-<file path=ppt/slides/slide4.xml><?xml version="1.0" encoding="utf-8"?>
-<p:sld xmlns:a="http://schemas.openxmlformats.org/drawingml/2006/main" xmlns:r="http://schemas.openxmlformats.org/officeDocument/2006/relationships" xmlns:p="http://schemas.openxmlformats.org/presentationml/2006/main">
-  <p:cSld name="Slide 4">
+  <p:cSld name="Slide 5">
     <p:bg>
       <p:bgPr>
         <a:solidFill>
           <a:srgbClr val="EEECE1"/>
         </a:solidFill>
+        <a:effectLst/>
       </p:bgPr>
     </p:bg>
     <p:spTree>
@@ -8648,14 +8767,14 @@
       </p:grpSpPr>
       <p:pic>
         <p:nvPicPr>
-          <p:cNvPr id="2" name="Image 0" descr="assets/stringfest-logo-dark.png">    </p:cNvPr>
+          <p:cNvPr id="2" name="Image 0" descr="assets/stringfest-logo-dark.png"/>
           <p:cNvPicPr>
             <a:picLocks noChangeAspect="1"/>
           </p:cNvPicPr>
           <p:nvPr/>
         </p:nvPicPr>
         <p:blipFill>
-          <a:blip r:embed="rId1"/>
+          <a:blip r:embed="rId3"/>
           <a:srcRect l="9716" t="36914" r="6931" b="47496"/>
           <a:stretch>
             <a:fillRect/>
@@ -8692,11 +8811,11 @@
           <a:bodyPr wrap="square" lIns="0" tIns="0" rIns="0" bIns="0" rtlCol="0" anchor="ctr"/>
           <a:lstStyle/>
           <a:p>
-            <a:pPr indent="0" marL="0">
-              <a:buNone/>
-            </a:pPr>
-            <a:r>
-              <a:rPr lang="en-US" sz="1300" b="1" spc="300" kern="0" dirty="0">
+            <a:pPr marL="0" indent="0">
+              <a:buNone/>
+            </a:pPr>
+            <a:r>
+              <a:rPr lang="en-US" sz="1300" b="1" kern="0" spc="300" dirty="0">
                 <a:solidFill>
                   <a:srgbClr val="CF3338"/>
                 </a:solidFill>
@@ -8704,7 +8823,7 @@
                 <a:ea typeface="Arial" pitchFamily="34" charset="-122"/>
                 <a:cs typeface="Arial" pitchFamily="34" charset="-120"/>
               </a:rPr>
-              <a:t>HOW TODAY WORKS</a:t>
+              <a:t>THE MENTAL MODEL</a:t>
             </a:r>
             <a:endParaRPr lang="en-US" sz="1300" dirty="0"/>
           </a:p>
@@ -8731,7 +8850,7 @@
           <a:bodyPr wrap="square" lIns="0" tIns="0" rIns="0" bIns="0" rtlCol="0" anchor="ctr"/>
           <a:lstStyle/>
           <a:p>
-            <a:pPr indent="0" marL="0">
+            <a:pPr marL="0" indent="0">
               <a:buNone/>
             </a:pPr>
             <a:r>
@@ -8743,7 +8862,7 @@
                 <a:ea typeface="Arial Black" pitchFamily="34" charset="-122"/>
                 <a:cs typeface="Arial Black" pitchFamily="34" charset="-120"/>
               </a:rPr>
-              <a:t>Open Excel and follow along with me</a:t>
+              <a:t>Where formulas stop, Python starts</a:t>
             </a:r>
             <a:endParaRPr lang="en-US" sz="3000" dirty="0"/>
           </a:p>
@@ -8751,14 +8870,68 @@
       </p:sp>
       <p:sp>
         <p:nvSpPr>
-          <p:cNvPr id="5" name="Text 2"/>
+          <p:cNvPr id="5" name="Shape 2"/>
           <p:cNvSpPr/>
           <p:nvPr/>
         </p:nvSpPr>
         <p:spPr>
           <a:xfrm>
             <a:off x="685800" y="2331720"/>
-            <a:ext cx="6400800" cy="3840480"/>
+            <a:ext cx="5212080" cy="3749040"/>
+          </a:xfrm>
+          <a:prstGeom prst="rect">
+            <a:avLst/>
+          </a:prstGeom>
+          <a:solidFill>
+            <a:srgbClr val="FFFFFF"/>
+          </a:solidFill>
+          <a:ln/>
+        </p:spPr>
+        <p:txBody>
+          <a:bodyPr/>
+          <a:lstStyle/>
+          <a:p>
+            <a:endParaRPr lang="en-US"/>
+          </a:p>
+        </p:txBody>
+      </p:sp>
+      <p:sp>
+        <p:nvSpPr>
+          <p:cNvPr id="6" name="Shape 3"/>
+          <p:cNvSpPr/>
+          <p:nvPr/>
+        </p:nvSpPr>
+        <p:spPr>
+          <a:xfrm>
+            <a:off x="685800" y="2331720"/>
+            <a:ext cx="5212080" cy="548640"/>
+          </a:xfrm>
+          <a:prstGeom prst="rect">
+            <a:avLst/>
+          </a:prstGeom>
+          <a:solidFill>
+            <a:srgbClr val="707070"/>
+          </a:solidFill>
+          <a:ln/>
+        </p:spPr>
+        <p:txBody>
+          <a:bodyPr/>
+          <a:lstStyle/>
+          <a:p>
+            <a:endParaRPr lang="en-US"/>
+          </a:p>
+        </p:txBody>
+      </p:sp>
+      <p:sp>
+        <p:nvSpPr>
+          <p:cNvPr id="7" name="Text 4"/>
+          <p:cNvSpPr/>
+          <p:nvPr/>
+        </p:nvSpPr>
+        <p:spPr>
+          <a:xfrm>
+            <a:off x="685800" y="2331720"/>
+            <a:ext cx="5212080" cy="548640"/>
           </a:xfrm>
           <a:prstGeom prst="rect">
             <a:avLst/>
@@ -8767,145 +8940,191 @@
           <a:ln/>
         </p:spPr>
         <p:txBody>
+          <a:bodyPr wrap="square" lIns="0" tIns="0" rIns="0" bIns="0" rtlCol="0" anchor="ctr"/>
+          <a:lstStyle/>
+          <a:p>
+            <a:pPr marL="0" indent="0" algn="ctr">
+              <a:buNone/>
+            </a:pPr>
+            <a:r>
+              <a:rPr lang="en-US" sz="1400" b="1" kern="0" spc="100" dirty="0">
+                <a:solidFill>
+                  <a:srgbClr val="FFFFFF"/>
+                </a:solidFill>
+                <a:latin typeface="Arial" pitchFamily="34" charset="0"/>
+                <a:ea typeface="Arial" pitchFamily="34" charset="-122"/>
+                <a:cs typeface="Arial" pitchFamily="34" charset="-120"/>
+              </a:rPr>
+              <a:t>EXCEL FORMULAS DO WELL</a:t>
+            </a:r>
+            <a:endParaRPr lang="en-US" sz="1400" dirty="0"/>
+          </a:p>
+        </p:txBody>
+      </p:sp>
+      <p:sp>
+        <p:nvSpPr>
+          <p:cNvPr id="8" name="Text 5"/>
+          <p:cNvSpPr/>
+          <p:nvPr/>
+        </p:nvSpPr>
+        <p:spPr>
+          <a:xfrm>
+            <a:off x="914400" y="3063240"/>
+            <a:ext cx="4754880" cy="2834640"/>
+          </a:xfrm>
+          <a:prstGeom prst="rect">
+            <a:avLst/>
+          </a:prstGeom>
+          <a:noFill/>
+          <a:ln/>
+        </p:spPr>
+        <p:txBody>
           <a:bodyPr wrap="square" rtlCol="0" anchor="t"/>
           <a:lstStyle/>
           <a:p>
-            <a:pPr marL="228600" indent="-228600">
+            <a:pPr marL="203200" indent="-203200">
               <a:spcAft>
-                <a:spcPts val="1100"/>
+                <a:spcPts val="800"/>
               </a:spcAft>
               <a:buSzPct val="100000"/>
               <a:buChar char="•"/>
             </a:pPr>
             <a:r>
-              <a:rPr lang="en-US" sz="1600" dirty="0">
-                <a:solidFill>
-                  <a:srgbClr val="707070"/>
-                </a:solidFill>
-                <a:latin typeface="Arial" pitchFamily="34" charset="0"/>
-                <a:ea typeface="Arial" pitchFamily="34" charset="-122"/>
-                <a:cs typeface="Arial" pitchFamily="34" charset="-120"/>
-              </a:rPr>
-              <a:t>You'll need Python in Excel enabled (Microsoft 365 on the Current Channel).</a:t>
-            </a:r>
-            <a:endParaRPr lang="en-US" sz="1600" dirty="0"/>
-          </a:p>
-          <a:p>
-            <a:pPr marL="228600" indent="-228600">
+              <a:rPr lang="en-US" sz="1400" dirty="0">
+                <a:solidFill>
+                  <a:srgbClr val="1F2120"/>
+                </a:solidFill>
+                <a:latin typeface="Arial" pitchFamily="34" charset="0"/>
+                <a:ea typeface="Arial" pitchFamily="34" charset="-122"/>
+                <a:cs typeface="Arial" pitchFamily="34" charset="-120"/>
+              </a:rPr>
+              <a:t>Single-point what-if (Data Tables)</a:t>
+            </a:r>
+            <a:endParaRPr lang="en-US" sz="1400" dirty="0"/>
+          </a:p>
+          <a:p>
+            <a:pPr marL="203200" indent="-203200">
               <a:spcAft>
-                <a:spcPts val="1100"/>
+                <a:spcPts val="800"/>
               </a:spcAft>
               <a:buSzPct val="100000"/>
               <a:buChar char="•"/>
             </a:pPr>
             <a:r>
-              <a:rPr lang="en-US" sz="1600" dirty="0">
-                <a:solidFill>
-                  <a:srgbClr val="707070"/>
-                </a:solidFill>
-                <a:latin typeface="Arial" pitchFamily="34" charset="0"/>
-                <a:ea typeface="Arial" pitchFamily="34" charset="-122"/>
-                <a:cs typeface="Arial" pitchFamily="34" charset="-120"/>
-              </a:rPr>
-              <a:t>Open the datasets workbook I shared, Revenue, Bookings, Simulation sheets.</a:t>
-            </a:r>
-            <a:endParaRPr lang="en-US" sz="1600" dirty="0"/>
-          </a:p>
-          <a:p>
-            <a:pPr marL="228600" indent="-228600">
+              <a:rPr lang="en-US" sz="1400" dirty="0">
+                <a:solidFill>
+                  <a:srgbClr val="1F2120"/>
+                </a:solidFill>
+                <a:latin typeface="Arial" pitchFamily="34" charset="0"/>
+                <a:ea typeface="Arial" pitchFamily="34" charset="-122"/>
+                <a:cs typeface="Arial" pitchFamily="34" charset="-120"/>
+              </a:rPr>
+              <a:t>A handful of named scenarios</a:t>
+            </a:r>
+            <a:endParaRPr lang="en-US" sz="1400" dirty="0"/>
+          </a:p>
+          <a:p>
+            <a:pPr marL="203200" indent="-203200">
               <a:spcAft>
-                <a:spcPts val="1100"/>
+                <a:spcPts val="800"/>
               </a:spcAft>
               <a:buSzPct val="100000"/>
               <a:buChar char="•"/>
             </a:pPr>
             <a:r>
-              <a:rPr lang="en-US" sz="1600" dirty="0">
-                <a:solidFill>
-                  <a:srgbClr val="707070"/>
-                </a:solidFill>
-                <a:latin typeface="Arial" pitchFamily="34" charset="0"/>
-                <a:ea typeface="Arial" pitchFamily="34" charset="-122"/>
-                <a:cs typeface="Arial" pitchFamily="34" charset="-120"/>
-              </a:rPr>
-              <a:t>In a cell, type =PY( and Excel drops into Python. Ctrl+Enter runs it.</a:t>
-            </a:r>
-            <a:endParaRPr lang="en-US" sz="1600" dirty="0"/>
-          </a:p>
-          <a:p>
-            <a:pPr marL="228600" indent="-228600">
+              <a:rPr lang="en-US" sz="1400" dirty="0">
+                <a:solidFill>
+                  <a:srgbClr val="1F2120"/>
+                </a:solidFill>
+                <a:latin typeface="Arial" pitchFamily="34" charset="0"/>
+                <a:ea typeface="Arial" pitchFamily="34" charset="-122"/>
+                <a:cs typeface="Arial" pitchFamily="34" charset="-120"/>
+              </a:rPr>
+              <a:t>Straight-line trend / FORECAST</a:t>
+            </a:r>
+            <a:endParaRPr lang="en-US" sz="1400" dirty="0"/>
+          </a:p>
+          <a:p>
+            <a:pPr marL="203200" indent="-203200">
               <a:spcAft>
-                <a:spcPts val="1100"/>
+                <a:spcPts val="800"/>
               </a:spcAft>
               <a:buSzPct val="100000"/>
               <a:buChar char="•"/>
             </a:pPr>
             <a:r>
-              <a:rPr lang="en-US" sz="1600" dirty="0">
-                <a:solidFill>
-                  <a:srgbClr val="707070"/>
-                </a:solidFill>
-                <a:latin typeface="Arial" pitchFamily="34" charset="0"/>
-                <a:ea typeface="Arial" pitchFamily="34" charset="-122"/>
-                <a:cs typeface="Arial" pitchFamily="34" charset="-120"/>
-              </a:rPr>
-              <a:t>When you see the red PY() CELL card, type the code and run it with me.</a:t>
-            </a:r>
-            <a:endParaRPr lang="en-US" sz="1600" dirty="0"/>
-          </a:p>
-          <a:p>
-            <a:pPr marL="228600" indent="-228600">
+              <a:rPr lang="en-US" sz="1400" dirty="0">
+                <a:solidFill>
+                  <a:srgbClr val="1F2120"/>
+                </a:solidFill>
+                <a:latin typeface="Arial" pitchFamily="34" charset="0"/>
+                <a:ea typeface="Arial" pitchFamily="34" charset="-122"/>
+                <a:cs typeface="Arial" pitchFamily="34" charset="-120"/>
+              </a:rPr>
+              <a:t>Fixed, well-understood inputs</a:t>
+            </a:r>
+            <a:endParaRPr lang="en-US" sz="1400" dirty="0"/>
+          </a:p>
+          <a:p>
+            <a:pPr marL="203200" indent="-203200">
               <a:spcAft>
-                <a:spcPts val="1100"/>
+                <a:spcPts val="800"/>
               </a:spcAft>
               <a:buSzPct val="100000"/>
               <a:buChar char="•"/>
             </a:pPr>
             <a:r>
-              <a:rPr lang="en-US" sz="1600" dirty="0">
-                <a:solidFill>
-                  <a:srgbClr val="707070"/>
-                </a:solidFill>
-                <a:latin typeface="Arial" pitchFamily="34" charset="0"/>
-                <a:ea typeface="Arial" pitchFamily="34" charset="-122"/>
-                <a:cs typeface="Arial" pitchFamily="34" charset="-120"/>
-              </a:rPr>
-              <a:t>Your numbers will match mine, we set a random seed for reproducibility.</a:t>
-            </a:r>
-            <a:endParaRPr lang="en-US" sz="1600" dirty="0"/>
-          </a:p>
-        </p:txBody>
-      </p:sp>
-      <p:sp>
-        <p:nvSpPr>
-          <p:cNvPr id="6" name="Shape 3"/>
-          <p:cNvSpPr/>
-          <p:nvPr/>
-        </p:nvSpPr>
-        <p:spPr>
-          <a:xfrm>
-            <a:off x="7360920" y="2331720"/>
-            <a:ext cx="4160520" cy="2834640"/>
+              <a:rPr lang="en-US" sz="1400" dirty="0">
+                <a:solidFill>
+                  <a:srgbClr val="1F2120"/>
+                </a:solidFill>
+                <a:latin typeface="Arial" pitchFamily="34" charset="0"/>
+                <a:ea typeface="Arial" pitchFamily="34" charset="-122"/>
+                <a:cs typeface="Arial" pitchFamily="34" charset="-120"/>
+              </a:rPr>
+              <a:t>Live, linked model cells</a:t>
+            </a:r>
+            <a:endParaRPr lang="en-US" sz="1400" dirty="0"/>
+          </a:p>
+        </p:txBody>
+      </p:sp>
+      <p:sp>
+        <p:nvSpPr>
+          <p:cNvPr id="9" name="Shape 6"/>
+          <p:cNvSpPr/>
+          <p:nvPr/>
+        </p:nvSpPr>
+        <p:spPr>
+          <a:xfrm>
+            <a:off x="6263640" y="2331720"/>
+            <a:ext cx="5212080" cy="3749040"/>
           </a:xfrm>
           <a:prstGeom prst="rect">
             <a:avLst/>
           </a:prstGeom>
           <a:solidFill>
-            <a:srgbClr val="1F2120"/>
+            <a:srgbClr val="FFFFFF"/>
           </a:solidFill>
           <a:ln/>
         </p:spPr>
-      </p:sp>
-      <p:sp>
-        <p:nvSpPr>
-          <p:cNvPr id="7" name="Shape 4"/>
-          <p:cNvSpPr/>
-          <p:nvPr/>
-        </p:nvSpPr>
-        <p:spPr>
-          <a:xfrm>
-            <a:off x="7360920" y="2331720"/>
-            <a:ext cx="1783080" cy="384048"/>
+        <p:txBody>
+          <a:bodyPr/>
+          <a:lstStyle/>
+          <a:p>
+            <a:endParaRPr lang="en-US"/>
+          </a:p>
+        </p:txBody>
+      </p:sp>
+      <p:sp>
+        <p:nvSpPr>
+          <p:cNvPr id="10" name="Shape 7"/>
+          <p:cNvSpPr/>
+          <p:nvPr/>
+        </p:nvSpPr>
+        <p:spPr>
+          <a:xfrm>
+            <a:off x="6263640" y="2331720"/>
+            <a:ext cx="5212080" cy="548640"/>
           </a:xfrm>
           <a:prstGeom prst="rect">
             <a:avLst/>
@@ -8915,17 +9134,24 @@
           </a:solidFill>
           <a:ln/>
         </p:spPr>
-      </p:sp>
-      <p:sp>
-        <p:nvSpPr>
-          <p:cNvPr id="8" name="Text 5"/>
-          <p:cNvSpPr/>
-          <p:nvPr/>
-        </p:nvSpPr>
-        <p:spPr>
-          <a:xfrm>
-            <a:off x="7360920" y="2331720"/>
-            <a:ext cx="1783080" cy="384048"/>
+        <p:txBody>
+          <a:bodyPr/>
+          <a:lstStyle/>
+          <a:p>
+            <a:endParaRPr lang="en-US"/>
+          </a:p>
+        </p:txBody>
+      </p:sp>
+      <p:sp>
+        <p:nvSpPr>
+          <p:cNvPr id="11" name="Text 8"/>
+          <p:cNvSpPr/>
+          <p:nvPr/>
+        </p:nvSpPr>
+        <p:spPr>
+          <a:xfrm>
+            <a:off x="6263640" y="2331720"/>
+            <a:ext cx="5212080" cy="548640"/>
           </a:xfrm>
           <a:prstGeom prst="rect">
             <a:avLst/>
@@ -8937,11 +9163,11 @@
           <a:bodyPr wrap="square" lIns="0" tIns="0" rIns="0" bIns="0" rtlCol="0" anchor="ctr"/>
           <a:lstStyle/>
           <a:p>
-            <a:pPr algn="ctr" indent="0" marL="0">
-              <a:buNone/>
-            </a:pPr>
-            <a:r>
-              <a:rPr lang="en-US" sz="1150" b="1" spc="200" kern="0" dirty="0">
+            <a:pPr marL="0" indent="0" algn="ctr">
+              <a:buNone/>
+            </a:pPr>
+            <a:r>
+              <a:rPr lang="en-US" sz="1400" b="1" kern="0" spc="100" dirty="0">
                 <a:solidFill>
                   <a:srgbClr val="FFFFFF"/>
                 </a:solidFill>
@@ -8949,22 +9175,22 @@
                 <a:ea typeface="Arial" pitchFamily="34" charset="-122"/>
                 <a:cs typeface="Arial" pitchFamily="34" charset="-120"/>
               </a:rPr>
-              <a:t>PY() CELL</a:t>
-            </a:r>
-            <a:endParaRPr lang="en-US" sz="1150" dirty="0"/>
-          </a:p>
-        </p:txBody>
-      </p:sp>
-      <p:sp>
-        <p:nvSpPr>
-          <p:cNvPr id="9" name="Text 6"/>
-          <p:cNvSpPr/>
-          <p:nvPr/>
-        </p:nvSpPr>
-        <p:spPr>
-          <a:xfrm>
-            <a:off x="7616952" y="2862072"/>
-            <a:ext cx="3703320" cy="2148840"/>
+              <a:t>PYTHON IN EXCEL UNLOCKS</a:t>
+            </a:r>
+            <a:endParaRPr lang="en-US" sz="1400" dirty="0"/>
+          </a:p>
+        </p:txBody>
+      </p:sp>
+      <p:sp>
+        <p:nvSpPr>
+          <p:cNvPr id="12" name="Text 9"/>
+          <p:cNvSpPr/>
+          <p:nvPr/>
+        </p:nvSpPr>
+        <p:spPr>
+          <a:xfrm>
+            <a:off x="6492240" y="3063240"/>
+            <a:ext cx="4754880" cy="2834640"/>
           </a:xfrm>
           <a:prstGeom prst="rect">
             <a:avLst/>
@@ -8973,147 +9199,112 @@
           <a:ln/>
         </p:spPr>
         <p:txBody>
-          <a:bodyPr wrap="square" lIns="0" tIns="0" rIns="0" bIns="0" rtlCol="0" anchor="t"/>
-          <a:lstStyle/>
-          <a:p>
-            <a:pPr indent="0" marL="0">
-              <a:lnSpc>
-                <a:spcPct val="106000"/>
-              </a:lnSpc>
-              <a:buNone/>
-            </a:pPr>
-            <a:r>
-              <a:rPr lang="en-US" sz="1250" dirty="0">
-                <a:solidFill>
-                  <a:srgbClr val="E9E6DC"/>
-                </a:solidFill>
-                <a:latin typeface="Consolas" pitchFamily="34" charset="0"/>
-                <a:ea typeface="Consolas" pitchFamily="34" charset="-122"/>
-                <a:cs typeface="Consolas" pitchFamily="34" charset="-120"/>
-              </a:rPr>
-              <a:t>=PY(</a:t>
-            </a:r>
-            <a:endParaRPr lang="en-US" sz="1250" dirty="0"/>
-          </a:p>
-          <a:p>
-            <a:pPr indent="0" marL="0">
-              <a:lnSpc>
-                <a:spcPct val="106000"/>
-              </a:lnSpc>
-              <a:buNone/>
-            </a:pPr>
-            <a:r>
-              <a:rPr lang="en-US" sz="1250" dirty="0">
-                <a:solidFill>
-                  <a:srgbClr val="E9E6DC"/>
-                </a:solidFill>
-                <a:latin typeface="Consolas" pitchFamily="34" charset="0"/>
-                <a:ea typeface="Consolas" pitchFamily="34" charset="-122"/>
-                <a:cs typeface="Consolas" pitchFamily="34" charset="-120"/>
-              </a:rPr>
-              <a:t>    import pandas as pd</a:t>
-            </a:r>
-            <a:endParaRPr lang="en-US" sz="1250" dirty="0"/>
-          </a:p>
-          <a:p>
-            <a:pPr indent="0" marL="0">
-              <a:lnSpc>
-                <a:spcPct val="106000"/>
-              </a:lnSpc>
-              <a:buNone/>
-            </a:pPr>
-            <a:r>
-              <a:rPr lang="en-US" sz="1250" dirty="0">
-                <a:solidFill>
-                  <a:srgbClr val="E9E6DC"/>
-                </a:solidFill>
-                <a:latin typeface="Consolas" pitchFamily="34" charset="0"/>
-                <a:ea typeface="Consolas" pitchFamily="34" charset="-122"/>
-                <a:cs typeface="Consolas" pitchFamily="34" charset="-120"/>
-              </a:rPr>
-              <a:t>    import numpy as np</a:t>
-            </a:r>
-            <a:endParaRPr lang="en-US" sz="1250" dirty="0"/>
-          </a:p>
-          <a:p>
-            <a:pPr indent="0" marL="0">
-              <a:lnSpc>
-                <a:spcPct val="106000"/>
-              </a:lnSpc>
-              <a:buNone/>
-            </a:pPr>
-            <a:r>
-              <a:rPr lang="en-US" sz="1250" dirty="0">
-                <a:solidFill>
-                  <a:srgbClr val="E9E6DC"/>
-                </a:solidFill>
-                <a:latin typeface="Consolas" pitchFamily="34" charset="0"/>
-                <a:ea typeface="Consolas" pitchFamily="34" charset="-122"/>
-                <a:cs typeface="Consolas" pitchFamily="34" charset="-120"/>
-              </a:rPr>
-              <a:t>    df = xl("revenue[#All]",</a:t>
-            </a:r>
-            <a:endParaRPr lang="en-US" sz="1250" dirty="0"/>
-          </a:p>
-          <a:p>
-            <a:pPr indent="0" marL="0">
-              <a:lnSpc>
-                <a:spcPct val="106000"/>
-              </a:lnSpc>
-              <a:buNone/>
-            </a:pPr>
-            <a:r>
-              <a:rPr lang="en-US" sz="1250" dirty="0">
-                <a:solidFill>
-                  <a:srgbClr val="E9E6DC"/>
-                </a:solidFill>
-                <a:latin typeface="Consolas" pitchFamily="34" charset="0"/>
-                <a:ea typeface="Consolas" pitchFamily="34" charset="-122"/>
-                <a:cs typeface="Consolas" pitchFamily="34" charset="-120"/>
-              </a:rPr>
-              <a:t>            headers=True)</a:t>
-            </a:r>
-            <a:endParaRPr lang="en-US" sz="1250" dirty="0"/>
-          </a:p>
-          <a:p>
-            <a:pPr indent="0" marL="0">
-              <a:lnSpc>
-                <a:spcPct val="106000"/>
-              </a:lnSpc>
-              <a:buNone/>
-            </a:pPr>
-            <a:r>
-              <a:rPr lang="en-US" sz="1250" dirty="0">
-                <a:solidFill>
-                  <a:srgbClr val="E9E6DC"/>
-                </a:solidFill>
-                <a:latin typeface="Consolas" pitchFamily="34" charset="0"/>
-                <a:ea typeface="Consolas" pitchFamily="34" charset="-122"/>
-                <a:cs typeface="Consolas" pitchFamily="34" charset="-120"/>
-              </a:rPr>
-              <a:t>    df.head()</a:t>
-            </a:r>
-            <a:endParaRPr lang="en-US" sz="1250" dirty="0"/>
-          </a:p>
-          <a:p>
-            <a:pPr indent="0" marL="0">
-              <a:lnSpc>
-                <a:spcPct val="106000"/>
-              </a:lnSpc>
-              <a:buNone/>
-            </a:pPr>
-            <a:r>
-              <a:rPr lang="en-US" sz="1250" dirty="0">
-                <a:solidFill>
-                  <a:srgbClr val="E9E6DC"/>
-                </a:solidFill>
-                <a:latin typeface="Consolas" pitchFamily="34" charset="0"/>
-                <a:ea typeface="Consolas" pitchFamily="34" charset="-122"/>
-                <a:cs typeface="Consolas" pitchFamily="34" charset="-120"/>
-              </a:rPr>
-              <a:t>)</a:t>
-            </a:r>
-            <a:endParaRPr lang="en-US" sz="1250" dirty="0"/>
+          <a:bodyPr wrap="square" rtlCol="0" anchor="t"/>
+          <a:lstStyle/>
+          <a:p>
+            <a:pPr marL="203200" indent="-203200">
+              <a:spcAft>
+                <a:spcPts val="800"/>
+              </a:spcAft>
+              <a:buSzPct val="100000"/>
+              <a:buChar char="•"/>
+            </a:pPr>
+            <a:r>
+              <a:rPr lang="en-US" sz="1400" dirty="0">
+                <a:solidFill>
+                  <a:srgbClr val="1F2120"/>
+                </a:solidFill>
+                <a:latin typeface="Arial" pitchFamily="34" charset="0"/>
+                <a:ea typeface="Arial" pitchFamily="34" charset="-122"/>
+                <a:cs typeface="Arial" pitchFamily="34" charset="-120"/>
+              </a:rPr>
+              <a:t>Trend + seasonality forecasting</a:t>
+            </a:r>
+            <a:endParaRPr lang="en-US" sz="1400" dirty="0"/>
+          </a:p>
+          <a:p>
+            <a:pPr marL="203200" indent="-203200">
+              <a:spcAft>
+                <a:spcPts val="800"/>
+              </a:spcAft>
+              <a:buSzPct val="100000"/>
+              <a:buChar char="•"/>
+            </a:pPr>
+            <a:r>
+              <a:rPr lang="en-US" sz="1400" dirty="0">
+                <a:solidFill>
+                  <a:srgbClr val="1F2120"/>
+                </a:solidFill>
+                <a:latin typeface="Arial" pitchFamily="34" charset="0"/>
+                <a:ea typeface="Arial" pitchFamily="34" charset="-122"/>
+                <a:cs typeface="Arial" pitchFamily="34" charset="-120"/>
+              </a:rPr>
+              <a:t>Thousands of Monte Carlo trials</a:t>
+            </a:r>
+            <a:endParaRPr lang="en-US" sz="1400" dirty="0"/>
+          </a:p>
+          <a:p>
+            <a:pPr marL="203200" indent="-203200">
+              <a:spcAft>
+                <a:spcPts val="800"/>
+              </a:spcAft>
+              <a:buSzPct val="100000"/>
+              <a:buChar char="•"/>
+            </a:pPr>
+            <a:r>
+              <a:rPr lang="en-US" sz="1400" dirty="0">
+                <a:solidFill>
+                  <a:srgbClr val="1F2120"/>
+                </a:solidFill>
+                <a:latin typeface="Arial" pitchFamily="34" charset="0"/>
+                <a:ea typeface="Arial" pitchFamily="34" charset="-122"/>
+                <a:cs typeface="Arial" pitchFamily="34" charset="-120"/>
+              </a:rPr>
+              <a:t>Full distributions, not one number</a:t>
+            </a:r>
+            <a:endParaRPr lang="en-US" sz="1400" dirty="0"/>
+          </a:p>
+          <a:p>
+            <a:pPr marL="203200" indent="-203200">
+              <a:spcAft>
+                <a:spcPts val="800"/>
+              </a:spcAft>
+              <a:buSzPct val="100000"/>
+              <a:buChar char="•"/>
+            </a:pPr>
+            <a:r>
+              <a:rPr lang="en-US" sz="1400" dirty="0">
+                <a:solidFill>
+                  <a:srgbClr val="1F2120"/>
+                </a:solidFill>
+                <a:latin typeface="Arial" pitchFamily="34" charset="0"/>
+                <a:ea typeface="Arial" pitchFamily="34" charset="-122"/>
+                <a:cs typeface="Arial" pitchFamily="34" charset="-120"/>
+              </a:rPr>
+              <a:t>Decomposition &amp; diagnostics</a:t>
+            </a:r>
+            <a:endParaRPr lang="en-US" sz="1400" dirty="0"/>
+          </a:p>
+          <a:p>
+            <a:pPr marL="203200" indent="-203200">
+              <a:spcAft>
+                <a:spcPts val="800"/>
+              </a:spcAft>
+              <a:buSzPct val="100000"/>
+              <a:buChar char="•"/>
+            </a:pPr>
+            <a:r>
+              <a:rPr lang="en-US" sz="1400" dirty="0">
+                <a:solidFill>
+                  <a:srgbClr val="1F2120"/>
+                </a:solidFill>
+                <a:latin typeface="Arial" pitchFamily="34" charset="0"/>
+                <a:ea typeface="Arial" pitchFamily="34" charset="-122"/>
+                <a:cs typeface="Arial" pitchFamily="34" charset="-120"/>
+              </a:rPr>
+              <a:t>Repeatable, seeded, auditable code</a:t>
+            </a:r>
+            <a:endParaRPr lang="en-US" sz="1400" dirty="0"/>
           </a:p>
         </p:txBody>
       </p:sp>
@@ -9125,14 +9316,165 @@
 </p:sld>
 </file>
 
-<file path=ppt/slides/slide5.xml><?xml version="1.0" encoding="utf-8"?>
+<file path=ppt/slides/slide6.xml><?xml version="1.0" encoding="utf-8"?>
 <p:sld xmlns:a="http://schemas.openxmlformats.org/drawingml/2006/main" xmlns:r="http://schemas.openxmlformats.org/officeDocument/2006/relationships" xmlns:p="http://schemas.openxmlformats.org/presentationml/2006/main">
-  <p:cSld name="Slide 5">
+  <p:cSld name="Slide 6">
+    <p:bg>
+      <p:bgPr>
+        <a:solidFill>
+          <a:srgbClr val="C00000"/>
+        </a:solidFill>
+        <a:effectLst/>
+      </p:bgPr>
+    </p:bg>
+    <p:spTree>
+      <p:nvGrpSpPr>
+        <p:cNvPr id="1" name=""/>
+        <p:cNvGrpSpPr/>
+        <p:nvPr/>
+      </p:nvGrpSpPr>
+      <p:grpSpPr>
+        <a:xfrm>
+          <a:off x="0" y="0"/>
+          <a:ext cx="0" cy="0"/>
+          <a:chOff x="0" y="0"/>
+          <a:chExt cx="0" cy="0"/>
+        </a:xfrm>
+      </p:grpSpPr>
+      <p:sp>
+        <p:nvSpPr>
+          <p:cNvPr id="2" name="Text 0"/>
+          <p:cNvSpPr/>
+          <p:nvPr/>
+        </p:nvSpPr>
+        <p:spPr>
+          <a:xfrm>
+            <a:off x="822960" y="2148840"/>
+            <a:ext cx="10515600" cy="457200"/>
+          </a:xfrm>
+          <a:prstGeom prst="rect">
+            <a:avLst/>
+          </a:prstGeom>
+          <a:noFill/>
+          <a:ln/>
+        </p:spPr>
+        <p:txBody>
+          <a:bodyPr wrap="square" lIns="0" tIns="0" rIns="0" bIns="0" rtlCol="0" anchor="ctr"/>
+          <a:lstStyle/>
+          <a:p>
+            <a:pPr marL="0" indent="0">
+              <a:buNone/>
+            </a:pPr>
+            <a:r>
+              <a:rPr lang="en-US" sz="1500" b="1" kern="0" spc="300" dirty="0">
+                <a:solidFill>
+                  <a:srgbClr val="F3C9CA"/>
+                </a:solidFill>
+                <a:latin typeface="Arial" pitchFamily="34" charset="0"/>
+                <a:ea typeface="Arial" pitchFamily="34" charset="-122"/>
+                <a:cs typeface="Arial" pitchFamily="34" charset="-120"/>
+              </a:rPr>
+              <a:t>PART 1 OF 2</a:t>
+            </a:r>
+            <a:endParaRPr lang="en-US" sz="1500" dirty="0"/>
+          </a:p>
+        </p:txBody>
+      </p:sp>
+      <p:sp>
+        <p:nvSpPr>
+          <p:cNvPr id="3" name="Text 1"/>
+          <p:cNvSpPr/>
+          <p:nvPr/>
+        </p:nvSpPr>
+        <p:spPr>
+          <a:xfrm>
+            <a:off x="822960" y="2606040"/>
+            <a:ext cx="10515600" cy="1097280"/>
+          </a:xfrm>
+          <a:prstGeom prst="rect">
+            <a:avLst/>
+          </a:prstGeom>
+          <a:noFill/>
+          <a:ln/>
+        </p:spPr>
+        <p:txBody>
+          <a:bodyPr wrap="square" lIns="0" tIns="0" rIns="0" bIns="0" rtlCol="0" anchor="ctr"/>
+          <a:lstStyle/>
+          <a:p>
+            <a:pPr marL="0" indent="0">
+              <a:buNone/>
+            </a:pPr>
+            <a:r>
+              <a:rPr lang="en-US" sz="3800" dirty="0">
+                <a:solidFill>
+                  <a:srgbClr val="FFFFFF"/>
+                </a:solidFill>
+                <a:latin typeface="Arial Black" pitchFamily="34" charset="0"/>
+                <a:ea typeface="Arial Black" pitchFamily="34" charset="-122"/>
+                <a:cs typeface="Arial Black" pitchFamily="34" charset="-120"/>
+              </a:rPr>
+              <a:t>Forecasting revenue</a:t>
+            </a:r>
+            <a:endParaRPr lang="en-US" sz="3800" dirty="0"/>
+          </a:p>
+        </p:txBody>
+      </p:sp>
+      <p:sp>
+        <p:nvSpPr>
+          <p:cNvPr id="4" name="Text 2"/>
+          <p:cNvSpPr/>
+          <p:nvPr/>
+        </p:nvSpPr>
+        <p:spPr>
+          <a:xfrm>
+            <a:off x="868680" y="3794760"/>
+            <a:ext cx="10058400" cy="640080"/>
+          </a:xfrm>
+          <a:prstGeom prst="rect">
+            <a:avLst/>
+          </a:prstGeom>
+          <a:noFill/>
+          <a:ln/>
+        </p:spPr>
+        <p:txBody>
+          <a:bodyPr wrap="square" lIns="0" tIns="0" rIns="0" bIns="0" rtlCol="0" anchor="ctr"/>
+          <a:lstStyle/>
+          <a:p>
+            <a:pPr marL="0" indent="0">
+              <a:buNone/>
+            </a:pPr>
+            <a:r>
+              <a:rPr lang="en-US" sz="1800" dirty="0">
+                <a:solidFill>
+                  <a:srgbClr val="F3C9CA"/>
+                </a:solidFill>
+                <a:latin typeface="Arial" pitchFamily="34" charset="0"/>
+                <a:ea typeface="Arial" pitchFamily="34" charset="-122"/>
+                <a:cs typeface="Arial" pitchFamily="34" charset="-120"/>
+              </a:rPr>
+              <a:t>Resample · smooth · decompose · Holt-Winters · evaluate</a:t>
+            </a:r>
+            <a:endParaRPr lang="en-US" sz="1800" dirty="0"/>
+          </a:p>
+        </p:txBody>
+      </p:sp>
+    </p:spTree>
+  </p:cSld>
+  <p:clrMapOvr>
+    <a:masterClrMapping/>
+  </p:clrMapOvr>
+</p:sld>
+</file>
+
+<file path=ppt/slides/slide7.xml><?xml version="1.0" encoding="utf-8"?>
+<p:sld xmlns:a="http://schemas.openxmlformats.org/drawingml/2006/main" xmlns:r="http://schemas.openxmlformats.org/officeDocument/2006/relationships" xmlns:p="http://schemas.openxmlformats.org/presentationml/2006/main">
+  <p:cSld name="Slide 7">
     <p:bg>
       <p:bgPr>
         <a:solidFill>
           <a:srgbClr val="EEECE1"/>
         </a:solidFill>
+        <a:effectLst/>
       </p:bgPr>
     </p:bg>
     <p:spTree>
@@ -9151,14 +9493,14 @@
       </p:grpSpPr>
       <p:pic>
         <p:nvPicPr>
-          <p:cNvPr id="2" name="Image 0" descr="assets/stringfest-logo-dark.png">    </p:cNvPr>
+          <p:cNvPr id="2" name="Image 0" descr="assets/stringfest-logo-dark.png"/>
           <p:cNvPicPr>
             <a:picLocks noChangeAspect="1"/>
           </p:cNvPicPr>
           <p:nvPr/>
         </p:nvPicPr>
         <p:blipFill>
-          <a:blip r:embed="rId1"/>
+          <a:blip r:embed="rId3"/>
           <a:srcRect l="9716" t="36914" r="6931" b="47496"/>
           <a:stretch>
             <a:fillRect/>
@@ -9195,11 +9537,11 @@
           <a:bodyPr wrap="square" lIns="0" tIns="0" rIns="0" bIns="0" rtlCol="0" anchor="ctr"/>
           <a:lstStyle/>
           <a:p>
-            <a:pPr indent="0" marL="0">
-              <a:buNone/>
-            </a:pPr>
-            <a:r>
-              <a:rPr lang="en-US" sz="1300" b="1" spc="300" kern="0" dirty="0">
+            <a:pPr marL="0" indent="0">
+              <a:buNone/>
+            </a:pPr>
+            <a:r>
+              <a:rPr lang="en-US" sz="1300" b="1" kern="0" spc="300" dirty="0">
                 <a:solidFill>
                   <a:srgbClr val="CF3338"/>
                 </a:solidFill>
@@ -9207,7 +9549,7 @@
                 <a:ea typeface="Arial" pitchFamily="34" charset="-122"/>
                 <a:cs typeface="Arial" pitchFamily="34" charset="-120"/>
               </a:rPr>
-              <a:t>THE MENTAL MODEL</a:t>
+              <a:t>STEP 1, UNDERSTAND THE SERIES</a:t>
             </a:r>
             <a:endParaRPr lang="en-US" sz="1300" dirty="0"/>
           </a:p>
@@ -9234,7 +9576,7 @@
           <a:bodyPr wrap="square" lIns="0" tIns="0" rIns="0" bIns="0" rtlCol="0" anchor="ctr"/>
           <a:lstStyle/>
           <a:p>
-            <a:pPr indent="0" marL="0">
+            <a:pPr marL="0" indent="0">
               <a:buNone/>
             </a:pPr>
             <a:r>
@@ -9246,7 +9588,7 @@
                 <a:ea typeface="Arial Black" pitchFamily="34" charset="-122"/>
                 <a:cs typeface="Arial Black" pitchFamily="34" charset="-120"/>
               </a:rPr>
-              <a:t>Where formulas stop, Python starts</a:t>
+              <a:t>Load revenue and index it by time</a:t>
             </a:r>
             <a:endParaRPr lang="en-US" sz="3000" dirty="0"/>
           </a:p>
@@ -9254,54 +9596,14 @@
       </p:sp>
       <p:sp>
         <p:nvSpPr>
-          <p:cNvPr id="5" name="Shape 2"/>
+          <p:cNvPr id="5" name="Text 2"/>
           <p:cNvSpPr/>
           <p:nvPr/>
         </p:nvSpPr>
         <p:spPr>
           <a:xfrm>
             <a:off x="685800" y="2331720"/>
-            <a:ext cx="5212080" cy="3749040"/>
-          </a:xfrm>
-          <a:prstGeom prst="rect">
-            <a:avLst/>
-          </a:prstGeom>
-          <a:solidFill>
-            <a:srgbClr val="FFFFFF"/>
-          </a:solidFill>
-          <a:ln/>
-        </p:spPr>
-      </p:sp>
-      <p:sp>
-        <p:nvSpPr>
-          <p:cNvPr id="6" name="Shape 3"/>
-          <p:cNvSpPr/>
-          <p:nvPr/>
-        </p:nvSpPr>
-        <p:spPr>
-          <a:xfrm>
-            <a:off x="685800" y="2331720"/>
-            <a:ext cx="5212080" cy="548640"/>
-          </a:xfrm>
-          <a:prstGeom prst="rect">
-            <a:avLst/>
-          </a:prstGeom>
-          <a:solidFill>
-            <a:srgbClr val="707070"/>
-          </a:solidFill>
-          <a:ln/>
-        </p:spPr>
-      </p:sp>
-      <p:sp>
-        <p:nvSpPr>
-          <p:cNvPr id="7" name="Text 4"/>
-          <p:cNvSpPr/>
-          <p:nvPr/>
-        </p:nvSpPr>
-        <p:spPr>
-          <a:xfrm>
-            <a:off x="685800" y="2331720"/>
-            <a:ext cx="5212080" cy="548640"/>
+            <a:ext cx="6400800" cy="3840480"/>
           </a:xfrm>
           <a:prstGeom prst="rect">
             <a:avLst/>
@@ -9310,184 +9612,131 @@
           <a:ln/>
         </p:spPr>
         <p:txBody>
-          <a:bodyPr wrap="square" lIns="0" tIns="0" rIns="0" bIns="0" rtlCol="0" anchor="ctr"/>
-          <a:lstStyle/>
-          <a:p>
-            <a:pPr algn="ctr" indent="0" marL="0">
-              <a:buNone/>
-            </a:pPr>
-            <a:r>
-              <a:rPr lang="en-US" sz="1400" b="1" spc="100" kern="0" dirty="0">
-                <a:solidFill>
-                  <a:srgbClr val="FFFFFF"/>
-                </a:solidFill>
-                <a:latin typeface="Arial" pitchFamily="34" charset="0"/>
-                <a:ea typeface="Arial" pitchFamily="34" charset="-122"/>
-                <a:cs typeface="Arial" pitchFamily="34" charset="-120"/>
-              </a:rPr>
-              <a:t>EXCEL FORMULAS DO WELL</a:t>
-            </a:r>
-            <a:endParaRPr lang="en-US" sz="1400" dirty="0"/>
-          </a:p>
-        </p:txBody>
-      </p:sp>
-      <p:sp>
-        <p:nvSpPr>
-          <p:cNvPr id="8" name="Text 5"/>
-          <p:cNvSpPr/>
-          <p:nvPr/>
-        </p:nvSpPr>
-        <p:spPr>
-          <a:xfrm>
-            <a:off x="914400" y="3063240"/>
-            <a:ext cx="4754880" cy="2834640"/>
-          </a:xfrm>
-          <a:prstGeom prst="rect">
-            <a:avLst/>
-          </a:prstGeom>
-          <a:noFill/>
-          <a:ln/>
-        </p:spPr>
-        <p:txBody>
           <a:bodyPr wrap="square" rtlCol="0" anchor="t"/>
           <a:lstStyle/>
           <a:p>
-            <a:pPr marL="203200" indent="-203200">
+            <a:pPr marL="228600" indent="-228600">
               <a:spcAft>
-                <a:spcPts val="800"/>
+                <a:spcPts val="1100"/>
               </a:spcAft>
               <a:buSzPct val="100000"/>
               <a:buChar char="•"/>
             </a:pPr>
             <a:r>
-              <a:rPr lang="en-US" sz="1400" dirty="0">
-                <a:solidFill>
-                  <a:srgbClr val="1F2120"/>
-                </a:solidFill>
-                <a:latin typeface="Arial" pitchFamily="34" charset="0"/>
-                <a:ea typeface="Arial" pitchFamily="34" charset="-122"/>
-                <a:cs typeface="Arial" pitchFamily="34" charset="-120"/>
-              </a:rPr>
-              <a:t>Single-point what-if (Data Tables)</a:t>
-            </a:r>
-            <a:endParaRPr lang="en-US" sz="1400" dirty="0"/>
-          </a:p>
-          <a:p>
-            <a:pPr marL="203200" indent="-203200">
+              <a:rPr lang="en-US" sz="1600" dirty="0">
+                <a:solidFill>
+                  <a:srgbClr val="707070"/>
+                </a:solidFill>
+                <a:latin typeface="Arial" pitchFamily="34" charset="0"/>
+                <a:ea typeface="Arial" pitchFamily="34" charset="-122"/>
+                <a:cs typeface="Arial" pitchFamily="34" charset="-120"/>
+              </a:rPr>
+              <a:t>xl() pulls the Revenue table straight into a pandas DataFrame.</a:t>
+            </a:r>
+            <a:endParaRPr lang="en-US" sz="1600" dirty="0"/>
+          </a:p>
+          <a:p>
+            <a:pPr marL="228600" indent="-228600">
               <a:spcAft>
-                <a:spcPts val="800"/>
+                <a:spcPts val="1100"/>
               </a:spcAft>
               <a:buSzPct val="100000"/>
               <a:buChar char="•"/>
             </a:pPr>
             <a:r>
-              <a:rPr lang="en-US" sz="1400" dirty="0">
-                <a:solidFill>
-                  <a:srgbClr val="1F2120"/>
-                </a:solidFill>
-                <a:latin typeface="Arial" pitchFamily="34" charset="0"/>
-                <a:ea typeface="Arial" pitchFamily="34" charset="-122"/>
-                <a:cs typeface="Arial" pitchFamily="34" charset="-120"/>
-              </a:rPr>
-              <a:t>A handful of named scenarios</a:t>
-            </a:r>
-            <a:endParaRPr lang="en-US" sz="1400" dirty="0"/>
-          </a:p>
-          <a:p>
-            <a:pPr marL="203200" indent="-203200">
+              <a:rPr lang="en-US" sz="1600" dirty="0">
+                <a:solidFill>
+                  <a:srgbClr val="707070"/>
+                </a:solidFill>
+                <a:latin typeface="Arial" pitchFamily="34" charset="0"/>
+                <a:ea typeface="Arial" pitchFamily="34" charset="-122"/>
+                <a:cs typeface="Arial" pitchFamily="34" charset="-120"/>
+              </a:rPr>
+              <a:t>Convert the date column so Python treats it as real time, not text.</a:t>
+            </a:r>
+            <a:endParaRPr lang="en-US" sz="1600" dirty="0"/>
+          </a:p>
+          <a:p>
+            <a:pPr marL="228600" indent="-228600">
               <a:spcAft>
-                <a:spcPts val="800"/>
+                <a:spcPts val="1100"/>
               </a:spcAft>
               <a:buSzPct val="100000"/>
               <a:buChar char="•"/>
             </a:pPr>
             <a:r>
-              <a:rPr lang="en-US" sz="1400" dirty="0">
-                <a:solidFill>
-                  <a:srgbClr val="1F2120"/>
-                </a:solidFill>
-                <a:latin typeface="Arial" pitchFamily="34" charset="0"/>
-                <a:ea typeface="Arial" pitchFamily="34" charset="-122"/>
-                <a:cs typeface="Arial" pitchFamily="34" charset="-120"/>
-              </a:rPr>
-              <a:t>Straight-line trend / FORECAST</a:t>
-            </a:r>
-            <a:endParaRPr lang="en-US" sz="1400" dirty="0"/>
-          </a:p>
-          <a:p>
-            <a:pPr marL="203200" indent="-203200">
+              <a:rPr lang="en-US" sz="1600" dirty="0">
+                <a:solidFill>
+                  <a:srgbClr val="707070"/>
+                </a:solidFill>
+                <a:latin typeface="Arial" pitchFamily="34" charset="0"/>
+                <a:ea typeface="Arial" pitchFamily="34" charset="-122"/>
+                <a:cs typeface="Arial" pitchFamily="34" charset="-120"/>
+              </a:rPr>
+              <a:t>Set date as the index, now you can resample, shift, and compare by time.</a:t>
+            </a:r>
+            <a:endParaRPr lang="en-US" sz="1600" dirty="0"/>
+          </a:p>
+          <a:p>
+            <a:pPr marL="228600" indent="-228600">
               <a:spcAft>
-                <a:spcPts val="800"/>
+                <a:spcPts val="1100"/>
               </a:spcAft>
               <a:buSzPct val="100000"/>
               <a:buChar char="•"/>
             </a:pPr>
             <a:r>
-              <a:rPr lang="en-US" sz="1400" dirty="0">
-                <a:solidFill>
-                  <a:srgbClr val="1F2120"/>
-                </a:solidFill>
-                <a:latin typeface="Arial" pitchFamily="34" charset="0"/>
-                <a:ea typeface="Arial" pitchFamily="34" charset="-122"/>
-                <a:cs typeface="Arial" pitchFamily="34" charset="-120"/>
-              </a:rPr>
-              <a:t>Fixed, well-understood inputs</a:t>
-            </a:r>
-            <a:endParaRPr lang="en-US" sz="1400" dirty="0"/>
-          </a:p>
-          <a:p>
-            <a:pPr marL="203200" indent="-203200">
-              <a:spcAft>
-                <a:spcPts val="800"/>
-              </a:spcAft>
-              <a:buSzPct val="100000"/>
-              <a:buChar char="•"/>
-            </a:pPr>
-            <a:r>
-              <a:rPr lang="en-US" sz="1400" dirty="0">
-                <a:solidFill>
-                  <a:srgbClr val="1F2120"/>
-                </a:solidFill>
-                <a:latin typeface="Arial" pitchFamily="34" charset="0"/>
-                <a:ea typeface="Arial" pitchFamily="34" charset="-122"/>
-                <a:cs typeface="Arial" pitchFamily="34" charset="-120"/>
-              </a:rPr>
-              <a:t>Live, linked model cells</a:t>
-            </a:r>
-            <a:endParaRPr lang="en-US" sz="1400" dirty="0"/>
-          </a:p>
-        </p:txBody>
-      </p:sp>
-      <p:sp>
-        <p:nvSpPr>
-          <p:cNvPr id="9" name="Shape 6"/>
-          <p:cNvSpPr/>
-          <p:nvPr/>
-        </p:nvSpPr>
-        <p:spPr>
-          <a:xfrm>
-            <a:off x="6263640" y="2331720"/>
-            <a:ext cx="5212080" cy="3749040"/>
+              <a:rPr lang="en-US" sz="1600" dirty="0">
+                <a:solidFill>
+                  <a:srgbClr val="707070"/>
+                </a:solidFill>
+                <a:latin typeface="Arial" pitchFamily="34" charset="0"/>
+                <a:ea typeface="Arial" pitchFamily="34" charset="-122"/>
+                <a:cs typeface="Arial" pitchFamily="34" charset="-120"/>
+              </a:rPr>
+              <a:t>This monthly SaaS revenue rises over six years with a clear yearly rhythm.</a:t>
+            </a:r>
+            <a:endParaRPr lang="en-US" sz="1600" dirty="0"/>
+          </a:p>
+        </p:txBody>
+      </p:sp>
+      <p:sp>
+        <p:nvSpPr>
+          <p:cNvPr id="6" name="Shape 3"/>
+          <p:cNvSpPr/>
+          <p:nvPr/>
+        </p:nvSpPr>
+        <p:spPr>
+          <a:xfrm>
+            <a:off x="7360920" y="2331720"/>
+            <a:ext cx="4160520" cy="3063240"/>
           </a:xfrm>
           <a:prstGeom prst="rect">
             <a:avLst/>
           </a:prstGeom>
           <a:solidFill>
-            <a:srgbClr val="FFFFFF"/>
+            <a:srgbClr val="1F2120"/>
           </a:solidFill>
           <a:ln/>
         </p:spPr>
-      </p:sp>
-      <p:sp>
-        <p:nvSpPr>
-          <p:cNvPr id="10" name="Shape 7"/>
-          <p:cNvSpPr/>
-          <p:nvPr/>
-        </p:nvSpPr>
-        <p:spPr>
-          <a:xfrm>
-            <a:off x="6263640" y="2331720"/>
-            <a:ext cx="5212080" cy="548640"/>
+        <p:txBody>
+          <a:bodyPr/>
+          <a:lstStyle/>
+          <a:p>
+            <a:endParaRPr lang="en-US"/>
+          </a:p>
+        </p:txBody>
+      </p:sp>
+      <p:sp>
+        <p:nvSpPr>
+          <p:cNvPr id="7" name="Shape 4"/>
+          <p:cNvSpPr/>
+          <p:nvPr/>
+        </p:nvSpPr>
+        <p:spPr>
+          <a:xfrm>
+            <a:off x="7360920" y="2331720"/>
+            <a:ext cx="1783080" cy="384048"/>
           </a:xfrm>
           <a:prstGeom prst="rect">
             <a:avLst/>
@@ -9497,17 +9746,24 @@
           </a:solidFill>
           <a:ln/>
         </p:spPr>
-      </p:sp>
-      <p:sp>
-        <p:nvSpPr>
-          <p:cNvPr id="11" name="Text 8"/>
-          <p:cNvSpPr/>
-          <p:nvPr/>
-        </p:nvSpPr>
-        <p:spPr>
-          <a:xfrm>
-            <a:off x="6263640" y="2331720"/>
-            <a:ext cx="5212080" cy="548640"/>
+        <p:txBody>
+          <a:bodyPr/>
+          <a:lstStyle/>
+          <a:p>
+            <a:endParaRPr lang="en-US"/>
+          </a:p>
+        </p:txBody>
+      </p:sp>
+      <p:sp>
+        <p:nvSpPr>
+          <p:cNvPr id="8" name="Text 5"/>
+          <p:cNvSpPr/>
+          <p:nvPr/>
+        </p:nvSpPr>
+        <p:spPr>
+          <a:xfrm>
+            <a:off x="7360920" y="2331720"/>
+            <a:ext cx="1783080" cy="384048"/>
           </a:xfrm>
           <a:prstGeom prst="rect">
             <a:avLst/>
@@ -9519,11 +9775,11 @@
           <a:bodyPr wrap="square" lIns="0" tIns="0" rIns="0" bIns="0" rtlCol="0" anchor="ctr"/>
           <a:lstStyle/>
           <a:p>
-            <a:pPr algn="ctr" indent="0" marL="0">
-              <a:buNone/>
-            </a:pPr>
-            <a:r>
-              <a:rPr lang="en-US" sz="1400" b="1" spc="100" kern="0" dirty="0">
+            <a:pPr marL="0" indent="0" algn="ctr">
+              <a:buNone/>
+            </a:pPr>
+            <a:r>
+              <a:rPr lang="en-US" sz="1150" b="1" kern="0" spc="200" dirty="0">
                 <a:solidFill>
                   <a:srgbClr val="FFFFFF"/>
                 </a:solidFill>
@@ -9531,22 +9787,22 @@
                 <a:ea typeface="Arial" pitchFamily="34" charset="-122"/>
                 <a:cs typeface="Arial" pitchFamily="34" charset="-120"/>
               </a:rPr>
-              <a:t>PYTHON IN EXCEL UNLOCKS</a:t>
-            </a:r>
-            <a:endParaRPr lang="en-US" sz="1400" dirty="0"/>
-          </a:p>
-        </p:txBody>
-      </p:sp>
-      <p:sp>
-        <p:nvSpPr>
-          <p:cNvPr id="12" name="Text 9"/>
-          <p:cNvSpPr/>
-          <p:nvPr/>
-        </p:nvSpPr>
-        <p:spPr>
-          <a:xfrm>
-            <a:off x="6492240" y="3063240"/>
-            <a:ext cx="4754880" cy="2834640"/>
+              <a:t>PY() CELL</a:t>
+            </a:r>
+            <a:endParaRPr lang="en-US" sz="1150" dirty="0"/>
+          </a:p>
+        </p:txBody>
+      </p:sp>
+      <p:sp>
+        <p:nvSpPr>
+          <p:cNvPr id="9" name="Text 6"/>
+          <p:cNvSpPr/>
+          <p:nvPr/>
+        </p:nvSpPr>
+        <p:spPr>
+          <a:xfrm>
+            <a:off x="7616952" y="2862072"/>
+            <a:ext cx="3703320" cy="2377440"/>
           </a:xfrm>
           <a:prstGeom prst="rect">
             <a:avLst/>
@@ -9555,112 +9811,127 @@
           <a:ln/>
         </p:spPr>
         <p:txBody>
-          <a:bodyPr wrap="square" rtlCol="0" anchor="t"/>
-          <a:lstStyle/>
-          <a:p>
-            <a:pPr marL="203200" indent="-203200">
-              <a:spcAft>
-                <a:spcPts val="800"/>
-              </a:spcAft>
-              <a:buSzPct val="100000"/>
-              <a:buChar char="•"/>
-            </a:pPr>
-            <a:r>
-              <a:rPr lang="en-US" sz="1400" dirty="0">
-                <a:solidFill>
-                  <a:srgbClr val="1F2120"/>
-                </a:solidFill>
-                <a:latin typeface="Arial" pitchFamily="34" charset="0"/>
-                <a:ea typeface="Arial" pitchFamily="34" charset="-122"/>
-                <a:cs typeface="Arial" pitchFamily="34" charset="-120"/>
-              </a:rPr>
-              <a:t>Trend + seasonality forecasting</a:t>
-            </a:r>
-            <a:endParaRPr lang="en-US" sz="1400" dirty="0"/>
-          </a:p>
-          <a:p>
-            <a:pPr marL="203200" indent="-203200">
-              <a:spcAft>
-                <a:spcPts val="800"/>
-              </a:spcAft>
-              <a:buSzPct val="100000"/>
-              <a:buChar char="•"/>
-            </a:pPr>
-            <a:r>
-              <a:rPr lang="en-US" sz="1400" dirty="0">
-                <a:solidFill>
-                  <a:srgbClr val="1F2120"/>
-                </a:solidFill>
-                <a:latin typeface="Arial" pitchFamily="34" charset="0"/>
-                <a:ea typeface="Arial" pitchFamily="34" charset="-122"/>
-                <a:cs typeface="Arial" pitchFamily="34" charset="-120"/>
-              </a:rPr>
-              <a:t>Thousands of Monte Carlo trials</a:t>
-            </a:r>
-            <a:endParaRPr lang="en-US" sz="1400" dirty="0"/>
-          </a:p>
-          <a:p>
-            <a:pPr marL="203200" indent="-203200">
-              <a:spcAft>
-                <a:spcPts val="800"/>
-              </a:spcAft>
-              <a:buSzPct val="100000"/>
-              <a:buChar char="•"/>
-            </a:pPr>
-            <a:r>
-              <a:rPr lang="en-US" sz="1400" dirty="0">
-                <a:solidFill>
-                  <a:srgbClr val="1F2120"/>
-                </a:solidFill>
-                <a:latin typeface="Arial" pitchFamily="34" charset="0"/>
-                <a:ea typeface="Arial" pitchFamily="34" charset="-122"/>
-                <a:cs typeface="Arial" pitchFamily="34" charset="-120"/>
-              </a:rPr>
-              <a:t>Full distributions, not one number</a:t>
-            </a:r>
-            <a:endParaRPr lang="en-US" sz="1400" dirty="0"/>
-          </a:p>
-          <a:p>
-            <a:pPr marL="203200" indent="-203200">
-              <a:spcAft>
-                <a:spcPts val="800"/>
-              </a:spcAft>
-              <a:buSzPct val="100000"/>
-              <a:buChar char="•"/>
-            </a:pPr>
-            <a:r>
-              <a:rPr lang="en-US" sz="1400" dirty="0">
-                <a:solidFill>
-                  <a:srgbClr val="1F2120"/>
-                </a:solidFill>
-                <a:latin typeface="Arial" pitchFamily="34" charset="0"/>
-                <a:ea typeface="Arial" pitchFamily="34" charset="-122"/>
-                <a:cs typeface="Arial" pitchFamily="34" charset="-120"/>
-              </a:rPr>
-              <a:t>Decomposition &amp; diagnostics</a:t>
-            </a:r>
-            <a:endParaRPr lang="en-US" sz="1400" dirty="0"/>
-          </a:p>
-          <a:p>
-            <a:pPr marL="203200" indent="-203200">
-              <a:spcAft>
-                <a:spcPts val="800"/>
-              </a:spcAft>
-              <a:buSzPct val="100000"/>
-              <a:buChar char="•"/>
-            </a:pPr>
-            <a:r>
-              <a:rPr lang="en-US" sz="1400" dirty="0">
-                <a:solidFill>
-                  <a:srgbClr val="1F2120"/>
-                </a:solidFill>
-                <a:latin typeface="Arial" pitchFamily="34" charset="0"/>
-                <a:ea typeface="Arial" pitchFamily="34" charset="-122"/>
-                <a:cs typeface="Arial" pitchFamily="34" charset="-120"/>
-              </a:rPr>
-              <a:t>Repeatable, seeded, auditable code</a:t>
-            </a:r>
-            <a:endParaRPr lang="en-US" sz="1400" dirty="0"/>
+          <a:bodyPr wrap="square" lIns="0" tIns="0" rIns="0" bIns="0" rtlCol="0" anchor="t"/>
+          <a:lstStyle/>
+          <a:p>
+            <a:pPr marL="0" indent="0">
+              <a:lnSpc>
+                <a:spcPct val="106000"/>
+              </a:lnSpc>
+              <a:buNone/>
+            </a:pPr>
+            <a:r>
+              <a:rPr lang="en-US" sz="1250" dirty="0">
+                <a:solidFill>
+                  <a:srgbClr val="E9E6DC"/>
+                </a:solidFill>
+                <a:latin typeface="Consolas" pitchFamily="34" charset="0"/>
+                <a:ea typeface="Consolas" pitchFamily="34" charset="-122"/>
+                <a:cs typeface="Consolas" pitchFamily="34" charset="-120"/>
+              </a:rPr>
+              <a:t>df = xl("revenue[#All]",</a:t>
+            </a:r>
+            <a:endParaRPr lang="en-US" sz="1250" dirty="0"/>
+          </a:p>
+          <a:p>
+            <a:pPr marL="0" indent="0">
+              <a:lnSpc>
+                <a:spcPct val="106000"/>
+              </a:lnSpc>
+              <a:buNone/>
+            </a:pPr>
+            <a:r>
+              <a:rPr lang="en-US" sz="1250" dirty="0">
+                <a:solidFill>
+                  <a:srgbClr val="E9E6DC"/>
+                </a:solidFill>
+                <a:latin typeface="Consolas" pitchFamily="34" charset="0"/>
+                <a:ea typeface="Consolas" pitchFamily="34" charset="-122"/>
+                <a:cs typeface="Consolas" pitchFamily="34" charset="-120"/>
+              </a:rPr>
+              <a:t>        headers=True)</a:t>
+            </a:r>
+            <a:endParaRPr lang="en-US" sz="1250" dirty="0"/>
+          </a:p>
+          <a:p>
+            <a:pPr marL="0" indent="0">
+              <a:lnSpc>
+                <a:spcPct val="106000"/>
+              </a:lnSpc>
+              <a:buNone/>
+            </a:pPr>
+            <a:r>
+              <a:rPr lang="en-US" sz="1250" dirty="0">
+                <a:solidFill>
+                  <a:srgbClr val="E9E6DC"/>
+                </a:solidFill>
+                <a:latin typeface="Consolas" pitchFamily="34" charset="0"/>
+                <a:ea typeface="Consolas" pitchFamily="34" charset="-122"/>
+                <a:cs typeface="Consolas" pitchFamily="34" charset="-120"/>
+              </a:rPr>
+              <a:t>df['date'] = pd.to_datetime(</a:t>
+            </a:r>
+            <a:endParaRPr lang="en-US" sz="1250" dirty="0"/>
+          </a:p>
+          <a:p>
+            <a:pPr marL="0" indent="0">
+              <a:lnSpc>
+                <a:spcPct val="106000"/>
+              </a:lnSpc>
+              <a:buNone/>
+            </a:pPr>
+            <a:r>
+              <a:rPr lang="en-US" sz="1250" dirty="0">
+                <a:solidFill>
+                  <a:srgbClr val="E9E6DC"/>
+                </a:solidFill>
+                <a:latin typeface="Consolas" pitchFamily="34" charset="0"/>
+                <a:ea typeface="Consolas" pitchFamily="34" charset="-122"/>
+                <a:cs typeface="Consolas" pitchFamily="34" charset="-120"/>
+              </a:rPr>
+              <a:t>    df['date'])</a:t>
+            </a:r>
+            <a:endParaRPr lang="en-US" sz="1250" dirty="0"/>
+          </a:p>
+          <a:p>
+            <a:pPr marL="0" indent="0">
+              <a:lnSpc>
+                <a:spcPct val="106000"/>
+              </a:lnSpc>
+              <a:buNone/>
+            </a:pPr>
+            <a:r>
+              <a:rPr lang="en-US" sz="1250" dirty="0">
+                <a:solidFill>
+                  <a:srgbClr val="E9E6DC"/>
+                </a:solidFill>
+                <a:latin typeface="Consolas" pitchFamily="34" charset="0"/>
+                <a:ea typeface="Consolas" pitchFamily="34" charset="-122"/>
+                <a:cs typeface="Consolas" pitchFamily="34" charset="-120"/>
+              </a:rPr>
+              <a:t>df = df.set_index('date')</a:t>
+            </a:r>
+            <a:endParaRPr lang="en-US" sz="1250" dirty="0"/>
+          </a:p>
+          <a:p>
+            <a:pPr marL="0" indent="0">
+              <a:lnSpc>
+                <a:spcPct val="106000"/>
+              </a:lnSpc>
+              <a:buNone/>
+            </a:pPr>
+            <a:r>
+              <a:rPr lang="en-US" sz="1250" dirty="0">
+                <a:solidFill>
+                  <a:srgbClr val="E9E6DC"/>
+                </a:solidFill>
+                <a:latin typeface="Consolas" pitchFamily="34" charset="0"/>
+                <a:ea typeface="Consolas" pitchFamily="34" charset="-122"/>
+                <a:cs typeface="Consolas" pitchFamily="34" charset="-120"/>
+              </a:rPr>
+              <a:t>df.head()</a:t>
+            </a:r>
+            <a:endParaRPr lang="en-US" sz="1250" dirty="0"/>
           </a:p>
         </p:txBody>
       </p:sp>
@@ -9672,163 +9943,15 @@
 </p:sld>
 </file>
 
-<file path=ppt/slides/slide6.xml><?xml version="1.0" encoding="utf-8"?>
+<file path=ppt/slides/slide8.xml><?xml version="1.0" encoding="utf-8"?>
 <p:sld xmlns:a="http://schemas.openxmlformats.org/drawingml/2006/main" xmlns:r="http://schemas.openxmlformats.org/officeDocument/2006/relationships" xmlns:p="http://schemas.openxmlformats.org/presentationml/2006/main">
-  <p:cSld name="Slide 6">
-    <p:bg>
-      <p:bgPr>
-        <a:solidFill>
-          <a:srgbClr val="C00000"/>
-        </a:solidFill>
-      </p:bgPr>
-    </p:bg>
-    <p:spTree>
-      <p:nvGrpSpPr>
-        <p:cNvPr id="1" name=""/>
-        <p:cNvGrpSpPr/>
-        <p:nvPr/>
-      </p:nvGrpSpPr>
-      <p:grpSpPr>
-        <a:xfrm>
-          <a:off x="0" y="0"/>
-          <a:ext cx="0" cy="0"/>
-          <a:chOff x="0" y="0"/>
-          <a:chExt cx="0" cy="0"/>
-        </a:xfrm>
-      </p:grpSpPr>
-      <p:sp>
-        <p:nvSpPr>
-          <p:cNvPr id="2" name="Text 0"/>
-          <p:cNvSpPr/>
-          <p:nvPr/>
-        </p:nvSpPr>
-        <p:spPr>
-          <a:xfrm>
-            <a:off x="822960" y="2148840"/>
-            <a:ext cx="10515600" cy="457200"/>
-          </a:xfrm>
-          <a:prstGeom prst="rect">
-            <a:avLst/>
-          </a:prstGeom>
-          <a:noFill/>
-          <a:ln/>
-        </p:spPr>
-        <p:txBody>
-          <a:bodyPr wrap="square" lIns="0" tIns="0" rIns="0" bIns="0" rtlCol="0" anchor="ctr"/>
-          <a:lstStyle/>
-          <a:p>
-            <a:pPr indent="0" marL="0">
-              <a:buNone/>
-            </a:pPr>
-            <a:r>
-              <a:rPr lang="en-US" sz="1500" b="1" spc="300" kern="0" dirty="0">
-                <a:solidFill>
-                  <a:srgbClr val="F3C9CA"/>
-                </a:solidFill>
-                <a:latin typeface="Arial" pitchFamily="34" charset="0"/>
-                <a:ea typeface="Arial" pitchFamily="34" charset="-122"/>
-                <a:cs typeface="Arial" pitchFamily="34" charset="-120"/>
-              </a:rPr>
-              <a:t>PART 1 OF 2</a:t>
-            </a:r>
-            <a:endParaRPr lang="en-US" sz="1500" dirty="0"/>
-          </a:p>
-        </p:txBody>
-      </p:sp>
-      <p:sp>
-        <p:nvSpPr>
-          <p:cNvPr id="3" name="Text 1"/>
-          <p:cNvSpPr/>
-          <p:nvPr/>
-        </p:nvSpPr>
-        <p:spPr>
-          <a:xfrm>
-            <a:off x="822960" y="2606040"/>
-            <a:ext cx="10515600" cy="1097280"/>
-          </a:xfrm>
-          <a:prstGeom prst="rect">
-            <a:avLst/>
-          </a:prstGeom>
-          <a:noFill/>
-          <a:ln/>
-        </p:spPr>
-        <p:txBody>
-          <a:bodyPr wrap="square" lIns="0" tIns="0" rIns="0" bIns="0" rtlCol="0" anchor="ctr"/>
-          <a:lstStyle/>
-          <a:p>
-            <a:pPr indent="0" marL="0">
-              <a:buNone/>
-            </a:pPr>
-            <a:r>
-              <a:rPr lang="en-US" sz="3800" dirty="0">
-                <a:solidFill>
-                  <a:srgbClr val="FFFFFF"/>
-                </a:solidFill>
-                <a:latin typeface="Arial Black" pitchFamily="34" charset="0"/>
-                <a:ea typeface="Arial Black" pitchFamily="34" charset="-122"/>
-                <a:cs typeface="Arial Black" pitchFamily="34" charset="-120"/>
-              </a:rPr>
-              <a:t>Forecasting revenue</a:t>
-            </a:r>
-            <a:endParaRPr lang="en-US" sz="3800" dirty="0"/>
-          </a:p>
-        </p:txBody>
-      </p:sp>
-      <p:sp>
-        <p:nvSpPr>
-          <p:cNvPr id="4" name="Text 2"/>
-          <p:cNvSpPr/>
-          <p:nvPr/>
-        </p:nvSpPr>
-        <p:spPr>
-          <a:xfrm>
-            <a:off x="868680" y="3794760"/>
-            <a:ext cx="10058400" cy="640080"/>
-          </a:xfrm>
-          <a:prstGeom prst="rect">
-            <a:avLst/>
-          </a:prstGeom>
-          <a:noFill/>
-          <a:ln/>
-        </p:spPr>
-        <p:txBody>
-          <a:bodyPr wrap="square" lIns="0" tIns="0" rIns="0" bIns="0" rtlCol="0" anchor="ctr"/>
-          <a:lstStyle/>
-          <a:p>
-            <a:pPr indent="0" marL="0">
-              <a:buNone/>
-            </a:pPr>
-            <a:r>
-              <a:rPr lang="en-US" sz="1800" dirty="0">
-                <a:solidFill>
-                  <a:srgbClr val="F3C9CA"/>
-                </a:solidFill>
-                <a:latin typeface="Arial" pitchFamily="34" charset="0"/>
-                <a:ea typeface="Arial" pitchFamily="34" charset="-122"/>
-                <a:cs typeface="Arial" pitchFamily="34" charset="-120"/>
-              </a:rPr>
-              <a:t>Resample · smooth · decompose · Holt-Winters · evaluate</a:t>
-            </a:r>
-            <a:endParaRPr lang="en-US" sz="1800" dirty="0"/>
-          </a:p>
-        </p:txBody>
-      </p:sp>
-    </p:spTree>
-  </p:cSld>
-  <p:clrMapOvr>
-    <a:masterClrMapping/>
-  </p:clrMapOvr>
-</p:sld>
-</file>
-
-<file path=ppt/slides/slide7.xml><?xml version="1.0" encoding="utf-8"?>
-<p:sld xmlns:a="http://schemas.openxmlformats.org/drawingml/2006/main" xmlns:r="http://schemas.openxmlformats.org/officeDocument/2006/relationships" xmlns:p="http://schemas.openxmlformats.org/presentationml/2006/main">
-  <p:cSld name="Slide 7">
+  <p:cSld name="Slide 8">
     <p:bg>
       <p:bgPr>
         <a:solidFill>
           <a:srgbClr val="EEECE1"/>
         </a:solidFill>
+        <a:effectLst/>
       </p:bgPr>
     </p:bg>
     <p:spTree>
@@ -9847,14 +9970,14 @@
       </p:grpSpPr>
       <p:pic>
         <p:nvPicPr>
-          <p:cNvPr id="2" name="Image 0" descr="assets/stringfest-logo-dark.png">    </p:cNvPr>
+          <p:cNvPr id="2" name="Image 0" descr="assets/stringfest-logo-dark.png"/>
           <p:cNvPicPr>
             <a:picLocks noChangeAspect="1"/>
           </p:cNvPicPr>
           <p:nvPr/>
         </p:nvPicPr>
         <p:blipFill>
-          <a:blip r:embed="rId1"/>
+          <a:blip r:embed="rId3"/>
           <a:srcRect l="9716" t="36914" r="6931" b="47496"/>
           <a:stretch>
             <a:fillRect/>
@@ -9891,11 +10014,11 @@
           <a:bodyPr wrap="square" lIns="0" tIns="0" rIns="0" bIns="0" rtlCol="0" anchor="ctr"/>
           <a:lstStyle/>
           <a:p>
-            <a:pPr indent="0" marL="0">
-              <a:buNone/>
-            </a:pPr>
-            <a:r>
-              <a:rPr lang="en-US" sz="1300" b="1" spc="300" kern="0" dirty="0">
+            <a:pPr marL="0" indent="0">
+              <a:buNone/>
+            </a:pPr>
+            <a:r>
+              <a:rPr lang="en-US" sz="1300" b="1" kern="0" spc="300" dirty="0">
                 <a:solidFill>
                   <a:srgbClr val="CF3338"/>
                 </a:solidFill>
@@ -9903,7 +10026,7 @@
                 <a:ea typeface="Arial" pitchFamily="34" charset="-122"/>
                 <a:cs typeface="Arial" pitchFamily="34" charset="-120"/>
               </a:rPr>
-              <a:t>STEP 1, UNDERSTAND THE SERIES</a:t>
+              <a:t>STEP 2, REDUCE THE NOISE</a:t>
             </a:r>
             <a:endParaRPr lang="en-US" sz="1300" dirty="0"/>
           </a:p>
@@ -9930,7 +10053,7 @@
           <a:bodyPr wrap="square" lIns="0" tIns="0" rIns="0" bIns="0" rtlCol="0" anchor="ctr"/>
           <a:lstStyle/>
           <a:p>
-            <a:pPr indent="0" marL="0">
+            <a:pPr marL="0" indent="0">
               <a:buNone/>
             </a:pPr>
             <a:r>
@@ -9942,22 +10065,46 @@
                 <a:ea typeface="Arial Black" pitchFamily="34" charset="-122"/>
                 <a:cs typeface="Arial Black" pitchFamily="34" charset="-120"/>
               </a:rPr>
-              <a:t>Load revenue and index it by time</a:t>
+              <a:t>Resample and smooth to see the trend</a:t>
             </a:r>
             <a:endParaRPr lang="en-US" sz="3000" dirty="0"/>
           </a:p>
         </p:txBody>
       </p:sp>
-      <p:sp>
-        <p:nvSpPr>
-          <p:cNvPr id="5" name="Text 2"/>
-          <p:cNvSpPr/>
-          <p:nvPr/>
-        </p:nvSpPr>
-        <p:spPr>
-          <a:xfrm>
-            <a:off x="685800" y="2331720"/>
-            <a:ext cx="6400800" cy="3840480"/>
+      <p:pic>
+        <p:nvPicPr>
+          <p:cNvPr id="5" name="Image 1" descr="chart_rolling.png"/>
+          <p:cNvPicPr>
+            <a:picLocks noChangeAspect="1"/>
+          </p:cNvPicPr>
+          <p:nvPr/>
+        </p:nvPicPr>
+        <p:blipFill>
+          <a:blip r:embed="rId4"/>
+          <a:stretch>
+            <a:fillRect/>
+          </a:stretch>
+        </p:blipFill>
+        <p:spPr>
+          <a:xfrm>
+            <a:off x="6309360" y="2148840"/>
+            <a:ext cx="5394960" cy="2624328"/>
+          </a:xfrm>
+          <a:prstGeom prst="rect">
+            <a:avLst/>
+          </a:prstGeom>
+        </p:spPr>
+      </p:pic>
+      <p:sp>
+        <p:nvSpPr>
+          <p:cNvPr id="6" name="Text 2"/>
+          <p:cNvSpPr/>
+          <p:nvPr/>
+        </p:nvSpPr>
+        <p:spPr>
+          <a:xfrm>
+            <a:off x="685800" y="2286000"/>
+            <a:ext cx="5394960" cy="2377440"/>
           </a:xfrm>
           <a:prstGeom prst="rect">
             <a:avLst/>
@@ -9969,15 +10116,15 @@
           <a:bodyPr wrap="square" rtlCol="0" anchor="t"/>
           <a:lstStyle/>
           <a:p>
-            <a:pPr marL="228600" indent="-228600">
+            <a:pPr marL="203200" indent="-203200">
               <a:spcAft>
-                <a:spcPts val="1100"/>
+                <a:spcPts val="900"/>
               </a:spcAft>
               <a:buSzPct val="100000"/>
               <a:buChar char="•"/>
             </a:pPr>
             <a:r>
-              <a:rPr lang="en-US" sz="1600" dirty="0">
+              <a:rPr lang="en-US" sz="1450" dirty="0">
                 <a:solidFill>
                   <a:srgbClr val="707070"/>
                 </a:solidFill>
@@ -9985,20 +10132,20 @@
                 <a:ea typeface="Arial" pitchFamily="34" charset="-122"/>
                 <a:cs typeface="Arial" pitchFamily="34" charset="-120"/>
               </a:rPr>
-              <a:t>xl() pulls the Revenue table straight into a pandas DataFrame.</a:t>
-            </a:r>
-            <a:endParaRPr lang="en-US" sz="1600" dirty="0"/>
-          </a:p>
-          <a:p>
-            <a:pPr marL="228600" indent="-228600">
+              <a:t>resample('QE').mean() rolls months into quarters.</a:t>
+            </a:r>
+            <a:endParaRPr lang="en-US" sz="1450" dirty="0"/>
+          </a:p>
+          <a:p>
+            <a:pPr marL="203200" indent="-203200">
               <a:spcAft>
-                <a:spcPts val="1100"/>
+                <a:spcPts val="900"/>
               </a:spcAft>
               <a:buSzPct val="100000"/>
               <a:buChar char="•"/>
             </a:pPr>
             <a:r>
-              <a:rPr lang="en-US" sz="1600" dirty="0">
+              <a:rPr lang="en-US" sz="1450" dirty="0">
                 <a:solidFill>
                   <a:srgbClr val="707070"/>
                 </a:solidFill>
@@ -10006,20 +10153,17 @@
                 <a:ea typeface="Arial" pitchFamily="34" charset="-122"/>
                 <a:cs typeface="Arial" pitchFamily="34" charset="-120"/>
               </a:rPr>
-              <a:t>Convert the date column so Python treats it as real time, not text.</a:t>
-            </a:r>
-            <a:endParaRPr lang="en-US" sz="1600" dirty="0"/>
-          </a:p>
-          <a:p>
-            <a:pPr marL="228600" indent="-228600">
-              <a:spcAft>
-                <a:spcPts val="1100"/>
-              </a:spcAft>
+              <a:t>rolling(window=12).mean() is the moving average you know, over a full year it cancels the seasonal swing.</a:t>
+            </a:r>
+            <a:endParaRPr lang="en-US" sz="1450" dirty="0"/>
+          </a:p>
+          <a:p>
+            <a:pPr marL="203200" indent="-203200">
               <a:buSzPct val="100000"/>
               <a:buChar char="•"/>
             </a:pPr>
             <a:r>
-              <a:rPr lang="en-US" sz="1600" dirty="0">
+              <a:rPr lang="en-US" sz="1450" dirty="0">
                 <a:solidFill>
                   <a:srgbClr val="707070"/>
                 </a:solidFill>
@@ -10027,43 +10171,22 @@
                 <a:ea typeface="Arial" pitchFamily="34" charset="-122"/>
                 <a:cs typeface="Arial" pitchFamily="34" charset="-120"/>
               </a:rPr>
-              <a:t>Set date as the index, now you can resample, shift, and compare by time.</a:t>
-            </a:r>
-            <a:endParaRPr lang="en-US" sz="1600" dirty="0"/>
-          </a:p>
-          <a:p>
-            <a:pPr marL="228600" indent="-228600">
-              <a:spcAft>
-                <a:spcPts val="1100"/>
-              </a:spcAft>
-              <a:buSzPct val="100000"/>
-              <a:buChar char="•"/>
-            </a:pPr>
-            <a:r>
-              <a:rPr lang="en-US" sz="1600" dirty="0">
-                <a:solidFill>
-                  <a:srgbClr val="707070"/>
-                </a:solidFill>
-                <a:latin typeface="Arial" pitchFamily="34" charset="0"/>
-                <a:ea typeface="Arial" pitchFamily="34" charset="-122"/>
-                <a:cs typeface="Arial" pitchFamily="34" charset="-120"/>
-              </a:rPr>
-              <a:t>This monthly SaaS revenue rises over six years with a clear yearly rhythm.</a:t>
-            </a:r>
-            <a:endParaRPr lang="en-US" sz="1600" dirty="0"/>
-          </a:p>
-        </p:txBody>
-      </p:sp>
-      <p:sp>
-        <p:nvSpPr>
-          <p:cNvPr id="6" name="Shape 3"/>
-          <p:cNvSpPr/>
-          <p:nvPr/>
-        </p:nvSpPr>
-        <p:spPr>
-          <a:xfrm>
-            <a:off x="7360920" y="2331720"/>
-            <a:ext cx="4160520" cy="3063240"/>
+              <a:t>The red line makes the underlying growth unmistakable.</a:t>
+            </a:r>
+            <a:endParaRPr lang="en-US" sz="1450" dirty="0"/>
+          </a:p>
+        </p:txBody>
+      </p:sp>
+      <p:sp>
+        <p:nvSpPr>
+          <p:cNvPr id="7" name="Shape 3"/>
+          <p:cNvSpPr/>
+          <p:nvPr/>
+        </p:nvSpPr>
+        <p:spPr>
+          <a:xfrm>
+            <a:off x="685800" y="4892040"/>
+            <a:ext cx="10835640" cy="1417320"/>
           </a:xfrm>
           <a:prstGeom prst="rect">
             <a:avLst/>
@@ -10073,16 +10196,23 @@
           </a:solidFill>
           <a:ln/>
         </p:spPr>
-      </p:sp>
-      <p:sp>
-        <p:nvSpPr>
-          <p:cNvPr id="7" name="Shape 4"/>
-          <p:cNvSpPr/>
-          <p:nvPr/>
-        </p:nvSpPr>
-        <p:spPr>
-          <a:xfrm>
-            <a:off x="7360920" y="2331720"/>
+        <p:txBody>
+          <a:bodyPr/>
+          <a:lstStyle/>
+          <a:p>
+            <a:endParaRPr lang="en-US"/>
+          </a:p>
+        </p:txBody>
+      </p:sp>
+      <p:sp>
+        <p:nvSpPr>
+          <p:cNvPr id="8" name="Shape 4"/>
+          <p:cNvSpPr/>
+          <p:nvPr/>
+        </p:nvSpPr>
+        <p:spPr>
+          <a:xfrm>
+            <a:off x="685800" y="4892040"/>
             <a:ext cx="1783080" cy="384048"/>
           </a:xfrm>
           <a:prstGeom prst="rect">
@@ -10093,16 +10223,23 @@
           </a:solidFill>
           <a:ln/>
         </p:spPr>
-      </p:sp>
-      <p:sp>
-        <p:nvSpPr>
-          <p:cNvPr id="8" name="Text 5"/>
-          <p:cNvSpPr/>
-          <p:nvPr/>
-        </p:nvSpPr>
-        <p:spPr>
-          <a:xfrm>
-            <a:off x="7360920" y="2331720"/>
+        <p:txBody>
+          <a:bodyPr/>
+          <a:lstStyle/>
+          <a:p>
+            <a:endParaRPr lang="en-US"/>
+          </a:p>
+        </p:txBody>
+      </p:sp>
+      <p:sp>
+        <p:nvSpPr>
+          <p:cNvPr id="9" name="Text 5"/>
+          <p:cNvSpPr/>
+          <p:nvPr/>
+        </p:nvSpPr>
+        <p:spPr>
+          <a:xfrm>
+            <a:off x="685800" y="4892040"/>
             <a:ext cx="1783080" cy="384048"/>
           </a:xfrm>
           <a:prstGeom prst="rect">
@@ -10115,11 +10252,11 @@
           <a:bodyPr wrap="square" lIns="0" tIns="0" rIns="0" bIns="0" rtlCol="0" anchor="ctr"/>
           <a:lstStyle/>
           <a:p>
-            <a:pPr algn="ctr" indent="0" marL="0">
-              <a:buNone/>
-            </a:pPr>
-            <a:r>
-              <a:rPr lang="en-US" sz="1150" b="1" spc="200" kern="0" dirty="0">
+            <a:pPr marL="0" indent="0" algn="ctr">
+              <a:buNone/>
+            </a:pPr>
+            <a:r>
+              <a:rPr lang="en-US" sz="1150" b="1" kern="0" spc="200" dirty="0">
                 <a:solidFill>
                   <a:srgbClr val="FFFFFF"/>
                 </a:solidFill>
@@ -10135,14 +10272,14 @@
       </p:sp>
       <p:sp>
         <p:nvSpPr>
-          <p:cNvPr id="9" name="Text 6"/>
-          <p:cNvSpPr/>
-          <p:nvPr/>
-        </p:nvSpPr>
-        <p:spPr>
-          <a:xfrm>
-            <a:off x="7616952" y="2862072"/>
-            <a:ext cx="3703320" cy="2377440"/>
+          <p:cNvPr id="10" name="Text 6"/>
+          <p:cNvSpPr/>
+          <p:nvPr/>
+        </p:nvSpPr>
+        <p:spPr>
+          <a:xfrm>
+            <a:off x="941832" y="5422392"/>
+            <a:ext cx="10378440" cy="731520"/>
           </a:xfrm>
           <a:prstGeom prst="rect">
             <a:avLst/>
@@ -10154,7 +10291,7 @@
           <a:bodyPr wrap="square" lIns="0" tIns="0" rIns="0" bIns="0" rtlCol="0" anchor="t"/>
           <a:lstStyle/>
           <a:p>
-            <a:pPr indent="0" marL="0">
+            <a:pPr marL="0" indent="0">
               <a:lnSpc>
                 <a:spcPct val="106000"/>
               </a:lnSpc>
@@ -10169,12 +10306,12 @@
                 <a:ea typeface="Consolas" pitchFamily="34" charset="-122"/>
                 <a:cs typeface="Consolas" pitchFamily="34" charset="-120"/>
               </a:rPr>
-              <a:t>df = xl("revenue[#All]",</a:t>
+              <a:t>quarterly = df.resample('QE').mean()</a:t>
             </a:r>
             <a:endParaRPr lang="en-US" sz="1250" dirty="0"/>
           </a:p>
           <a:p>
-            <a:pPr indent="0" marL="0">
+            <a:pPr marL="0" indent="0">
               <a:lnSpc>
                 <a:spcPct val="106000"/>
               </a:lnSpc>
@@ -10189,87 +10326,7 @@
                 <a:ea typeface="Consolas" pitchFamily="34" charset="-122"/>
                 <a:cs typeface="Consolas" pitchFamily="34" charset="-120"/>
               </a:rPr>
-              <a:t>        headers=True)</a:t>
-            </a:r>
-            <a:endParaRPr lang="en-US" sz="1250" dirty="0"/>
-          </a:p>
-          <a:p>
-            <a:pPr indent="0" marL="0">
-              <a:lnSpc>
-                <a:spcPct val="106000"/>
-              </a:lnSpc>
-              <a:buNone/>
-            </a:pPr>
-            <a:r>
-              <a:rPr lang="en-US" sz="1250" dirty="0">
-                <a:solidFill>
-                  <a:srgbClr val="E9E6DC"/>
-                </a:solidFill>
-                <a:latin typeface="Consolas" pitchFamily="34" charset="0"/>
-                <a:ea typeface="Consolas" pitchFamily="34" charset="-122"/>
-                <a:cs typeface="Consolas" pitchFamily="34" charset="-120"/>
-              </a:rPr>
-              <a:t>df['date'] = pd.to_datetime(</a:t>
-            </a:r>
-            <a:endParaRPr lang="en-US" sz="1250" dirty="0"/>
-          </a:p>
-          <a:p>
-            <a:pPr indent="0" marL="0">
-              <a:lnSpc>
-                <a:spcPct val="106000"/>
-              </a:lnSpc>
-              <a:buNone/>
-            </a:pPr>
-            <a:r>
-              <a:rPr lang="en-US" sz="1250" dirty="0">
-                <a:solidFill>
-                  <a:srgbClr val="E9E6DC"/>
-                </a:solidFill>
-                <a:latin typeface="Consolas" pitchFamily="34" charset="0"/>
-                <a:ea typeface="Consolas" pitchFamily="34" charset="-122"/>
-                <a:cs typeface="Consolas" pitchFamily="34" charset="-120"/>
-              </a:rPr>
-              <a:t>    df['date'])</a:t>
-            </a:r>
-            <a:endParaRPr lang="en-US" sz="1250" dirty="0"/>
-          </a:p>
-          <a:p>
-            <a:pPr indent="0" marL="0">
-              <a:lnSpc>
-                <a:spcPct val="106000"/>
-              </a:lnSpc>
-              <a:buNone/>
-            </a:pPr>
-            <a:r>
-              <a:rPr lang="en-US" sz="1250" dirty="0">
-                <a:solidFill>
-                  <a:srgbClr val="E9E6DC"/>
-                </a:solidFill>
-                <a:latin typeface="Consolas" pitchFamily="34" charset="0"/>
-                <a:ea typeface="Consolas" pitchFamily="34" charset="-122"/>
-                <a:cs typeface="Consolas" pitchFamily="34" charset="-120"/>
-              </a:rPr>
-              <a:t>df = df.set_index('date')</a:t>
-            </a:r>
-            <a:endParaRPr lang="en-US" sz="1250" dirty="0"/>
-          </a:p>
-          <a:p>
-            <a:pPr indent="0" marL="0">
-              <a:lnSpc>
-                <a:spcPct val="106000"/>
-              </a:lnSpc>
-              <a:buNone/>
-            </a:pPr>
-            <a:r>
-              <a:rPr lang="en-US" sz="1250" dirty="0">
-                <a:solidFill>
-                  <a:srgbClr val="E9E6DC"/>
-                </a:solidFill>
-                <a:latin typeface="Consolas" pitchFamily="34" charset="0"/>
-                <a:ea typeface="Consolas" pitchFamily="34" charset="-122"/>
-                <a:cs typeface="Consolas" pitchFamily="34" charset="-120"/>
-              </a:rPr>
-              <a:t>df.head()</a:t>
+              <a:t>df['rolling'] = df['revenue'].rolling(window=12).mean()</a:t>
             </a:r>
             <a:endParaRPr lang="en-US" sz="1250" dirty="0"/>
           </a:p>
@@ -10283,14 +10340,15 @@
 </p:sld>
 </file>
 
-<file path=ppt/slides/slide8.xml><?xml version="1.0" encoding="utf-8"?>
+<file path=ppt/slides/slide9.xml><?xml version="1.0" encoding="utf-8"?>
 <p:sld xmlns:a="http://schemas.openxmlformats.org/drawingml/2006/main" xmlns:r="http://schemas.openxmlformats.org/officeDocument/2006/relationships" xmlns:p="http://schemas.openxmlformats.org/presentationml/2006/main">
-  <p:cSld name="Slide 8">
+  <p:cSld name="Slide 9">
     <p:bg>
       <p:bgPr>
         <a:solidFill>
           <a:srgbClr val="EEECE1"/>
         </a:solidFill>
+        <a:effectLst/>
       </p:bgPr>
     </p:bg>
     <p:spTree>
@@ -10309,14 +10367,14 @@
       </p:grpSpPr>
       <p:pic>
         <p:nvPicPr>
-          <p:cNvPr id="2" name="Image 0" descr="assets/stringfest-logo-dark.png">    </p:cNvPr>
+          <p:cNvPr id="2" name="Image 0" descr="assets/stringfest-logo-dark.png"/>
           <p:cNvPicPr>
             <a:picLocks noChangeAspect="1"/>
           </p:cNvPicPr>
           <p:nvPr/>
         </p:nvPicPr>
         <p:blipFill>
-          <a:blip r:embed="rId1"/>
+          <a:blip r:embed="rId3"/>
           <a:srcRect l="9716" t="36914" r="6931" b="47496"/>
           <a:stretch>
             <a:fillRect/>
@@ -10353,11 +10411,11 @@
           <a:bodyPr wrap="square" lIns="0" tIns="0" rIns="0" bIns="0" rtlCol="0" anchor="ctr"/>
           <a:lstStyle/>
           <a:p>
-            <a:pPr indent="0" marL="0">
-              <a:buNone/>
-            </a:pPr>
-            <a:r>
-              <a:rPr lang="en-US" sz="1300" b="1" spc="300" kern="0" dirty="0">
+            <a:pPr marL="0" indent="0">
+              <a:buNone/>
+            </a:pPr>
+            <a:r>
+              <a:rPr lang="en-US" sz="1300" b="1" kern="0" spc="300" dirty="0">
                 <a:solidFill>
                   <a:srgbClr val="CF3338"/>
                 </a:solidFill>
@@ -10365,7 +10423,7 @@
                 <a:ea typeface="Arial" pitchFamily="34" charset="-122"/>
                 <a:cs typeface="Arial" pitchFamily="34" charset="-120"/>
               </a:rPr>
-              <a:t>STEP 2, REDUCE THE NOISE</a:t>
+              <a:t>STEP 3, SEPARATE THE PIECES</a:t>
             </a:r>
             <a:endParaRPr lang="en-US" sz="1300" dirty="0"/>
           </a:p>
@@ -10392,389 +10450,7 @@
           <a:bodyPr wrap="square" lIns="0" tIns="0" rIns="0" bIns="0" rtlCol="0" anchor="ctr"/>
           <a:lstStyle/>
           <a:p>
-            <a:pPr indent="0" marL="0">
-              <a:buNone/>
-            </a:pPr>
-            <a:r>
-              <a:rPr lang="en-US" sz="3000" dirty="0">
-                <a:solidFill>
-                  <a:srgbClr val="1F2120"/>
-                </a:solidFill>
-                <a:latin typeface="Arial Black" pitchFamily="34" charset="0"/>
-                <a:ea typeface="Arial Black" pitchFamily="34" charset="-122"/>
-                <a:cs typeface="Arial Black" pitchFamily="34" charset="-120"/>
-              </a:rPr>
-              <a:t>Resample and smooth to see the trend</a:t>
-            </a:r>
-            <a:endParaRPr lang="en-US" sz="3000" dirty="0"/>
-          </a:p>
-        </p:txBody>
-      </p:sp>
-      <p:pic>
-        <p:nvPicPr>
-          <p:cNvPr id="5" name="Image 1" descr="chart_rolling.png">    </p:cNvPr>
-          <p:cNvPicPr>
-            <a:picLocks noChangeAspect="1"/>
-          </p:cNvPicPr>
-          <p:nvPr/>
-        </p:nvPicPr>
-        <p:blipFill>
-          <a:blip r:embed="rId2"/>
-          <a:stretch>
-            <a:fillRect/>
-          </a:stretch>
-        </p:blipFill>
-        <p:spPr>
-          <a:xfrm>
-            <a:off x="6309360" y="2148840"/>
-            <a:ext cx="5394960" cy="2624328"/>
-          </a:xfrm>
-          <a:prstGeom prst="rect">
-            <a:avLst/>
-          </a:prstGeom>
-        </p:spPr>
-      </p:pic>
-      <p:sp>
-        <p:nvSpPr>
-          <p:cNvPr id="6" name="Text 2"/>
-          <p:cNvSpPr/>
-          <p:nvPr/>
-        </p:nvSpPr>
-        <p:spPr>
-          <a:xfrm>
-            <a:off x="685800" y="2286000"/>
-            <a:ext cx="5394960" cy="2377440"/>
-          </a:xfrm>
-          <a:prstGeom prst="rect">
-            <a:avLst/>
-          </a:prstGeom>
-          <a:noFill/>
-          <a:ln/>
-        </p:spPr>
-        <p:txBody>
-          <a:bodyPr wrap="square" rtlCol="0" anchor="t"/>
-          <a:lstStyle/>
-          <a:p>
-            <a:pPr marL="203200" indent="-203200">
-              <a:spcAft>
-                <a:spcPts val="900"/>
-              </a:spcAft>
-              <a:buSzPct val="100000"/>
-              <a:buChar char="•"/>
-            </a:pPr>
-            <a:r>
-              <a:rPr lang="en-US" sz="1450" dirty="0">
-                <a:solidFill>
-                  <a:srgbClr val="707070"/>
-                </a:solidFill>
-                <a:latin typeface="Arial" pitchFamily="34" charset="0"/>
-                <a:ea typeface="Arial" pitchFamily="34" charset="-122"/>
-                <a:cs typeface="Arial" pitchFamily="34" charset="-120"/>
-              </a:rPr>
-              <a:t>resample('QE').mean() rolls months into quarters.</a:t>
-            </a:r>
-            <a:endParaRPr lang="en-US" sz="1450" dirty="0"/>
-          </a:p>
-          <a:p>
-            <a:pPr marL="203200" indent="-203200">
-              <a:spcAft>
-                <a:spcPts val="900"/>
-              </a:spcAft>
-              <a:buSzPct val="100000"/>
-              <a:buChar char="•"/>
-            </a:pPr>
-            <a:r>
-              <a:rPr lang="en-US" sz="1450" dirty="0">
-                <a:solidFill>
-                  <a:srgbClr val="707070"/>
-                </a:solidFill>
-                <a:latin typeface="Arial" pitchFamily="34" charset="0"/>
-                <a:ea typeface="Arial" pitchFamily="34" charset="-122"/>
-                <a:cs typeface="Arial" pitchFamily="34" charset="-120"/>
-              </a:rPr>
-              <a:t>rolling(window=12).mean() is the moving average you know, over a full year it cancels the seasonal swing.</a:t>
-            </a:r>
-            <a:endParaRPr lang="en-US" sz="1450" dirty="0"/>
-          </a:p>
-          <a:p>
-            <a:pPr marL="203200" indent="-203200">
-              <a:buSzPct val="100000"/>
-              <a:buChar char="•"/>
-            </a:pPr>
-            <a:r>
-              <a:rPr lang="en-US" sz="1450" dirty="0">
-                <a:solidFill>
-                  <a:srgbClr val="707070"/>
-                </a:solidFill>
-                <a:latin typeface="Arial" pitchFamily="34" charset="0"/>
-                <a:ea typeface="Arial" pitchFamily="34" charset="-122"/>
-                <a:cs typeface="Arial" pitchFamily="34" charset="-120"/>
-              </a:rPr>
-              <a:t>The red line makes the underlying growth unmistakable.</a:t>
-            </a:r>
-            <a:endParaRPr lang="en-US" sz="1450" dirty="0"/>
-          </a:p>
-        </p:txBody>
-      </p:sp>
-      <p:sp>
-        <p:nvSpPr>
-          <p:cNvPr id="7" name="Shape 3"/>
-          <p:cNvSpPr/>
-          <p:nvPr/>
-        </p:nvSpPr>
-        <p:spPr>
-          <a:xfrm>
-            <a:off x="685800" y="4892040"/>
-            <a:ext cx="10835640" cy="1417320"/>
-          </a:xfrm>
-          <a:prstGeom prst="rect">
-            <a:avLst/>
-          </a:prstGeom>
-          <a:solidFill>
-            <a:srgbClr val="1F2120"/>
-          </a:solidFill>
-          <a:ln/>
-        </p:spPr>
-      </p:sp>
-      <p:sp>
-        <p:nvSpPr>
-          <p:cNvPr id="8" name="Shape 4"/>
-          <p:cNvSpPr/>
-          <p:nvPr/>
-        </p:nvSpPr>
-        <p:spPr>
-          <a:xfrm>
-            <a:off x="685800" y="4892040"/>
-            <a:ext cx="1783080" cy="384048"/>
-          </a:xfrm>
-          <a:prstGeom prst="rect">
-            <a:avLst/>
-          </a:prstGeom>
-          <a:solidFill>
-            <a:srgbClr val="CF3338"/>
-          </a:solidFill>
-          <a:ln/>
-        </p:spPr>
-      </p:sp>
-      <p:sp>
-        <p:nvSpPr>
-          <p:cNvPr id="9" name="Text 5"/>
-          <p:cNvSpPr/>
-          <p:nvPr/>
-        </p:nvSpPr>
-        <p:spPr>
-          <a:xfrm>
-            <a:off x="685800" y="4892040"/>
-            <a:ext cx="1783080" cy="384048"/>
-          </a:xfrm>
-          <a:prstGeom prst="rect">
-            <a:avLst/>
-          </a:prstGeom>
-          <a:noFill/>
-          <a:ln/>
-        </p:spPr>
-        <p:txBody>
-          <a:bodyPr wrap="square" lIns="0" tIns="0" rIns="0" bIns="0" rtlCol="0" anchor="ctr"/>
-          <a:lstStyle/>
-          <a:p>
-            <a:pPr algn="ctr" indent="0" marL="0">
-              <a:buNone/>
-            </a:pPr>
-            <a:r>
-              <a:rPr lang="en-US" sz="1150" b="1" spc="200" kern="0" dirty="0">
-                <a:solidFill>
-                  <a:srgbClr val="FFFFFF"/>
-                </a:solidFill>
-                <a:latin typeface="Arial" pitchFamily="34" charset="0"/>
-                <a:ea typeface="Arial" pitchFamily="34" charset="-122"/>
-                <a:cs typeface="Arial" pitchFamily="34" charset="-120"/>
-              </a:rPr>
-              <a:t>PY() CELL</a:t>
-            </a:r>
-            <a:endParaRPr lang="en-US" sz="1150" dirty="0"/>
-          </a:p>
-        </p:txBody>
-      </p:sp>
-      <p:sp>
-        <p:nvSpPr>
-          <p:cNvPr id="10" name="Text 6"/>
-          <p:cNvSpPr/>
-          <p:nvPr/>
-        </p:nvSpPr>
-        <p:spPr>
-          <a:xfrm>
-            <a:off x="941832" y="5422392"/>
-            <a:ext cx="10378440" cy="731520"/>
-          </a:xfrm>
-          <a:prstGeom prst="rect">
-            <a:avLst/>
-          </a:prstGeom>
-          <a:noFill/>
-          <a:ln/>
-        </p:spPr>
-        <p:txBody>
-          <a:bodyPr wrap="square" lIns="0" tIns="0" rIns="0" bIns="0" rtlCol="0" anchor="t"/>
-          <a:lstStyle/>
-          <a:p>
-            <a:pPr indent="0" marL="0">
-              <a:lnSpc>
-                <a:spcPct val="106000"/>
-              </a:lnSpc>
-              <a:buNone/>
-            </a:pPr>
-            <a:r>
-              <a:rPr lang="en-US" sz="1250" dirty="0">
-                <a:solidFill>
-                  <a:srgbClr val="E9E6DC"/>
-                </a:solidFill>
-                <a:latin typeface="Consolas" pitchFamily="34" charset="0"/>
-                <a:ea typeface="Consolas" pitchFamily="34" charset="-122"/>
-                <a:cs typeface="Consolas" pitchFamily="34" charset="-120"/>
-              </a:rPr>
-              <a:t>quarterly = df.resample('QE').mean()</a:t>
-            </a:r>
-            <a:endParaRPr lang="en-US" sz="1250" dirty="0"/>
-          </a:p>
-          <a:p>
-            <a:pPr indent="0" marL="0">
-              <a:lnSpc>
-                <a:spcPct val="106000"/>
-              </a:lnSpc>
-              <a:buNone/>
-            </a:pPr>
-            <a:r>
-              <a:rPr lang="en-US" sz="1250" dirty="0">
-                <a:solidFill>
-                  <a:srgbClr val="E9E6DC"/>
-                </a:solidFill>
-                <a:latin typeface="Consolas" pitchFamily="34" charset="0"/>
-                <a:ea typeface="Consolas" pitchFamily="34" charset="-122"/>
-                <a:cs typeface="Consolas" pitchFamily="34" charset="-120"/>
-              </a:rPr>
-              <a:t>df['rolling'] = df['revenue'].rolling(window=12).mean()</a:t>
-            </a:r>
-            <a:endParaRPr lang="en-US" sz="1250" dirty="0"/>
-          </a:p>
-        </p:txBody>
-      </p:sp>
-    </p:spTree>
-  </p:cSld>
-  <p:clrMapOvr>
-    <a:masterClrMapping/>
-  </p:clrMapOvr>
-</p:sld>
-</file>
-
-<file path=ppt/slides/slide9.xml><?xml version="1.0" encoding="utf-8"?>
-<p:sld xmlns:a="http://schemas.openxmlformats.org/drawingml/2006/main" xmlns:r="http://schemas.openxmlformats.org/officeDocument/2006/relationships" xmlns:p="http://schemas.openxmlformats.org/presentationml/2006/main">
-  <p:cSld name="Slide 9">
-    <p:bg>
-      <p:bgPr>
-        <a:solidFill>
-          <a:srgbClr val="EEECE1"/>
-        </a:solidFill>
-      </p:bgPr>
-    </p:bg>
-    <p:spTree>
-      <p:nvGrpSpPr>
-        <p:cNvPr id="1" name=""/>
-        <p:cNvGrpSpPr/>
-        <p:nvPr/>
-      </p:nvGrpSpPr>
-      <p:grpSpPr>
-        <a:xfrm>
-          <a:off x="0" y="0"/>
-          <a:ext cx="0" cy="0"/>
-          <a:chOff x="0" y="0"/>
-          <a:chExt cx="0" cy="0"/>
-        </a:xfrm>
-      </p:grpSpPr>
-      <p:pic>
-        <p:nvPicPr>
-          <p:cNvPr id="2" name="Image 0" descr="assets/stringfest-logo-dark.png">    </p:cNvPr>
-          <p:cNvPicPr>
-            <a:picLocks noChangeAspect="1"/>
-          </p:cNvPicPr>
-          <p:nvPr/>
-        </p:nvPicPr>
-        <p:blipFill>
-          <a:blip r:embed="rId1"/>
-          <a:srcRect l="9716" t="36914" r="6931" b="47496"/>
-          <a:stretch>
-            <a:fillRect/>
-          </a:stretch>
-        </p:blipFill>
-        <p:spPr>
-          <a:xfrm>
-            <a:off x="640080" y="457200"/>
-            <a:ext cx="2743200" cy="376288"/>
-          </a:xfrm>
-          <a:prstGeom prst="rect">
-            <a:avLst/>
-          </a:prstGeom>
-        </p:spPr>
-      </p:pic>
-      <p:sp>
-        <p:nvSpPr>
-          <p:cNvPr id="3" name="Text 0"/>
-          <p:cNvSpPr/>
-          <p:nvPr/>
-        </p:nvSpPr>
-        <p:spPr>
-          <a:xfrm>
-            <a:off x="685800" y="1051560"/>
-            <a:ext cx="10058400" cy="365760"/>
-          </a:xfrm>
-          <a:prstGeom prst="rect">
-            <a:avLst/>
-          </a:prstGeom>
-          <a:noFill/>
-          <a:ln/>
-        </p:spPr>
-        <p:txBody>
-          <a:bodyPr wrap="square" lIns="0" tIns="0" rIns="0" bIns="0" rtlCol="0" anchor="ctr"/>
-          <a:lstStyle/>
-          <a:p>
-            <a:pPr indent="0" marL="0">
-              <a:buNone/>
-            </a:pPr>
-            <a:r>
-              <a:rPr lang="en-US" sz="1300" b="1" spc="300" kern="0" dirty="0">
-                <a:solidFill>
-                  <a:srgbClr val="CF3338"/>
-                </a:solidFill>
-                <a:latin typeface="Arial" pitchFamily="34" charset="0"/>
-                <a:ea typeface="Arial" pitchFamily="34" charset="-122"/>
-                <a:cs typeface="Arial" pitchFamily="34" charset="-120"/>
-              </a:rPr>
-              <a:t>STEP 3, SEPARATE THE PIECES</a:t>
-            </a:r>
-            <a:endParaRPr lang="en-US" sz="1300" dirty="0"/>
-          </a:p>
-        </p:txBody>
-      </p:sp>
-      <p:sp>
-        <p:nvSpPr>
-          <p:cNvPr id="4" name="Text 1"/>
-          <p:cNvSpPr/>
-          <p:nvPr/>
-        </p:nvSpPr>
-        <p:spPr>
-          <a:xfrm>
-            <a:off x="685800" y="1417320"/>
-            <a:ext cx="10789920" cy="822960"/>
-          </a:xfrm>
-          <a:prstGeom prst="rect">
-            <a:avLst/>
-          </a:prstGeom>
-          <a:noFill/>
-          <a:ln/>
-        </p:spPr>
-        <p:txBody>
-          <a:bodyPr wrap="square" lIns="0" tIns="0" rIns="0" bIns="0" rtlCol="0" anchor="ctr"/>
-          <a:lstStyle/>
-          <a:p>
-            <a:pPr indent="0" marL="0">
+            <a:pPr marL="0" indent="0">
               <a:buNone/>
             </a:pPr>
             <a:r>
@@ -10917,6 +10593,13 @@
           </a:solidFill>
           <a:ln/>
         </p:spPr>
+        <p:txBody>
+          <a:bodyPr/>
+          <a:lstStyle/>
+          <a:p>
+            <a:endParaRPr lang="en-US"/>
+          </a:p>
+        </p:txBody>
       </p:sp>
       <p:sp>
         <p:nvSpPr>
@@ -10937,6 +10620,13 @@
           </a:solidFill>
           <a:ln/>
         </p:spPr>
+        <p:txBody>
+          <a:bodyPr/>
+          <a:lstStyle/>
+          <a:p>
+            <a:endParaRPr lang="en-US"/>
+          </a:p>
+        </p:txBody>
       </p:sp>
       <p:sp>
         <p:nvSpPr>
@@ -10959,11 +10649,11 @@
           <a:bodyPr wrap="square" lIns="0" tIns="0" rIns="0" bIns="0" rtlCol="0" anchor="ctr"/>
           <a:lstStyle/>
           <a:p>
-            <a:pPr algn="ctr" indent="0" marL="0">
-              <a:buNone/>
-            </a:pPr>
-            <a:r>
-              <a:rPr lang="en-US" sz="1150" b="1" spc="200" kern="0" dirty="0">
+            <a:pPr marL="0" indent="0" algn="ctr">
+              <a:buNone/>
+            </a:pPr>
+            <a:r>
+              <a:rPr lang="en-US" sz="1150" b="1" kern="0" spc="200" dirty="0">
                 <a:solidFill>
                   <a:srgbClr val="FFFFFF"/>
                 </a:solidFill>
@@ -10998,7 +10688,7 @@
           <a:bodyPr wrap="square" lIns="0" tIns="0" rIns="0" bIns="0" rtlCol="0" anchor="t"/>
           <a:lstStyle/>
           <a:p>
-            <a:pPr indent="0" marL="0">
+            <a:pPr marL="0" indent="0">
               <a:lnSpc>
                 <a:spcPct val="106000"/>
               </a:lnSpc>
@@ -11018,7 +10708,7 @@
             <a:endParaRPr lang="en-US" sz="1250" dirty="0"/>
           </a:p>
           <a:p>
-            <a:pPr indent="0" marL="0">
+            <a:pPr marL="0" indent="0">
               <a:lnSpc>
                 <a:spcPct val="106000"/>
               </a:lnSpc>
@@ -11038,7 +10728,7 @@
             <a:endParaRPr lang="en-US" sz="1250" dirty="0"/>
           </a:p>
           <a:p>
-            <a:pPr indent="0" marL="0">
+            <a:pPr marL="0" indent="0">
               <a:lnSpc>
                 <a:spcPct val="106000"/>
               </a:lnSpc>
@@ -11047,7 +10737,7 @@
             <a:endParaRPr lang="en-US" sz="1250" dirty="0"/>
           </a:p>
           <a:p>
-            <a:pPr indent="0" marL="0">
+            <a:pPr marL="0" indent="0">
               <a:lnSpc>
                 <a:spcPct val="106000"/>
               </a:lnSpc>
@@ -11067,7 +10757,7 @@
             <a:endParaRPr lang="en-US" sz="1250" dirty="0"/>
           </a:p>
           <a:p>
-            <a:pPr indent="0" marL="0">
+            <a:pPr marL="0" indent="0">
               <a:lnSpc>
                 <a:spcPct val="106000"/>
               </a:lnSpc>
@@ -11087,7 +10777,7 @@
             <a:endParaRPr lang="en-US" sz="1250" dirty="0"/>
           </a:p>
           <a:p>
-            <a:pPr indent="0" marL="0">
+            <a:pPr marL="0" indent="0">
               <a:lnSpc>
                 <a:spcPct val="106000"/>
               </a:lnSpc>
@@ -11107,7 +10797,7 @@
             <a:endParaRPr lang="en-US" sz="1250" dirty="0"/>
           </a:p>
           <a:p>
-            <a:pPr indent="0" marL="0">
+            <a:pPr marL="0" indent="0">
               <a:lnSpc>
                 <a:spcPct val="106000"/>
               </a:lnSpc>
@@ -11127,7 +10817,7 @@
             <a:endParaRPr lang="en-US" sz="1250" dirty="0"/>
           </a:p>
           <a:p>
-            <a:pPr indent="0" marL="0">
+            <a:pPr marL="0" indent="0">
               <a:lnSpc>
                 <a:spcPct val="106000"/>
               </a:lnSpc>
@@ -11449,4 +11139,319 @@
     </a:ext>
   </a:extLst>
 </a:theme>
+</file>
+
+<file path=ppt/theme/theme2.xml><?xml version="1.0" encoding="utf-8"?>
+<a:theme xmlns:a="http://schemas.openxmlformats.org/drawingml/2006/main" name="Office Theme">
+  <a:themeElements>
+    <a:clrScheme name="Office">
+      <a:dk1>
+        <a:sysClr val="windowText" lastClr="000000"/>
+      </a:dk1>
+      <a:lt1>
+        <a:sysClr val="window" lastClr="FFFFFF"/>
+      </a:lt1>
+      <a:dk2>
+        <a:srgbClr val="0E2841"/>
+      </a:dk2>
+      <a:lt2>
+        <a:srgbClr val="E8E8E8"/>
+      </a:lt2>
+      <a:accent1>
+        <a:srgbClr val="156082"/>
+      </a:accent1>
+      <a:accent2>
+        <a:srgbClr val="E97132"/>
+      </a:accent2>
+      <a:accent3>
+        <a:srgbClr val="196B24"/>
+      </a:accent3>
+      <a:accent4>
+        <a:srgbClr val="0F9ED5"/>
+      </a:accent4>
+      <a:accent5>
+        <a:srgbClr val="A02B93"/>
+      </a:accent5>
+      <a:accent6>
+        <a:srgbClr val="4EA72E"/>
+      </a:accent6>
+      <a:hlink>
+        <a:srgbClr val="467886"/>
+      </a:hlink>
+      <a:folHlink>
+        <a:srgbClr val="96607D"/>
+      </a:folHlink>
+    </a:clrScheme>
+    <a:fontScheme name="Office">
+      <a:majorFont>
+        <a:latin typeface="Aptos Display" panose="02110004020202020204"/>
+        <a:ea typeface=""/>
+        <a:cs typeface=""/>
+        <a:font script="Jpan" typeface="游ゴシック Light"/>
+        <a:font script="Hang" typeface="맑은 고딕"/>
+        <a:font script="Hans" typeface="等线 Light"/>
+        <a:font script="Hant" typeface="新細明體"/>
+        <a:font script="Arab" typeface="Times New Roman"/>
+        <a:font script="Hebr" typeface="Times New Roman"/>
+        <a:font script="Thai" typeface="Angsana New"/>
+        <a:font script="Ethi" typeface="Nyala"/>
+        <a:font script="Beng" typeface="Vrinda"/>
+        <a:font script="Gujr" typeface="Shruti"/>
+        <a:font script="Khmr" typeface="MoolBoran"/>
+        <a:font script="Knda" typeface="Tunga"/>
+        <a:font script="Guru" typeface="Raavi"/>
+        <a:font script="Cans" typeface="Euphemia"/>
+        <a:font script="Cher" typeface="Plantagenet Cherokee"/>
+        <a:font script="Yiii" typeface="Microsoft Yi Baiti"/>
+        <a:font script="Tibt" typeface="Microsoft Himalaya"/>
+        <a:font script="Thaa" typeface="MV Boli"/>
+        <a:font script="Deva" typeface="Mangal"/>
+        <a:font script="Telu" typeface="Gautami"/>
+        <a:font script="Taml" typeface="Latha"/>
+        <a:font script="Syrc" typeface="Estrangelo Edessa"/>
+        <a:font script="Orya" typeface="Kalinga"/>
+        <a:font script="Mlym" typeface="Kartika"/>
+        <a:font script="Laoo" typeface="DokChampa"/>
+        <a:font script="Sinh" typeface="Iskoola Pota"/>
+        <a:font script="Mong" typeface="Mongolian Baiti"/>
+        <a:font script="Viet" typeface="Times New Roman"/>
+        <a:font script="Uigh" typeface="Microsoft Uighur"/>
+        <a:font script="Geor" typeface="Sylfaen"/>
+        <a:font script="Armn" typeface="Arial"/>
+        <a:font script="Bugi" typeface="Leelawadee UI"/>
+        <a:font script="Bopo" typeface="Microsoft JhengHei"/>
+        <a:font script="Java" typeface="Javanese Text"/>
+        <a:font script="Lisu" typeface="Segoe UI"/>
+        <a:font script="Mymr" typeface="Myanmar Text"/>
+        <a:font script="Nkoo" typeface="Ebrima"/>
+        <a:font script="Olck" typeface="Nirmala UI"/>
+        <a:font script="Osma" typeface="Ebrima"/>
+        <a:font script="Phag" typeface="Phagspa"/>
+        <a:font script="Syrn" typeface="Estrangelo Edessa"/>
+        <a:font script="Syrj" typeface="Estrangelo Edessa"/>
+        <a:font script="Syre" typeface="Estrangelo Edessa"/>
+        <a:font script="Sora" typeface="Nirmala UI"/>
+        <a:font script="Tale" typeface="Microsoft Tai Le"/>
+        <a:font script="Talu" typeface="Microsoft New Tai Lue"/>
+        <a:font script="Tfng" typeface="Ebrima"/>
+      </a:majorFont>
+      <a:minorFont>
+        <a:latin typeface="Aptos" panose="02110004020202020204"/>
+        <a:ea typeface=""/>
+        <a:cs typeface=""/>
+        <a:font script="Jpan" typeface="游ゴシック"/>
+        <a:font script="Hang" typeface="맑은 고딕"/>
+        <a:font script="Hans" typeface="等线"/>
+        <a:font script="Hant" typeface="新細明體"/>
+        <a:font script="Arab" typeface="Arial"/>
+        <a:font script="Hebr" typeface="Arial"/>
+        <a:font script="Thai" typeface="Cordia New"/>
+        <a:font script="Ethi" typeface="Nyala"/>
+        <a:font script="Beng" typeface="Vrinda"/>
+        <a:font script="Gujr" typeface="Shruti"/>
+        <a:font script="Khmr" typeface="DaunPenh"/>
+        <a:font script="Knda" typeface="Tunga"/>
+        <a:font script="Guru" typeface="Raavi"/>
+        <a:font script="Cans" typeface="Euphemia"/>
+        <a:font script="Cher" typeface="Plantagenet Cherokee"/>
+        <a:font script="Yiii" typeface="Microsoft Yi Baiti"/>
+        <a:font script="Tibt" typeface="Microsoft Himalaya"/>
+        <a:font script="Thaa" typeface="MV Boli"/>
+        <a:font script="Deva" typeface="Mangal"/>
+        <a:font script="Telu" typeface="Gautami"/>
+        <a:font script="Taml" typeface="Latha"/>
+        <a:font script="Syrc" typeface="Estrangelo Edessa"/>
+        <a:font script="Orya" typeface="Kalinga"/>
+        <a:font script="Mlym" typeface="Kartika"/>
+        <a:font script="Laoo" typeface="DokChampa"/>
+        <a:font script="Sinh" typeface="Iskoola Pota"/>
+        <a:font script="Mong" typeface="Mongolian Baiti"/>
+        <a:font script="Viet" typeface="Arial"/>
+        <a:font script="Uigh" typeface="Microsoft Uighur"/>
+        <a:font script="Geor" typeface="Sylfaen"/>
+        <a:font script="Armn" typeface="Arial"/>
+        <a:font script="Bugi" typeface="Leelawadee UI"/>
+        <a:font script="Bopo" typeface="Microsoft JhengHei"/>
+        <a:font script="Java" typeface="Javanese Text"/>
+        <a:font script="Lisu" typeface="Segoe UI"/>
+        <a:font script="Mymr" typeface="Myanmar Text"/>
+        <a:font script="Nkoo" typeface="Ebrima"/>
+        <a:font script="Olck" typeface="Nirmala UI"/>
+        <a:font script="Osma" typeface="Ebrima"/>
+        <a:font script="Phag" typeface="Phagspa"/>
+        <a:font script="Syrn" typeface="Estrangelo Edessa"/>
+        <a:font script="Syrj" typeface="Estrangelo Edessa"/>
+        <a:font script="Syre" typeface="Estrangelo Edessa"/>
+        <a:font script="Sora" typeface="Nirmala UI"/>
+        <a:font script="Tale" typeface="Microsoft Tai Le"/>
+        <a:font script="Talu" typeface="Microsoft New Tai Lue"/>
+        <a:font script="Tfng" typeface="Ebrima"/>
+      </a:minorFont>
+    </a:fontScheme>
+    <a:fmtScheme name="Office">
+      <a:fillStyleLst>
+        <a:solidFill>
+          <a:schemeClr val="phClr"/>
+        </a:solidFill>
+        <a:gradFill rotWithShape="1">
+          <a:gsLst>
+            <a:gs pos="0">
+              <a:schemeClr val="phClr">
+                <a:lumMod val="110000"/>
+                <a:satMod val="105000"/>
+                <a:tint val="67000"/>
+              </a:schemeClr>
+            </a:gs>
+            <a:gs pos="50000">
+              <a:schemeClr val="phClr">
+                <a:lumMod val="105000"/>
+                <a:satMod val="103000"/>
+                <a:tint val="73000"/>
+              </a:schemeClr>
+            </a:gs>
+            <a:gs pos="100000">
+              <a:schemeClr val="phClr">
+                <a:lumMod val="105000"/>
+                <a:satMod val="109000"/>
+                <a:tint val="81000"/>
+              </a:schemeClr>
+            </a:gs>
+          </a:gsLst>
+          <a:lin ang="5400000" scaled="0"/>
+        </a:gradFill>
+        <a:gradFill rotWithShape="1">
+          <a:gsLst>
+            <a:gs pos="0">
+              <a:schemeClr val="phClr">
+                <a:satMod val="103000"/>
+                <a:lumMod val="102000"/>
+                <a:tint val="94000"/>
+              </a:schemeClr>
+            </a:gs>
+            <a:gs pos="50000">
+              <a:schemeClr val="phClr">
+                <a:satMod val="110000"/>
+                <a:lumMod val="100000"/>
+                <a:shade val="100000"/>
+              </a:schemeClr>
+            </a:gs>
+            <a:gs pos="100000">
+              <a:schemeClr val="phClr">
+                <a:lumMod val="99000"/>
+                <a:satMod val="120000"/>
+                <a:shade val="78000"/>
+              </a:schemeClr>
+            </a:gs>
+          </a:gsLst>
+          <a:lin ang="5400000" scaled="0"/>
+        </a:gradFill>
+      </a:fillStyleLst>
+      <a:lnStyleLst>
+        <a:ln w="12700" cap="flat" cmpd="sng" algn="ctr">
+          <a:solidFill>
+            <a:schemeClr val="phClr"/>
+          </a:solidFill>
+          <a:prstDash val="solid"/>
+          <a:miter lim="800000"/>
+        </a:ln>
+        <a:ln w="19050" cap="flat" cmpd="sng" algn="ctr">
+          <a:solidFill>
+            <a:schemeClr val="phClr"/>
+          </a:solidFill>
+          <a:prstDash val="solid"/>
+          <a:miter lim="800000"/>
+        </a:ln>
+        <a:ln w="25400" cap="flat" cmpd="sng" algn="ctr">
+          <a:solidFill>
+            <a:schemeClr val="phClr"/>
+          </a:solidFill>
+          <a:prstDash val="solid"/>
+          <a:miter lim="800000"/>
+        </a:ln>
+      </a:lnStyleLst>
+      <a:effectStyleLst>
+        <a:effectStyle>
+          <a:effectLst/>
+        </a:effectStyle>
+        <a:effectStyle>
+          <a:effectLst/>
+        </a:effectStyle>
+        <a:effectStyle>
+          <a:effectLst>
+            <a:outerShdw blurRad="57150" dist="19050" dir="5400000" algn="ctr" rotWithShape="0">
+              <a:srgbClr val="000000">
+                <a:alpha val="63000"/>
+              </a:srgbClr>
+            </a:outerShdw>
+          </a:effectLst>
+        </a:effectStyle>
+      </a:effectStyleLst>
+      <a:bgFillStyleLst>
+        <a:solidFill>
+          <a:schemeClr val="phClr"/>
+        </a:solidFill>
+        <a:solidFill>
+          <a:schemeClr val="phClr">
+            <a:tint val="95000"/>
+            <a:satMod val="170000"/>
+          </a:schemeClr>
+        </a:solidFill>
+        <a:gradFill rotWithShape="1">
+          <a:gsLst>
+            <a:gs pos="0">
+              <a:schemeClr val="phClr">
+                <a:tint val="93000"/>
+                <a:satMod val="150000"/>
+                <a:shade val="98000"/>
+                <a:lumMod val="102000"/>
+              </a:schemeClr>
+            </a:gs>
+            <a:gs pos="50000">
+              <a:schemeClr val="phClr">
+                <a:tint val="98000"/>
+                <a:satMod val="130000"/>
+                <a:shade val="90000"/>
+                <a:lumMod val="103000"/>
+              </a:schemeClr>
+            </a:gs>
+            <a:gs pos="100000">
+              <a:schemeClr val="phClr">
+                <a:shade val="63000"/>
+                <a:satMod val="120000"/>
+              </a:schemeClr>
+            </a:gs>
+          </a:gsLst>
+          <a:lin ang="5400000" scaled="0"/>
+        </a:gradFill>
+      </a:bgFillStyleLst>
+    </a:fmtScheme>
+  </a:themeElements>
+  <a:objectDefaults>
+    <a:lnDef>
+      <a:spPr/>
+      <a:bodyPr/>
+      <a:lstStyle/>
+      <a:style>
+        <a:lnRef idx="2">
+          <a:schemeClr val="accent1"/>
+        </a:lnRef>
+        <a:fillRef idx="0">
+          <a:schemeClr val="accent1"/>
+        </a:fillRef>
+        <a:effectRef idx="1">
+          <a:schemeClr val="accent1"/>
+        </a:effectRef>
+        <a:fontRef idx="minor">
+          <a:schemeClr val="tx1"/>
+        </a:fontRef>
+      </a:style>
+    </a:lnDef>
+  </a:objectDefaults>
+  <a:extraClrSchemeLst/>
+  <a:extLst>
+    <a:ext uri="{05A4C25C-085E-4340-85A3-A5531E510DB2}">
+      <thm15:themeFamily xmlns:thm15="http://schemas.microsoft.com/office/thememl/2012/main" name="Office Theme" id="{2E142A2C-CD16-42D6-873A-C26D2A0506FA}" vid="{1BDDFF52-6CD6-40A5-AB3C-68EB2F1E4D0A}"/>
+    </a:ext>
+  </a:extLst>
+</a:theme>
 </file>